--- a/Presentation/NIT Trichy Hackathon 1.pptx
+++ b/Presentation/NIT Trichy Hackathon 1.pptx
@@ -1,40 +1,31 @@
 
 <file path=ppt/presentation.xml><?xml version="1.0" encoding="utf-8"?>
-<p:presentation xmlns:a="http://schemas.openxmlformats.org/drawingml/2006/main" xmlns:r="http://schemas.openxmlformats.org/officeDocument/2006/relationships" xmlns:p="http://schemas.openxmlformats.org/presentationml/2006/main" saveSubsetFonts="1" embedTrueTypeFonts="true">
+<p:presentation xmlns:a="http://schemas.openxmlformats.org/drawingml/2006/main" xmlns:r="http://schemas.openxmlformats.org/officeDocument/2006/relationships" xmlns:p="http://schemas.openxmlformats.org/presentationml/2006/main" embedTrueTypeFonts="1" saveSubsetFonts="1">
   <p:sldMasterIdLst>
     <p:sldMasterId id="2147483648" r:id="rId1"/>
   </p:sldMasterIdLst>
   <p:sldIdLst>
-    <p:sldId id="256" r:id="rId6"/>
-    <p:sldId id="257" r:id="rId7"/>
-    <p:sldId id="258" r:id="rId8"/>
-    <p:sldId id="259" r:id="rId9"/>
-    <p:sldId id="260" r:id="rId10"/>
-    <p:sldId id="261" r:id="rId11"/>
-    <p:sldId id="262" r:id="rId12"/>
-    <p:sldId id="263" r:id="rId13"/>
-    <p:sldId id="264" r:id="rId14"/>
-    <p:sldId id="265" r:id="rId15"/>
-    <p:sldId id="266" r:id="rId16"/>
-    <p:sldId id="267" r:id="rId17"/>
-    <p:sldId id="268" r:id="rId18"/>
-    <p:sldId id="269" r:id="rId19"/>
-    <p:sldId id="270" r:id="rId20"/>
+    <p:sldId id="256" r:id="rId2"/>
+    <p:sldId id="257" r:id="rId3"/>
+    <p:sldId id="258" r:id="rId4"/>
+    <p:sldId id="259" r:id="rId5"/>
+    <p:sldId id="260" r:id="rId6"/>
+    <p:sldId id="261" r:id="rId7"/>
   </p:sldIdLst>
   <p:sldSz cx="18288000" cy="10287000"/>
   <p:notesSz cx="6858000" cy="9144000"/>
   <p:embeddedFontLst>
     <p:embeddedFont>
-      <p:font typeface="Noto Serif Ethiopic Condensed" charset="1" panose="02020502060505020204"/>
-      <p:regular r:id="rId21"/>
+      <p:font typeface="Canva Sans" panose="020B0604020202020204" charset="0"/>
+      <p:regular r:id="rId8"/>
     </p:embeddedFont>
     <p:embeddedFont>
-      <p:font typeface="Noto Serif Ethiopic Condensed Bold" charset="1" panose="02020502060505020204"/>
-      <p:regular r:id="rId22"/>
+      <p:font typeface="Noto Serif Ethiopic Condensed" panose="020B0604020202020204" charset="0"/>
+      <p:regular r:id="rId9"/>
     </p:embeddedFont>
     <p:embeddedFont>
-      <p:font typeface="Canva Sans" charset="1" panose="020B0503030501040103"/>
-      <p:regular r:id="rId23"/>
+      <p:font typeface="Noto Serif Ethiopic Condensed Bold" panose="020B0604020202020204" charset="0"/>
+      <p:regular r:id="rId10"/>
     </p:embeddedFont>
   </p:embeddedFontLst>
   <p:defaultTextStyle>
@@ -132,6 +123,22 @@
       </a:defRPr>
     </a:lvl9pPr>
   </p:defaultTextStyle>
+  <p:extLst>
+    <p:ext uri="{EFAFB233-063F-42B5-8137-9DF3F51BA10A}">
+      <p15:sldGuideLst xmlns:p15="http://schemas.microsoft.com/office/powerpoint/2012/main">
+        <p15:guide id="1" orient="horz" pos="2160">
+          <p15:clr>
+            <a:srgbClr val="A4A3A4"/>
+          </p15:clr>
+        </p15:guide>
+        <p15:guide id="2" pos="2880">
+          <p15:clr>
+            <a:srgbClr val="A4A3A4"/>
+          </p15:clr>
+        </p15:guide>
+      </p15:sldGuideLst>
+    </p:ext>
+  </p:extLst>
 </p:presentation>
 </file>
 
@@ -173,10 +180,9 @@
           <a:lstStyle/>
           <a:p>
             <a:r>
-              <a:rPr lang="en-US" smtClean="0"/>
+              <a:rPr lang="en-US"/>
               <a:t>Click to edit Master title style</a:t>
             </a:r>
-            <a:endParaRPr lang="en-US"/>
           </a:p>
         </p:txBody>
       </p:sp>
@@ -292,10 +298,9 @@
           </a:lstStyle>
           <a:p>
             <a:r>
-              <a:rPr lang="en-US" smtClean="0"/>
+              <a:rPr lang="en-US"/>
               <a:t>Click to edit Master subtitle style</a:t>
             </a:r>
-            <a:endParaRPr lang="en-US"/>
           </a:p>
         </p:txBody>
       </p:sp>
@@ -317,7 +322,7 @@
             <a:fld id="{1D8BD707-D9CF-40AE-B4C6-C98DA3205C09}" type="datetimeFigureOut">
               <a:rPr lang="en-US" smtClean="0"/>
               <a:pPr/>
-              <a:t>8/1/2011</a:t>
+              <a:t>8/2/2026</a:t>
             </a:fld>
             <a:endParaRPr lang="en-US"/>
           </a:p>
@@ -407,10 +412,9 @@
           <a:lstStyle/>
           <a:p>
             <a:r>
-              <a:rPr lang="en-US" smtClean="0"/>
+              <a:rPr lang="en-US"/>
               <a:t>Click to edit Master title style</a:t>
             </a:r>
-            <a:endParaRPr lang="en-US"/>
           </a:p>
         </p:txBody>
       </p:sp>
@@ -431,38 +435,37 @@
           <a:p>
             <a:pPr lvl="0"/>
             <a:r>
-              <a:rPr lang="en-US" smtClean="0"/>
+              <a:rPr lang="en-US"/>
               <a:t>Click to edit Master text styles</a:t>
             </a:r>
           </a:p>
           <a:p>
             <a:pPr lvl="1"/>
             <a:r>
-              <a:rPr lang="en-US" smtClean="0"/>
+              <a:rPr lang="en-US"/>
               <a:t>Second level</a:t>
             </a:r>
           </a:p>
           <a:p>
             <a:pPr lvl="2"/>
             <a:r>
-              <a:rPr lang="en-US" smtClean="0"/>
+              <a:rPr lang="en-US"/>
               <a:t>Third level</a:t>
             </a:r>
           </a:p>
           <a:p>
             <a:pPr lvl="3"/>
             <a:r>
-              <a:rPr lang="en-US" smtClean="0"/>
+              <a:rPr lang="en-US"/>
               <a:t>Fourth level</a:t>
             </a:r>
           </a:p>
           <a:p>
             <a:pPr lvl="4"/>
             <a:r>
-              <a:rPr lang="en-US" smtClean="0"/>
+              <a:rPr lang="en-US"/>
               <a:t>Fifth level</a:t>
             </a:r>
-            <a:endParaRPr lang="en-US"/>
           </a:p>
         </p:txBody>
       </p:sp>
@@ -484,7 +487,7 @@
             <a:fld id="{1D8BD707-D9CF-40AE-B4C6-C98DA3205C09}" type="datetimeFigureOut">
               <a:rPr lang="en-US" smtClean="0"/>
               <a:pPr/>
-              <a:t>8/1/2011</a:t>
+              <a:t>8/2/2026</a:t>
             </a:fld>
             <a:endParaRPr lang="en-US"/>
           </a:p>
@@ -579,10 +582,9 @@
           <a:lstStyle/>
           <a:p>
             <a:r>
-              <a:rPr lang="en-US" smtClean="0"/>
+              <a:rPr lang="en-US"/>
               <a:t>Click to edit Master title style</a:t>
             </a:r>
-            <a:endParaRPr lang="en-US"/>
           </a:p>
         </p:txBody>
       </p:sp>
@@ -608,38 +610,37 @@
           <a:p>
             <a:pPr lvl="0"/>
             <a:r>
-              <a:rPr lang="en-US" smtClean="0"/>
+              <a:rPr lang="en-US"/>
               <a:t>Click to edit Master text styles</a:t>
             </a:r>
           </a:p>
           <a:p>
             <a:pPr lvl="1"/>
             <a:r>
-              <a:rPr lang="en-US" smtClean="0"/>
+              <a:rPr lang="en-US"/>
               <a:t>Second level</a:t>
             </a:r>
           </a:p>
           <a:p>
             <a:pPr lvl="2"/>
             <a:r>
-              <a:rPr lang="en-US" smtClean="0"/>
+              <a:rPr lang="en-US"/>
               <a:t>Third level</a:t>
             </a:r>
           </a:p>
           <a:p>
             <a:pPr lvl="3"/>
             <a:r>
-              <a:rPr lang="en-US" smtClean="0"/>
+              <a:rPr lang="en-US"/>
               <a:t>Fourth level</a:t>
             </a:r>
           </a:p>
           <a:p>
             <a:pPr lvl="4"/>
             <a:r>
-              <a:rPr lang="en-US" smtClean="0"/>
+              <a:rPr lang="en-US"/>
               <a:t>Fifth level</a:t>
             </a:r>
-            <a:endParaRPr lang="en-US"/>
           </a:p>
         </p:txBody>
       </p:sp>
@@ -661,7 +662,7 @@
             <a:fld id="{1D8BD707-D9CF-40AE-B4C6-C98DA3205C09}" type="datetimeFigureOut">
               <a:rPr lang="en-US" smtClean="0"/>
               <a:pPr/>
-              <a:t>8/1/2011</a:t>
+              <a:t>8/2/2026</a:t>
             </a:fld>
             <a:endParaRPr lang="en-US"/>
           </a:p>
@@ -751,10 +752,9 @@
           <a:lstStyle/>
           <a:p>
             <a:r>
-              <a:rPr lang="en-US" smtClean="0"/>
+              <a:rPr lang="en-US"/>
               <a:t>Click to edit Master title style</a:t>
             </a:r>
-            <a:endParaRPr lang="en-US"/>
           </a:p>
         </p:txBody>
       </p:sp>
@@ -775,38 +775,37 @@
           <a:p>
             <a:pPr lvl="0"/>
             <a:r>
-              <a:rPr lang="en-US" smtClean="0"/>
+              <a:rPr lang="en-US"/>
               <a:t>Click to edit Master text styles</a:t>
             </a:r>
           </a:p>
           <a:p>
             <a:pPr lvl="1"/>
             <a:r>
-              <a:rPr lang="en-US" smtClean="0"/>
+              <a:rPr lang="en-US"/>
               <a:t>Second level</a:t>
             </a:r>
           </a:p>
           <a:p>
             <a:pPr lvl="2"/>
             <a:r>
-              <a:rPr lang="en-US" smtClean="0"/>
+              <a:rPr lang="en-US"/>
               <a:t>Third level</a:t>
             </a:r>
           </a:p>
           <a:p>
             <a:pPr lvl="3"/>
             <a:r>
-              <a:rPr lang="en-US" smtClean="0"/>
+              <a:rPr lang="en-US"/>
               <a:t>Fourth level</a:t>
             </a:r>
           </a:p>
           <a:p>
             <a:pPr lvl="4"/>
             <a:r>
-              <a:rPr lang="en-US" smtClean="0"/>
+              <a:rPr lang="en-US"/>
               <a:t>Fifth level</a:t>
             </a:r>
-            <a:endParaRPr lang="en-US"/>
           </a:p>
         </p:txBody>
       </p:sp>
@@ -828,7 +827,7 @@
             <a:fld id="{1D8BD707-D9CF-40AE-B4C6-C98DA3205C09}" type="datetimeFigureOut">
               <a:rPr lang="en-US" smtClean="0"/>
               <a:pPr/>
-              <a:t>8/1/2011</a:t>
+              <a:t>8/2/2026</a:t>
             </a:fld>
             <a:endParaRPr lang="en-US"/>
           </a:p>
@@ -927,10 +926,9 @@
           </a:lstStyle>
           <a:p>
             <a:r>
-              <a:rPr lang="en-US" smtClean="0"/>
+              <a:rPr lang="en-US"/>
               <a:t>Click to edit Master title style</a:t>
             </a:r>
-            <a:endParaRPr lang="en-US"/>
           </a:p>
         </p:txBody>
       </p:sp>
@@ -1047,7 +1045,7 @@
           <a:p>
             <a:pPr lvl="0"/>
             <a:r>
-              <a:rPr lang="en-US" smtClean="0"/>
+              <a:rPr lang="en-US"/>
               <a:t>Click to edit Master text styles</a:t>
             </a:r>
           </a:p>
@@ -1071,7 +1069,7 @@
             <a:fld id="{1D8BD707-D9CF-40AE-B4C6-C98DA3205C09}" type="datetimeFigureOut">
               <a:rPr lang="en-US" smtClean="0"/>
               <a:pPr/>
-              <a:t>8/1/2011</a:t>
+              <a:t>8/2/2026</a:t>
             </a:fld>
             <a:endParaRPr lang="en-US"/>
           </a:p>
@@ -1161,10 +1159,9 @@
           <a:lstStyle/>
           <a:p>
             <a:r>
-              <a:rPr lang="en-US" smtClean="0"/>
+              <a:rPr lang="en-US"/>
               <a:t>Click to edit Master title style</a:t>
             </a:r>
-            <a:endParaRPr lang="en-US"/>
           </a:p>
         </p:txBody>
       </p:sp>
@@ -1218,38 +1215,37 @@
           <a:p>
             <a:pPr lvl="0"/>
             <a:r>
-              <a:rPr lang="en-US" smtClean="0"/>
+              <a:rPr lang="en-US"/>
               <a:t>Click to edit Master text styles</a:t>
             </a:r>
           </a:p>
           <a:p>
             <a:pPr lvl="1"/>
             <a:r>
-              <a:rPr lang="en-US" smtClean="0"/>
+              <a:rPr lang="en-US"/>
               <a:t>Second level</a:t>
             </a:r>
           </a:p>
           <a:p>
             <a:pPr lvl="2"/>
             <a:r>
-              <a:rPr lang="en-US" smtClean="0"/>
+              <a:rPr lang="en-US"/>
               <a:t>Third level</a:t>
             </a:r>
           </a:p>
           <a:p>
             <a:pPr lvl="3"/>
             <a:r>
-              <a:rPr lang="en-US" smtClean="0"/>
+              <a:rPr lang="en-US"/>
               <a:t>Fourth level</a:t>
             </a:r>
           </a:p>
           <a:p>
             <a:pPr lvl="4"/>
             <a:r>
-              <a:rPr lang="en-US" smtClean="0"/>
+              <a:rPr lang="en-US"/>
               <a:t>Fifth level</a:t>
             </a:r>
-            <a:endParaRPr lang="en-US"/>
           </a:p>
         </p:txBody>
       </p:sp>
@@ -1303,38 +1299,37 @@
           <a:p>
             <a:pPr lvl="0"/>
             <a:r>
-              <a:rPr lang="en-US" smtClean="0"/>
+              <a:rPr lang="en-US"/>
               <a:t>Click to edit Master text styles</a:t>
             </a:r>
           </a:p>
           <a:p>
             <a:pPr lvl="1"/>
             <a:r>
-              <a:rPr lang="en-US" smtClean="0"/>
+              <a:rPr lang="en-US"/>
               <a:t>Second level</a:t>
             </a:r>
           </a:p>
           <a:p>
             <a:pPr lvl="2"/>
             <a:r>
-              <a:rPr lang="en-US" smtClean="0"/>
+              <a:rPr lang="en-US"/>
               <a:t>Third level</a:t>
             </a:r>
           </a:p>
           <a:p>
             <a:pPr lvl="3"/>
             <a:r>
-              <a:rPr lang="en-US" smtClean="0"/>
+              <a:rPr lang="en-US"/>
               <a:t>Fourth level</a:t>
             </a:r>
           </a:p>
           <a:p>
             <a:pPr lvl="4"/>
             <a:r>
-              <a:rPr lang="en-US" smtClean="0"/>
+              <a:rPr lang="en-US"/>
               <a:t>Fifth level</a:t>
             </a:r>
-            <a:endParaRPr lang="en-US"/>
           </a:p>
         </p:txBody>
       </p:sp>
@@ -1356,7 +1351,7 @@
             <a:fld id="{1D8BD707-D9CF-40AE-B4C6-C98DA3205C09}" type="datetimeFigureOut">
               <a:rPr lang="en-US" smtClean="0"/>
               <a:pPr/>
-              <a:t>8/1/2011</a:t>
+              <a:t>8/2/2026</a:t>
             </a:fld>
             <a:endParaRPr lang="en-US"/>
           </a:p>
@@ -1450,10 +1445,9 @@
           </a:lstStyle>
           <a:p>
             <a:r>
-              <a:rPr lang="en-US" smtClean="0"/>
+              <a:rPr lang="en-US"/>
               <a:t>Click to edit Master title style</a:t>
             </a:r>
-            <a:endParaRPr lang="en-US"/>
           </a:p>
         </p:txBody>
       </p:sp>
@@ -1516,7 +1510,7 @@
           <a:p>
             <a:pPr lvl="0"/>
             <a:r>
-              <a:rPr lang="en-US" smtClean="0"/>
+              <a:rPr lang="en-US"/>
               <a:t>Click to edit Master text styles</a:t>
             </a:r>
           </a:p>
@@ -1572,38 +1566,37 @@
           <a:p>
             <a:pPr lvl="0"/>
             <a:r>
-              <a:rPr lang="en-US" smtClean="0"/>
+              <a:rPr lang="en-US"/>
               <a:t>Click to edit Master text styles</a:t>
             </a:r>
           </a:p>
           <a:p>
             <a:pPr lvl="1"/>
             <a:r>
-              <a:rPr lang="en-US" smtClean="0"/>
+              <a:rPr lang="en-US"/>
               <a:t>Second level</a:t>
             </a:r>
           </a:p>
           <a:p>
             <a:pPr lvl="2"/>
             <a:r>
-              <a:rPr lang="en-US" smtClean="0"/>
+              <a:rPr lang="en-US"/>
               <a:t>Third level</a:t>
             </a:r>
           </a:p>
           <a:p>
             <a:pPr lvl="3"/>
             <a:r>
-              <a:rPr lang="en-US" smtClean="0"/>
+              <a:rPr lang="en-US"/>
               <a:t>Fourth level</a:t>
             </a:r>
           </a:p>
           <a:p>
             <a:pPr lvl="4"/>
             <a:r>
-              <a:rPr lang="en-US" smtClean="0"/>
+              <a:rPr lang="en-US"/>
               <a:t>Fifth level</a:t>
             </a:r>
-            <a:endParaRPr lang="en-US"/>
           </a:p>
         </p:txBody>
       </p:sp>
@@ -1666,7 +1659,7 @@
           <a:p>
             <a:pPr lvl="0"/>
             <a:r>
-              <a:rPr lang="en-US" smtClean="0"/>
+              <a:rPr lang="en-US"/>
               <a:t>Click to edit Master text styles</a:t>
             </a:r>
           </a:p>
@@ -1722,38 +1715,37 @@
           <a:p>
             <a:pPr lvl="0"/>
             <a:r>
-              <a:rPr lang="en-US" smtClean="0"/>
+              <a:rPr lang="en-US"/>
               <a:t>Click to edit Master text styles</a:t>
             </a:r>
           </a:p>
           <a:p>
             <a:pPr lvl="1"/>
             <a:r>
-              <a:rPr lang="en-US" smtClean="0"/>
+              <a:rPr lang="en-US"/>
               <a:t>Second level</a:t>
             </a:r>
           </a:p>
           <a:p>
             <a:pPr lvl="2"/>
             <a:r>
-              <a:rPr lang="en-US" smtClean="0"/>
+              <a:rPr lang="en-US"/>
               <a:t>Third level</a:t>
             </a:r>
           </a:p>
           <a:p>
             <a:pPr lvl="3"/>
             <a:r>
-              <a:rPr lang="en-US" smtClean="0"/>
+              <a:rPr lang="en-US"/>
               <a:t>Fourth level</a:t>
             </a:r>
           </a:p>
           <a:p>
             <a:pPr lvl="4"/>
             <a:r>
-              <a:rPr lang="en-US" smtClean="0"/>
+              <a:rPr lang="en-US"/>
               <a:t>Fifth level</a:t>
             </a:r>
-            <a:endParaRPr lang="en-US"/>
           </a:p>
         </p:txBody>
       </p:sp>
@@ -1775,7 +1767,7 @@
             <a:fld id="{1D8BD707-D9CF-40AE-B4C6-C98DA3205C09}" type="datetimeFigureOut">
               <a:rPr lang="en-US" smtClean="0"/>
               <a:pPr/>
-              <a:t>8/1/2011</a:t>
+              <a:t>8/2/2026</a:t>
             </a:fld>
             <a:endParaRPr lang="en-US"/>
           </a:p>
@@ -1865,10 +1857,9 @@
           <a:lstStyle/>
           <a:p>
             <a:r>
-              <a:rPr lang="en-US" smtClean="0"/>
+              <a:rPr lang="en-US"/>
               <a:t>Click to edit Master title style</a:t>
             </a:r>
-            <a:endParaRPr lang="en-US"/>
           </a:p>
         </p:txBody>
       </p:sp>
@@ -1890,7 +1881,7 @@
             <a:fld id="{1D8BD707-D9CF-40AE-B4C6-C98DA3205C09}" type="datetimeFigureOut">
               <a:rPr lang="en-US" smtClean="0"/>
               <a:pPr/>
-              <a:t>8/1/2011</a:t>
+              <a:t>8/2/2026</a:t>
             </a:fld>
             <a:endParaRPr lang="en-US"/>
           </a:p>
@@ -1982,7 +1973,7 @@
             <a:fld id="{1D8BD707-D9CF-40AE-B4C6-C98DA3205C09}" type="datetimeFigureOut">
               <a:rPr lang="en-US" smtClean="0"/>
               <a:pPr/>
-              <a:t>8/1/2011</a:t>
+              <a:t>8/2/2026</a:t>
             </a:fld>
             <a:endParaRPr lang="en-US"/>
           </a:p>
@@ -2081,10 +2072,9 @@
           </a:lstStyle>
           <a:p>
             <a:r>
-              <a:rPr lang="en-US" smtClean="0"/>
+              <a:rPr lang="en-US"/>
               <a:t>Click to edit Master title style</a:t>
             </a:r>
-            <a:endParaRPr lang="en-US"/>
           </a:p>
         </p:txBody>
       </p:sp>
@@ -2138,38 +2128,37 @@
           <a:p>
             <a:pPr lvl="0"/>
             <a:r>
-              <a:rPr lang="en-US" smtClean="0"/>
+              <a:rPr lang="en-US"/>
               <a:t>Click to edit Master text styles</a:t>
             </a:r>
           </a:p>
           <a:p>
             <a:pPr lvl="1"/>
             <a:r>
-              <a:rPr lang="en-US" smtClean="0"/>
+              <a:rPr lang="en-US"/>
               <a:t>Second level</a:t>
             </a:r>
           </a:p>
           <a:p>
             <a:pPr lvl="2"/>
             <a:r>
-              <a:rPr lang="en-US" smtClean="0"/>
+              <a:rPr lang="en-US"/>
               <a:t>Third level</a:t>
             </a:r>
           </a:p>
           <a:p>
             <a:pPr lvl="3"/>
             <a:r>
-              <a:rPr lang="en-US" smtClean="0"/>
+              <a:rPr lang="en-US"/>
               <a:t>Fourth level</a:t>
             </a:r>
           </a:p>
           <a:p>
             <a:pPr lvl="4"/>
             <a:r>
-              <a:rPr lang="en-US" smtClean="0"/>
+              <a:rPr lang="en-US"/>
               <a:t>Fifth level</a:t>
             </a:r>
-            <a:endParaRPr lang="en-US"/>
           </a:p>
         </p:txBody>
       </p:sp>
@@ -2232,7 +2221,7 @@
           <a:p>
             <a:pPr lvl="0"/>
             <a:r>
-              <a:rPr lang="en-US" smtClean="0"/>
+              <a:rPr lang="en-US"/>
               <a:t>Click to edit Master text styles</a:t>
             </a:r>
           </a:p>
@@ -2256,7 +2245,7 @@
             <a:fld id="{1D8BD707-D9CF-40AE-B4C6-C98DA3205C09}" type="datetimeFigureOut">
               <a:rPr lang="en-US" smtClean="0"/>
               <a:pPr/>
-              <a:t>8/1/2011</a:t>
+              <a:t>8/2/2026</a:t>
             </a:fld>
             <a:endParaRPr lang="en-US"/>
           </a:p>
@@ -2355,10 +2344,9 @@
           </a:lstStyle>
           <a:p>
             <a:r>
-              <a:rPr lang="en-US" smtClean="0"/>
+              <a:rPr lang="en-US"/>
               <a:t>Click to edit Master title style</a:t>
             </a:r>
-            <a:endParaRPr lang="en-US"/>
           </a:p>
         </p:txBody>
       </p:sp>
@@ -2482,7 +2470,7 @@
           <a:p>
             <a:pPr lvl="0"/>
             <a:r>
-              <a:rPr lang="en-US" smtClean="0"/>
+              <a:rPr lang="en-US"/>
               <a:t>Click to edit Master text styles</a:t>
             </a:r>
           </a:p>
@@ -2506,7 +2494,7 @@
             <a:fld id="{1D8BD707-D9CF-40AE-B4C6-C98DA3205C09}" type="datetimeFigureOut">
               <a:rPr lang="en-US" smtClean="0"/>
               <a:pPr/>
-              <a:t>8/1/2011</a:t>
+              <a:t>8/2/2026</a:t>
             </a:fld>
             <a:endParaRPr lang="en-US"/>
           </a:p>
@@ -2611,10 +2599,9 @@
           <a:lstStyle/>
           <a:p>
             <a:r>
-              <a:rPr lang="en-US" smtClean="0"/>
+              <a:rPr lang="en-US"/>
               <a:t>Click to edit Master title style</a:t>
             </a:r>
-            <a:endParaRPr lang="en-US"/>
           </a:p>
         </p:txBody>
       </p:sp>
@@ -2645,38 +2632,37 @@
           <a:p>
             <a:pPr lvl="0"/>
             <a:r>
-              <a:rPr lang="en-US" smtClean="0"/>
+              <a:rPr lang="en-US"/>
               <a:t>Click to edit Master text styles</a:t>
             </a:r>
           </a:p>
           <a:p>
             <a:pPr lvl="1"/>
             <a:r>
-              <a:rPr lang="en-US" smtClean="0"/>
+              <a:rPr lang="en-US"/>
               <a:t>Second level</a:t>
             </a:r>
           </a:p>
           <a:p>
             <a:pPr lvl="2"/>
             <a:r>
-              <a:rPr lang="en-US" smtClean="0"/>
+              <a:rPr lang="en-US"/>
               <a:t>Third level</a:t>
             </a:r>
           </a:p>
           <a:p>
             <a:pPr lvl="3"/>
             <a:r>
-              <a:rPr lang="en-US" smtClean="0"/>
+              <a:rPr lang="en-US"/>
               <a:t>Fourth level</a:t>
             </a:r>
           </a:p>
           <a:p>
             <a:pPr lvl="4"/>
             <a:r>
-              <a:rPr lang="en-US" smtClean="0"/>
+              <a:rPr lang="en-US"/>
               <a:t>Fifth level</a:t>
             </a:r>
-            <a:endParaRPr lang="en-US"/>
           </a:p>
         </p:txBody>
       </p:sp>
@@ -2716,7 +2702,7 @@
             <a:fld id="{1D8BD707-D9CF-40AE-B4C6-C98DA3205C09}" type="datetimeFigureOut">
               <a:rPr lang="en-US" smtClean="0"/>
               <a:pPr/>
-              <a:t>8/1/2011</a:t>
+              <a:t>8/2/2026</a:t>
             </a:fld>
             <a:endParaRPr lang="en-US"/>
           </a:p>
@@ -3071,13 +3057,14 @@
 </file>
 
 <file path=ppt/slides/slide1.xml><?xml version="1.0" encoding="utf-8"?>
-<p:sld xmlns:p="http://schemas.openxmlformats.org/presentationml/2006/main" xmlns:a="http://schemas.openxmlformats.org/drawingml/2006/main" xmlns:r="http://schemas.openxmlformats.org/officeDocument/2006/relationships">
+<p:sld xmlns:a="http://schemas.openxmlformats.org/drawingml/2006/main" xmlns:r="http://schemas.openxmlformats.org/officeDocument/2006/relationships" xmlns:p="http://schemas.openxmlformats.org/presentationml/2006/main">
   <p:cSld>
     <p:bg>
       <p:bgPr>
         <a:solidFill>
           <a:srgbClr val="EBF2FA"/>
         </a:solidFill>
+        <a:effectLst/>
       </p:bgPr>
     </p:bg>
     <p:spTree>
@@ -3096,12 +3083,12 @@
       </p:grpSpPr>
       <p:sp>
         <p:nvSpPr>
-          <p:cNvPr name="Freeform 2" id="2"/>
+          <p:cNvPr id="2" name="Freeform 2"/>
           <p:cNvSpPr/>
           <p:nvPr/>
         </p:nvSpPr>
         <p:spPr>
-          <a:xfrm flipH="false" flipV="false" rot="0">
+          <a:xfrm>
             <a:off x="1458608" y="4308645"/>
             <a:ext cx="8579796" cy="4504393"/>
           </a:xfrm>
@@ -3110,9 +3097,9 @@
             <a:gdLst/>
             <a:ahLst/>
             <a:cxnLst/>
-            <a:rect r="r" b="b" t="t" l="l"/>
+            <a:rect l="l" t="t" r="r" b="b"/>
             <a:pathLst>
-              <a:path h="4504393" w="8579796">
+              <a:path w="8579796" h="4504393">
                 <a:moveTo>
                   <a:pt x="0" y="0"/>
                 </a:moveTo>
@@ -3135,19 +3122,26 @@
           <a:blipFill>
             <a:blip r:embed="rId2"/>
             <a:stretch>
-              <a:fillRect l="0" t="0" r="0" b="0"/>
+              <a:fillRect/>
             </a:stretch>
           </a:blipFill>
         </p:spPr>
-      </p:sp>
-      <p:sp>
-        <p:nvSpPr>
-          <p:cNvPr name="Freeform 3" id="3"/>
+        <p:txBody>
+          <a:bodyPr/>
+          <a:lstStyle/>
+          <a:p>
+            <a:endParaRPr lang="en-IN"/>
+          </a:p>
+        </p:txBody>
+      </p:sp>
+      <p:sp>
+        <p:nvSpPr>
+          <p:cNvPr id="3" name="Freeform 3"/>
           <p:cNvSpPr/>
           <p:nvPr/>
         </p:nvSpPr>
         <p:spPr>
-          <a:xfrm flipH="false" flipV="false" rot="0">
+          <a:xfrm>
             <a:off x="10856997" y="1166885"/>
             <a:ext cx="6215790" cy="4656191"/>
           </a:xfrm>
@@ -3156,9 +3150,9 @@
             <a:gdLst/>
             <a:ahLst/>
             <a:cxnLst/>
-            <a:rect r="r" b="b" t="t" l="l"/>
+            <a:rect l="l" t="t" r="r" b="b"/>
             <a:pathLst>
-              <a:path h="4656191" w="6215790">
+              <a:path w="6215790" h="4656191">
                 <a:moveTo>
                   <a:pt x="0" y="0"/>
                 </a:moveTo>
@@ -3181,19 +3175,26 @@
           <a:blipFill>
             <a:blip r:embed="rId3"/>
             <a:stretch>
-              <a:fillRect l="0" t="0" r="0" b="0"/>
+              <a:fillRect/>
             </a:stretch>
           </a:blipFill>
         </p:spPr>
-      </p:sp>
-      <p:sp>
-        <p:nvSpPr>
-          <p:cNvPr name="TextBox 4" id="4"/>
-          <p:cNvSpPr txBox="true"/>
+        <p:txBody>
+          <a:bodyPr/>
+          <a:lstStyle/>
+          <a:p>
+            <a:endParaRPr lang="en-IN"/>
+          </a:p>
+        </p:txBody>
+      </p:sp>
+      <p:sp>
+        <p:nvSpPr>
+          <p:cNvPr id="4" name="TextBox 4"/>
+          <p:cNvSpPr txBox="1"/>
           <p:nvPr/>
         </p:nvSpPr>
         <p:spPr>
-          <a:xfrm rot="0">
+          <a:xfrm>
             <a:off x="1028700" y="2074226"/>
             <a:ext cx="12000694" cy="1623695"/>
           </a:xfrm>
@@ -3202,7 +3203,7 @@
           </a:prstGeom>
         </p:spPr>
         <p:txBody>
-          <a:bodyPr anchor="t" rtlCol="false" tIns="0" lIns="0" bIns="0" rIns="0">
+          <a:bodyPr lIns="0" tIns="0" rIns="0" bIns="0" rtlCol="0" anchor="t">
             <a:spAutoFit/>
           </a:bodyPr>
           <a:lstStyle/>
@@ -3244,31 +3245,19 @@
                 <a:cs typeface="Noto Serif Ethiopic Condensed"/>
                 <a:sym typeface="Noto Serif Ethiopic Condensed"/>
               </a:rPr>
-              <a:t>Ancient Meth</a:t>
-            </a:r>
-            <a:r>
-              <a:rPr lang="en-US" sz="4700">
-                <a:solidFill>
-                  <a:srgbClr val="000000"/>
-                </a:solidFill>
-                <a:latin typeface="Noto Serif Ethiopic Condensed"/>
-                <a:ea typeface="Noto Serif Ethiopic Condensed"/>
-                <a:cs typeface="Noto Serif Ethiopic Condensed"/>
-                <a:sym typeface="Noto Serif Ethiopic Condensed"/>
-              </a:rPr>
-              <a:t>od meeting Modern Day </a:t>
-            </a:r>
-          </a:p>
-        </p:txBody>
-      </p:sp>
-      <p:sp>
-        <p:nvSpPr>
-          <p:cNvPr name="TextBox 5" id="5"/>
-          <p:cNvSpPr txBox="true"/>
+              <a:t>Ancient Method meeting Modern Day </a:t>
+            </a:r>
+          </a:p>
+        </p:txBody>
+      </p:sp>
+      <p:sp>
+        <p:nvSpPr>
+          <p:cNvPr id="5" name="TextBox 5"/>
+          <p:cNvSpPr txBox="1"/>
           <p:nvPr/>
         </p:nvSpPr>
         <p:spPr>
-          <a:xfrm rot="0">
+          <a:xfrm>
             <a:off x="11100393" y="6666769"/>
             <a:ext cx="6773062" cy="3174978"/>
           </a:xfrm>
@@ -3277,7 +3266,7 @@
           </a:prstGeom>
         </p:spPr>
         <p:txBody>
-          <a:bodyPr anchor="t" rtlCol="false" tIns="0" lIns="0" bIns="0" rIns="0">
+          <a:bodyPr lIns="0" tIns="0" rIns="0" bIns="0" rtlCol="0" anchor="t">
             <a:spAutoFit/>
           </a:bodyPr>
           <a:lstStyle/>
@@ -3297,19 +3286,7 @@
                 <a:cs typeface="Noto Serif Ethiopic Condensed"/>
                 <a:sym typeface="Noto Serif Ethiopic Condensed"/>
               </a:rPr>
-              <a:t>Team Id:</a:t>
-            </a:r>
-            <a:r>
-              <a:rPr lang="en-US" sz="2582">
-                <a:solidFill>
-                  <a:srgbClr val="000000"/>
-                </a:solidFill>
-                <a:latin typeface="Noto Serif Ethiopic Condensed"/>
-                <a:ea typeface="Noto Serif Ethiopic Condensed"/>
-                <a:cs typeface="Noto Serif Ethiopic Condensed"/>
-                <a:sym typeface="Noto Serif Ethiopic Condensed"/>
-              </a:rPr>
-              <a:t> H26EDU03</a:t>
+              <a:t>Team Id: H26EDU03</a:t>
             </a:r>
           </a:p>
           <a:p>
@@ -3413,6 +3390,15 @@
                 <a:spcPts val="3616"/>
               </a:lnSpc>
             </a:pPr>
+            <a:endParaRPr lang="en-US" sz="2582">
+              <a:solidFill>
+                <a:srgbClr val="000000"/>
+              </a:solidFill>
+              <a:latin typeface="Noto Serif Ethiopic Condensed"/>
+              <a:ea typeface="Noto Serif Ethiopic Condensed"/>
+              <a:cs typeface="Noto Serif Ethiopic Condensed"/>
+              <a:sym typeface="Noto Serif Ethiopic Condensed"/>
+            </a:endParaRPr>
           </a:p>
         </p:txBody>
       </p:sp>
@@ -3424,14 +3410,15 @@
 </p:sld>
 </file>
 
-<file path=ppt/slides/slide10.xml><?xml version="1.0" encoding="utf-8"?>
-<p:sld xmlns:p="http://schemas.openxmlformats.org/presentationml/2006/main" xmlns:a="http://schemas.openxmlformats.org/drawingml/2006/main" xmlns:r="http://schemas.openxmlformats.org/officeDocument/2006/relationships" show="false">
+<file path=ppt/slides/slide2.xml><?xml version="1.0" encoding="utf-8"?>
+<p:sld xmlns:a="http://schemas.openxmlformats.org/drawingml/2006/main" xmlns:r="http://schemas.openxmlformats.org/officeDocument/2006/relationships" xmlns:p="http://schemas.openxmlformats.org/presentationml/2006/main">
   <p:cSld>
     <p:bg>
       <p:bgPr>
         <a:solidFill>
           <a:srgbClr val="EBF2FA"/>
         </a:solidFill>
+        <a:effectLst/>
       </p:bgPr>
     </p:bg>
     <p:spTree>
@@ -3450,282 +3437,12 @@
       </p:grpSpPr>
       <p:sp>
         <p:nvSpPr>
-          <p:cNvPr name="TextBox 2" id="2"/>
-          <p:cNvSpPr txBox="true"/>
-          <p:nvPr/>
-        </p:nvSpPr>
-        <p:spPr>
-          <a:xfrm rot="0">
-            <a:off x="2293048" y="942975"/>
-            <a:ext cx="7986356" cy="795021"/>
-          </a:xfrm>
-          <a:prstGeom prst="rect">
-            <a:avLst/>
-          </a:prstGeom>
-        </p:spPr>
-        <p:txBody>
-          <a:bodyPr anchor="t" rtlCol="false" tIns="0" lIns="0" bIns="0" rIns="0">
-            <a:spAutoFit/>
-          </a:bodyPr>
-          <a:lstStyle/>
-          <a:p>
-            <a:pPr algn="ctr">
-              <a:lnSpc>
-                <a:spcPts val="6579"/>
-              </a:lnSpc>
-              <a:spcBef>
-                <a:spcPct val="0"/>
-              </a:spcBef>
-            </a:pPr>
-            <a:r>
-              <a:rPr lang="en-US" sz="4699">
-                <a:solidFill>
-                  <a:srgbClr val="000000"/>
-                </a:solidFill>
-                <a:latin typeface="Noto Serif Ethiopic Condensed"/>
-                <a:ea typeface="Noto Serif Ethiopic Condensed"/>
-                <a:cs typeface="Noto Serif Ethiopic Condensed"/>
-                <a:sym typeface="Noto Serif Ethiopic Condensed"/>
-              </a:rPr>
-              <a:t>Market Opportunity &amp; TAM size </a:t>
-            </a:r>
-          </a:p>
-        </p:txBody>
-      </p:sp>
-      <p:sp>
-        <p:nvSpPr>
-          <p:cNvPr name="TextBox 3" id="3"/>
-          <p:cNvSpPr txBox="true"/>
-          <p:nvPr/>
-        </p:nvSpPr>
-        <p:spPr>
-          <a:xfrm rot="0">
-            <a:off x="2524616" y="2688741"/>
-            <a:ext cx="14052789" cy="5212080"/>
-          </a:xfrm>
-          <a:prstGeom prst="rect">
-            <a:avLst/>
-          </a:prstGeom>
-        </p:spPr>
-        <p:txBody>
-          <a:bodyPr anchor="t" rtlCol="false" tIns="0" lIns="0" bIns="0" rIns="0">
-            <a:spAutoFit/>
-          </a:bodyPr>
-          <a:lstStyle/>
-          <a:p>
-            <a:pPr algn="l">
-              <a:lnSpc>
-                <a:spcPts val="4620"/>
-              </a:lnSpc>
-              <a:spcBef>
-                <a:spcPct val="0"/>
-              </a:spcBef>
-            </a:pPr>
-            <a:r>
-              <a:rPr lang="en-US" b="true" sz="3300">
-                <a:solidFill>
-                  <a:srgbClr val="000000"/>
-                </a:solidFill>
-                <a:latin typeface="Noto Serif Ethiopic Condensed Bold"/>
-                <a:ea typeface="Noto Serif Ethiopic Condensed Bold"/>
-                <a:cs typeface="Noto Serif Ethiopic Condensed Bold"/>
-                <a:sym typeface="Noto Serif Ethiopic Condensed Bold"/>
-              </a:rPr>
-              <a:t>Mark</a:t>
-            </a:r>
-            <a:r>
-              <a:rPr lang="en-US" b="true" sz="3300">
-                <a:solidFill>
-                  <a:srgbClr val="000000"/>
-                </a:solidFill>
-                <a:latin typeface="Noto Serif Ethiopic Condensed Bold"/>
-                <a:ea typeface="Noto Serif Ethiopic Condensed Bold"/>
-                <a:cs typeface="Noto Serif Ethiopic Condensed Bold"/>
-                <a:sym typeface="Noto Serif Ethiopic Condensed Bold"/>
-              </a:rPr>
-              <a:t>et Opportunity</a:t>
-            </a:r>
-          </a:p>
-          <a:p>
-            <a:pPr algn="l" marL="712470" indent="-356235" lvl="1">
-              <a:lnSpc>
-                <a:spcPts val="4620"/>
-              </a:lnSpc>
-              <a:spcBef>
-                <a:spcPct val="0"/>
-              </a:spcBef>
-              <a:buFont typeface="Arial"/>
-              <a:buChar char="•"/>
-            </a:pPr>
-            <a:r>
-              <a:rPr lang="en-US" sz="3300">
-                <a:solidFill>
-                  <a:srgbClr val="000000"/>
-                </a:solidFill>
-                <a:latin typeface="Noto Serif Ethiopic Condensed"/>
-                <a:ea typeface="Noto Serif Ethiopic Condensed"/>
-                <a:cs typeface="Noto Serif Ethiopic Condensed"/>
-                <a:sym typeface="Noto Serif Ethiopic Condensed"/>
-              </a:rPr>
-              <a:t>India has ~140 million farmers, of which only ~30% have formal credit access.</a:t>
-            </a:r>
-          </a:p>
-          <a:p>
-            <a:pPr algn="l" marL="712470" indent="-356235" lvl="1">
-              <a:lnSpc>
-                <a:spcPts val="4620"/>
-              </a:lnSpc>
-              <a:buFont typeface="Arial"/>
-              <a:buChar char="•"/>
-            </a:pPr>
-            <a:r>
-              <a:rPr lang="en-US" sz="3300">
-                <a:solidFill>
-                  <a:srgbClr val="000000"/>
-                </a:solidFill>
-                <a:latin typeface="Noto Serif Ethiopic Condensed"/>
-                <a:ea typeface="Noto Serif Ethiopic Condensed"/>
-                <a:cs typeface="Noto Serif Ethiopic Condensed"/>
-                <a:sym typeface="Noto Serif Ethiopic Condensed"/>
-              </a:rPr>
-              <a:t>Agri-fintech market in India projected</a:t>
-            </a:r>
-            <a:r>
-              <a:rPr lang="en-US" sz="3300">
-                <a:solidFill>
-                  <a:srgbClr val="000000"/>
-                </a:solidFill>
-                <a:latin typeface="Noto Serif Ethiopic Condensed"/>
-                <a:ea typeface="Noto Serif Ethiopic Condensed"/>
-                <a:cs typeface="Noto Serif Ethiopic Condensed"/>
-                <a:sym typeface="Noto Serif Ethiopic Condensed"/>
-              </a:rPr>
-              <a:t> to</a:t>
-            </a:r>
-            <a:r>
-              <a:rPr lang="en-US" sz="3300">
-                <a:solidFill>
-                  <a:srgbClr val="000000"/>
-                </a:solidFill>
-                <a:latin typeface="Noto Serif Ethiopic Condensed"/>
-                <a:ea typeface="Noto Serif Ethiopic Condensed"/>
-                <a:cs typeface="Noto Serif Ethiopic Condensed"/>
-                <a:sym typeface="Noto Serif Ethiopic Condensed"/>
-              </a:rPr>
-              <a:t> re</a:t>
-            </a:r>
-            <a:r>
-              <a:rPr lang="en-US" sz="3300">
-                <a:solidFill>
-                  <a:srgbClr val="000000"/>
-                </a:solidFill>
-                <a:latin typeface="Noto Serif Ethiopic Condensed"/>
-                <a:ea typeface="Noto Serif Ethiopic Condensed"/>
-                <a:cs typeface="Noto Serif Ethiopic Condensed"/>
-                <a:sym typeface="Noto Serif Ethiopic Condensed"/>
-              </a:rPr>
-              <a:t>ach USD 24 billion by 2030.</a:t>
-            </a:r>
-          </a:p>
-          <a:p>
-            <a:pPr algn="l">
-              <a:lnSpc>
-                <a:spcPts val="4620"/>
-              </a:lnSpc>
-            </a:pPr>
-            <a:r>
-              <a:rPr lang="en-US" b="true" sz="3300">
-                <a:solidFill>
-                  <a:srgbClr val="000000"/>
-                </a:solidFill>
-                <a:latin typeface="Noto Serif Ethiopic Condensed Bold"/>
-                <a:ea typeface="Noto Serif Ethiopic Condensed Bold"/>
-                <a:cs typeface="Noto Serif Ethiopic Condensed Bold"/>
-                <a:sym typeface="Noto Serif Ethiopic Condensed Bold"/>
-              </a:rPr>
-              <a:t>Adjacent Opportunities</a:t>
-            </a:r>
-          </a:p>
-          <a:p>
-            <a:pPr algn="l" marL="712470" indent="-356235" lvl="1">
-              <a:lnSpc>
-                <a:spcPts val="4620"/>
-              </a:lnSpc>
-              <a:buFont typeface="Arial"/>
-              <a:buChar char="•"/>
-            </a:pPr>
-            <a:r>
-              <a:rPr lang="en-US" sz="3300">
-                <a:solidFill>
-                  <a:srgbClr val="000000"/>
-                </a:solidFill>
-                <a:latin typeface="Noto Serif Ethiopic Condensed"/>
-                <a:ea typeface="Noto Serif Ethiopic Condensed"/>
-                <a:cs typeface="Noto Serif Ethiopic Condensed"/>
-                <a:sym typeface="Noto Serif Ethiopic Condensed"/>
-              </a:rPr>
-              <a:t>Crop insurance risk modeling</a:t>
-            </a:r>
-          </a:p>
-          <a:p>
-            <a:pPr algn="l" marL="712470" indent="-356235" lvl="1">
-              <a:lnSpc>
-                <a:spcPts val="4620"/>
-              </a:lnSpc>
-              <a:buFont typeface="Arial"/>
-              <a:buChar char="•"/>
-            </a:pPr>
-            <a:r>
-              <a:rPr lang="en-US" sz="3300">
-                <a:solidFill>
-                  <a:srgbClr val="000000"/>
-                </a:solidFill>
-                <a:latin typeface="Noto Serif Ethiopic Condensed"/>
-                <a:ea typeface="Noto Serif Ethiopic Condensed"/>
-                <a:cs typeface="Noto Serif Ethiopic Condensed"/>
-                <a:sym typeface="Noto Serif Ethiopic Condensed"/>
-              </a:rPr>
-              <a:t>Microloan management for rural businesses</a:t>
-            </a:r>
-          </a:p>
-          <a:p>
-            <a:pPr algn="l" marL="712470" indent="-356235" lvl="1">
-              <a:lnSpc>
-                <a:spcPts val="4620"/>
-              </a:lnSpc>
-              <a:buFont typeface="Arial"/>
-              <a:buChar char="•"/>
-            </a:pPr>
-            <a:r>
-              <a:rPr lang="en-US" sz="3300">
-                <a:solidFill>
-                  <a:srgbClr val="000000"/>
-                </a:solidFill>
-                <a:latin typeface="Noto Serif Ethiopic Condensed"/>
-                <a:ea typeface="Noto Serif Ethiopic Condensed"/>
-                <a:cs typeface="Noto Serif Ethiopic Condensed"/>
-                <a:sym typeface="Noto Serif Ethiopic Condensed"/>
-              </a:rPr>
-              <a:t>Government welfare and subsidy verification systems</a:t>
-            </a:r>
-          </a:p>
-          <a:p>
-            <a:pPr algn="l">
-              <a:lnSpc>
-                <a:spcPts val="4620"/>
-              </a:lnSpc>
-            </a:pPr>
-          </a:p>
-        </p:txBody>
-      </p:sp>
-      <p:sp>
-        <p:nvSpPr>
-          <p:cNvPr name="Freeform 4" id="4"/>
+          <p:cNvPr id="2" name="Freeform 2"/>
           <p:cNvSpPr/>
           <p:nvPr/>
         </p:nvSpPr>
         <p:spPr>
-          <a:xfrm flipH="false" flipV="false" rot="0">
+          <a:xfrm>
             <a:off x="1028700" y="501777"/>
             <a:ext cx="2528697" cy="191832"/>
           </a:xfrm>
@@ -3734,9 +3451,9 @@
             <a:gdLst/>
             <a:ahLst/>
             <a:cxnLst/>
-            <a:rect r="r" b="b" t="t" l="l"/>
+            <a:rect l="l" t="t" r="r" b="b"/>
             <a:pathLst>
-              <a:path h="191832" w="2528697">
+              <a:path w="2528697" h="191832">
                 <a:moveTo>
                   <a:pt x="0" y="0"/>
                 </a:moveTo>
@@ -3759,10 +3476,461 @@
           <a:blipFill>
             <a:blip r:embed="rId2"/>
             <a:stretch>
-              <a:fillRect l="0" t="0" r="0" b="0"/>
+              <a:fillRect/>
             </a:stretch>
           </a:blipFill>
         </p:spPr>
+        <p:txBody>
+          <a:bodyPr/>
+          <a:lstStyle/>
+          <a:p>
+            <a:endParaRPr lang="en-IN"/>
+          </a:p>
+        </p:txBody>
+      </p:sp>
+      <p:sp>
+        <p:nvSpPr>
+          <p:cNvPr id="3" name="Freeform 3"/>
+          <p:cNvSpPr/>
+          <p:nvPr/>
+        </p:nvSpPr>
+        <p:spPr>
+          <a:xfrm>
+            <a:off x="1791039" y="1269013"/>
+            <a:ext cx="984969" cy="984969"/>
+          </a:xfrm>
+          <a:custGeom>
+            <a:avLst/>
+            <a:gdLst/>
+            <a:ahLst/>
+            <a:cxnLst/>
+            <a:rect l="l" t="t" r="r" b="b"/>
+            <a:pathLst>
+              <a:path w="984969" h="984969">
+                <a:moveTo>
+                  <a:pt x="0" y="0"/>
+                </a:moveTo>
+                <a:lnTo>
+                  <a:pt x="984969" y="0"/>
+                </a:lnTo>
+                <a:lnTo>
+                  <a:pt x="984969" y="984969"/>
+                </a:lnTo>
+                <a:lnTo>
+                  <a:pt x="0" y="984969"/>
+                </a:lnTo>
+                <a:lnTo>
+                  <a:pt x="0" y="0"/>
+                </a:lnTo>
+                <a:close/>
+              </a:path>
+            </a:pathLst>
+          </a:custGeom>
+          <a:blipFill>
+            <a:blip r:embed="rId3"/>
+            <a:stretch>
+              <a:fillRect/>
+            </a:stretch>
+          </a:blipFill>
+        </p:spPr>
+        <p:txBody>
+          <a:bodyPr/>
+          <a:lstStyle/>
+          <a:p>
+            <a:endParaRPr lang="en-IN"/>
+          </a:p>
+        </p:txBody>
+      </p:sp>
+      <p:sp>
+        <p:nvSpPr>
+          <p:cNvPr id="4" name="Freeform 4"/>
+          <p:cNvSpPr/>
+          <p:nvPr/>
+        </p:nvSpPr>
+        <p:spPr>
+          <a:xfrm>
+            <a:off x="1872156" y="4476750"/>
+            <a:ext cx="841785" cy="841785"/>
+          </a:xfrm>
+          <a:custGeom>
+            <a:avLst/>
+            <a:gdLst/>
+            <a:ahLst/>
+            <a:cxnLst/>
+            <a:rect l="l" t="t" r="r" b="b"/>
+            <a:pathLst>
+              <a:path w="841785" h="841785">
+                <a:moveTo>
+                  <a:pt x="0" y="0"/>
+                </a:moveTo>
+                <a:lnTo>
+                  <a:pt x="841785" y="0"/>
+                </a:lnTo>
+                <a:lnTo>
+                  <a:pt x="841785" y="841785"/>
+                </a:lnTo>
+                <a:lnTo>
+                  <a:pt x="0" y="841785"/>
+                </a:lnTo>
+                <a:lnTo>
+                  <a:pt x="0" y="0"/>
+                </a:lnTo>
+                <a:close/>
+              </a:path>
+            </a:pathLst>
+          </a:custGeom>
+          <a:blipFill>
+            <a:blip r:embed="rId4"/>
+            <a:stretch>
+              <a:fillRect/>
+            </a:stretch>
+          </a:blipFill>
+        </p:spPr>
+        <p:txBody>
+          <a:bodyPr/>
+          <a:lstStyle/>
+          <a:p>
+            <a:endParaRPr lang="en-IN"/>
+          </a:p>
+        </p:txBody>
+      </p:sp>
+      <p:sp>
+        <p:nvSpPr>
+          <p:cNvPr id="5" name="Freeform 5"/>
+          <p:cNvSpPr/>
+          <p:nvPr/>
+        </p:nvSpPr>
+        <p:spPr>
+          <a:xfrm>
+            <a:off x="1842787" y="6798602"/>
+            <a:ext cx="900523" cy="900523"/>
+          </a:xfrm>
+          <a:custGeom>
+            <a:avLst/>
+            <a:gdLst/>
+            <a:ahLst/>
+            <a:cxnLst/>
+            <a:rect l="l" t="t" r="r" b="b"/>
+            <a:pathLst>
+              <a:path w="900523" h="900523">
+                <a:moveTo>
+                  <a:pt x="0" y="0"/>
+                </a:moveTo>
+                <a:lnTo>
+                  <a:pt x="900523" y="0"/>
+                </a:lnTo>
+                <a:lnTo>
+                  <a:pt x="900523" y="900523"/>
+                </a:lnTo>
+                <a:lnTo>
+                  <a:pt x="0" y="900523"/>
+                </a:lnTo>
+                <a:lnTo>
+                  <a:pt x="0" y="0"/>
+                </a:lnTo>
+                <a:close/>
+              </a:path>
+            </a:pathLst>
+          </a:custGeom>
+          <a:blipFill>
+            <a:blip r:embed="rId5"/>
+            <a:stretch>
+              <a:fillRect/>
+            </a:stretch>
+          </a:blipFill>
+        </p:spPr>
+        <p:txBody>
+          <a:bodyPr/>
+          <a:lstStyle/>
+          <a:p>
+            <a:endParaRPr lang="en-IN"/>
+          </a:p>
+        </p:txBody>
+      </p:sp>
+      <p:sp>
+        <p:nvSpPr>
+          <p:cNvPr id="6" name="TextBox 6"/>
+          <p:cNvSpPr txBox="1"/>
+          <p:nvPr/>
+        </p:nvSpPr>
+        <p:spPr>
+          <a:xfrm>
+            <a:off x="2958366" y="4646663"/>
+            <a:ext cx="12173317" cy="2306955"/>
+          </a:xfrm>
+          <a:prstGeom prst="rect">
+            <a:avLst/>
+          </a:prstGeom>
+        </p:spPr>
+        <p:txBody>
+          <a:bodyPr lIns="0" tIns="0" rIns="0" bIns="0" rtlCol="0" anchor="t">
+            <a:spAutoFit/>
+          </a:bodyPr>
+          <a:lstStyle/>
+          <a:p>
+            <a:pPr algn="l">
+              <a:lnSpc>
+                <a:spcPts val="4620"/>
+              </a:lnSpc>
+            </a:pPr>
+            <a:r>
+              <a:rPr lang="en-US" sz="3300" b="1">
+                <a:solidFill>
+                  <a:srgbClr val="000000"/>
+                </a:solidFill>
+                <a:latin typeface="Noto Serif Ethiopic Condensed Bold"/>
+                <a:ea typeface="Noto Serif Ethiopic Condensed Bold"/>
+                <a:cs typeface="Noto Serif Ethiopic Condensed Bold"/>
+                <a:sym typeface="Noto Serif Ethiopic Condensed Bold"/>
+              </a:rPr>
+              <a:t>Objective:</a:t>
+            </a:r>
+          </a:p>
+          <a:p>
+            <a:pPr marL="712470" lvl="1" indent="-356235" algn="l">
+              <a:lnSpc>
+                <a:spcPts val="4620"/>
+              </a:lnSpc>
+              <a:buFont typeface="Arial"/>
+              <a:buChar char="•"/>
+            </a:pPr>
+            <a:r>
+              <a:rPr lang="en-US" sz="3300">
+                <a:solidFill>
+                  <a:srgbClr val="000000"/>
+                </a:solidFill>
+                <a:latin typeface="Noto Serif Ethiopic Condensed"/>
+                <a:ea typeface="Noto Serif Ethiopic Condensed"/>
+                <a:cs typeface="Noto Serif Ethiopic Condensed"/>
+                <a:sym typeface="Noto Serif Ethiopic Condensed"/>
+              </a:rPr>
+              <a:t>Democratize elite-level, personalized mentorship at consumer scale.</a:t>
+            </a:r>
+          </a:p>
+          <a:p>
+            <a:pPr algn="l">
+              <a:lnSpc>
+                <a:spcPts val="4620"/>
+              </a:lnSpc>
+            </a:pPr>
+            <a:endParaRPr lang="en-US" sz="3300">
+              <a:solidFill>
+                <a:srgbClr val="000000"/>
+              </a:solidFill>
+              <a:latin typeface="Noto Serif Ethiopic Condensed"/>
+              <a:ea typeface="Noto Serif Ethiopic Condensed"/>
+              <a:cs typeface="Noto Serif Ethiopic Condensed"/>
+              <a:sym typeface="Noto Serif Ethiopic Condensed"/>
+            </a:endParaRPr>
+          </a:p>
+        </p:txBody>
+      </p:sp>
+      <p:sp>
+        <p:nvSpPr>
+          <p:cNvPr id="7" name="TextBox 7"/>
+          <p:cNvSpPr txBox="1"/>
+          <p:nvPr/>
+        </p:nvSpPr>
+        <p:spPr>
+          <a:xfrm>
+            <a:off x="2923831" y="1263975"/>
+            <a:ext cx="9096375" cy="795020"/>
+          </a:xfrm>
+          <a:prstGeom prst="rect">
+            <a:avLst/>
+          </a:prstGeom>
+        </p:spPr>
+        <p:txBody>
+          <a:bodyPr lIns="0" tIns="0" rIns="0" bIns="0" rtlCol="0" anchor="t">
+            <a:spAutoFit/>
+          </a:bodyPr>
+          <a:lstStyle/>
+          <a:p>
+            <a:pPr algn="ctr">
+              <a:lnSpc>
+                <a:spcPts val="6580"/>
+              </a:lnSpc>
+              <a:spcBef>
+                <a:spcPct val="0"/>
+              </a:spcBef>
+            </a:pPr>
+            <a:r>
+              <a:rPr lang="en-US" sz="4700">
+                <a:solidFill>
+                  <a:srgbClr val="000000"/>
+                </a:solidFill>
+                <a:latin typeface="Noto Serif Ethiopic Condensed"/>
+                <a:ea typeface="Noto Serif Ethiopic Condensed"/>
+                <a:cs typeface="Noto Serif Ethiopic Condensed"/>
+                <a:sym typeface="Noto Serif Ethiopic Condensed"/>
+              </a:rPr>
+              <a:t>Problem Definition &amp; Its Significance</a:t>
+            </a:r>
+          </a:p>
+        </p:txBody>
+      </p:sp>
+      <p:sp>
+        <p:nvSpPr>
+          <p:cNvPr id="8" name="TextBox 8"/>
+          <p:cNvSpPr txBox="1"/>
+          <p:nvPr/>
+        </p:nvSpPr>
+        <p:spPr>
+          <a:xfrm>
+            <a:off x="2676181" y="2444482"/>
+            <a:ext cx="13396253" cy="1725930"/>
+          </a:xfrm>
+          <a:prstGeom prst="rect">
+            <a:avLst/>
+          </a:prstGeom>
+        </p:spPr>
+        <p:txBody>
+          <a:bodyPr lIns="0" tIns="0" rIns="0" bIns="0" rtlCol="0" anchor="t">
+            <a:spAutoFit/>
+          </a:bodyPr>
+          <a:lstStyle/>
+          <a:p>
+            <a:pPr marL="712470" lvl="1" indent="-356235" algn="l">
+              <a:lnSpc>
+                <a:spcPts val="4620"/>
+              </a:lnSpc>
+              <a:buFont typeface="Arial"/>
+              <a:buChar char="•"/>
+            </a:pPr>
+            <a:r>
+              <a:rPr lang="en-US" sz="3300">
+                <a:solidFill>
+                  <a:srgbClr val="000000"/>
+                </a:solidFill>
+                <a:latin typeface="Noto Serif Ethiopic Condensed"/>
+                <a:ea typeface="Noto Serif Ethiopic Condensed"/>
+                <a:cs typeface="Noto Serif Ethiopic Condensed"/>
+                <a:sym typeface="Noto Serif Ethiopic Condensed"/>
+              </a:rPr>
+              <a:t>Historically, high-quality, 1-on-1 tutoring is an exclusive privilege.</a:t>
+            </a:r>
+          </a:p>
+          <a:p>
+            <a:pPr marL="712470" lvl="1" indent="-356235" algn="l">
+              <a:lnSpc>
+                <a:spcPts val="4620"/>
+              </a:lnSpc>
+              <a:buFont typeface="Arial"/>
+              <a:buChar char="•"/>
+            </a:pPr>
+            <a:r>
+              <a:rPr lang="en-US" sz="3300">
+                <a:solidFill>
+                  <a:srgbClr val="000000"/>
+                </a:solidFill>
+                <a:latin typeface="Noto Serif Ethiopic Condensed"/>
+                <a:ea typeface="Noto Serif Ethiopic Condensed"/>
+                <a:cs typeface="Noto Serif Ethiopic Condensed"/>
+                <a:sym typeface="Noto Serif Ethiopic Condensed"/>
+              </a:rPr>
+              <a:t>Mass education systems face impossible student-to-teacher ratios.</a:t>
+            </a:r>
+          </a:p>
+          <a:p>
+            <a:pPr marL="712470" lvl="1" indent="-356235" algn="l">
+              <a:lnSpc>
+                <a:spcPts val="4620"/>
+              </a:lnSpc>
+              <a:buFont typeface="Arial"/>
+              <a:buChar char="•"/>
+            </a:pPr>
+            <a:r>
+              <a:rPr lang="en-US" sz="3300">
+                <a:solidFill>
+                  <a:srgbClr val="000000"/>
+                </a:solidFill>
+                <a:latin typeface="Noto Serif Ethiopic Condensed"/>
+                <a:ea typeface="Noto Serif Ethiopic Condensed"/>
+                <a:cs typeface="Noto Serif Ethiopic Condensed"/>
+                <a:sym typeface="Noto Serif Ethiopic Condensed"/>
+              </a:rPr>
+              <a:t>Result: Millions fall behind in foundational logic, literacy, and numeracy.</a:t>
+            </a:r>
+          </a:p>
+        </p:txBody>
+      </p:sp>
+      <p:sp>
+        <p:nvSpPr>
+          <p:cNvPr id="9" name="TextBox 9"/>
+          <p:cNvSpPr txBox="1"/>
+          <p:nvPr/>
+        </p:nvSpPr>
+        <p:spPr>
+          <a:xfrm>
+            <a:off x="2911735" y="6979920"/>
+            <a:ext cx="14706706" cy="2306955"/>
+          </a:xfrm>
+          <a:prstGeom prst="rect">
+            <a:avLst/>
+          </a:prstGeom>
+        </p:spPr>
+        <p:txBody>
+          <a:bodyPr lIns="0" tIns="0" rIns="0" bIns="0" rtlCol="0" anchor="t">
+            <a:spAutoFit/>
+          </a:bodyPr>
+          <a:lstStyle/>
+          <a:p>
+            <a:pPr algn="l">
+              <a:lnSpc>
+                <a:spcPts val="4619"/>
+              </a:lnSpc>
+            </a:pPr>
+            <a:r>
+              <a:rPr lang="en-US" sz="3299" b="1">
+                <a:solidFill>
+                  <a:srgbClr val="000000"/>
+                </a:solidFill>
+                <a:latin typeface="Noto Serif Ethiopic Condensed Bold"/>
+                <a:ea typeface="Noto Serif Ethiopic Condensed Bold"/>
+                <a:cs typeface="Noto Serif Ethiopic Condensed Bold"/>
+                <a:sym typeface="Noto Serif Ethiopic Condensed Bold"/>
+              </a:rPr>
+              <a:t>Approach:</a:t>
+            </a:r>
+          </a:p>
+          <a:p>
+            <a:pPr marL="712470" lvl="1" indent="-356235" algn="l">
+              <a:lnSpc>
+                <a:spcPts val="4619"/>
+              </a:lnSpc>
+              <a:buFont typeface="Arial"/>
+              <a:buChar char="•"/>
+            </a:pPr>
+            <a:r>
+              <a:rPr lang="en-US" sz="3299">
+                <a:solidFill>
+                  <a:srgbClr val="000000"/>
+                </a:solidFill>
+                <a:latin typeface="Noto Serif Ethiopic Condensed"/>
+                <a:ea typeface="Noto Serif Ethiopic Condensed"/>
+                <a:cs typeface="Noto Serif Ethiopic Condensed"/>
+                <a:sym typeface="Noto Serif Ethiopic Condensed"/>
+              </a:rPr>
+              <a:t>Build a multi-agent AI tutor that dynamically adapts its teaching metaphor, regional dialect, and difficulty based on the learner's age and passions.</a:t>
+            </a:r>
+          </a:p>
+          <a:p>
+            <a:pPr algn="l">
+              <a:lnSpc>
+                <a:spcPts val="4619"/>
+              </a:lnSpc>
+            </a:pPr>
+            <a:endParaRPr lang="en-US" sz="3299">
+              <a:solidFill>
+                <a:srgbClr val="000000"/>
+              </a:solidFill>
+              <a:latin typeface="Noto Serif Ethiopic Condensed"/>
+              <a:ea typeface="Noto Serif Ethiopic Condensed"/>
+              <a:cs typeface="Noto Serif Ethiopic Condensed"/>
+              <a:sym typeface="Noto Serif Ethiopic Condensed"/>
+            </a:endParaRPr>
+          </a:p>
+        </p:txBody>
       </p:sp>
     </p:spTree>
   </p:cSld>
@@ -3772,14 +3940,15 @@
 </p:sld>
 </file>
 
-<file path=ppt/slides/slide11.xml><?xml version="1.0" encoding="utf-8"?>
-<p:sld xmlns:p="http://schemas.openxmlformats.org/presentationml/2006/main" xmlns:a="http://schemas.openxmlformats.org/drawingml/2006/main" xmlns:r="http://schemas.openxmlformats.org/officeDocument/2006/relationships" show="false">
+<file path=ppt/slides/slide3.xml><?xml version="1.0" encoding="utf-8"?>
+<p:sld xmlns:a="http://schemas.openxmlformats.org/drawingml/2006/main" xmlns:r="http://schemas.openxmlformats.org/officeDocument/2006/relationships" xmlns:p="http://schemas.openxmlformats.org/presentationml/2006/main">
   <p:cSld>
     <p:bg>
       <p:bgPr>
         <a:solidFill>
           <a:srgbClr val="EBF2FA"/>
         </a:solidFill>
+        <a:effectLst/>
       </p:bgPr>
     </p:bg>
     <p:spTree>
@@ -3798,308 +3967,12 @@
       </p:grpSpPr>
       <p:sp>
         <p:nvSpPr>
-          <p:cNvPr name="TextBox 2" id="2"/>
-          <p:cNvSpPr txBox="true"/>
-          <p:nvPr/>
-        </p:nvSpPr>
-        <p:spPr>
-          <a:xfrm rot="0">
-            <a:off x="2293048" y="942975"/>
-            <a:ext cx="5089089" cy="795021"/>
-          </a:xfrm>
-          <a:prstGeom prst="rect">
-            <a:avLst/>
-          </a:prstGeom>
-        </p:spPr>
-        <p:txBody>
-          <a:bodyPr anchor="t" rtlCol="false" tIns="0" lIns="0" bIns="0" rIns="0">
-            <a:spAutoFit/>
-          </a:bodyPr>
-          <a:lstStyle/>
-          <a:p>
-            <a:pPr algn="ctr">
-              <a:lnSpc>
-                <a:spcPts val="6579"/>
-              </a:lnSpc>
-              <a:spcBef>
-                <a:spcPct val="0"/>
-              </a:spcBef>
-            </a:pPr>
-            <a:r>
-              <a:rPr lang="en-US" sz="4699">
-                <a:solidFill>
-                  <a:srgbClr val="000000"/>
-                </a:solidFill>
-                <a:latin typeface="Noto Serif Ethiopic Condensed"/>
-                <a:ea typeface="Noto Serif Ethiopic Condensed"/>
-                <a:cs typeface="Noto Serif Ethiopic Condensed"/>
-                <a:sym typeface="Noto Serif Ethiopic Condensed"/>
-              </a:rPr>
-              <a:t>Team &amp; Partnership </a:t>
-            </a:r>
-          </a:p>
-        </p:txBody>
-      </p:sp>
-      <p:sp>
-        <p:nvSpPr>
-          <p:cNvPr name="TextBox 3" id="3"/>
-          <p:cNvSpPr txBox="true"/>
-          <p:nvPr/>
-        </p:nvSpPr>
-        <p:spPr>
-          <a:xfrm rot="0">
-            <a:off x="2940605" y="2232920"/>
-            <a:ext cx="12446080" cy="6374130"/>
-          </a:xfrm>
-          <a:prstGeom prst="rect">
-            <a:avLst/>
-          </a:prstGeom>
-        </p:spPr>
-        <p:txBody>
-          <a:bodyPr anchor="t" rtlCol="false" tIns="0" lIns="0" bIns="0" rIns="0">
-            <a:spAutoFit/>
-          </a:bodyPr>
-          <a:lstStyle/>
-          <a:p>
-            <a:pPr algn="l">
-              <a:lnSpc>
-                <a:spcPts val="4620"/>
-              </a:lnSpc>
-            </a:pPr>
-            <a:r>
-              <a:rPr lang="en-US" b="true" sz="3300">
-                <a:solidFill>
-                  <a:srgbClr val="000000"/>
-                </a:solidFill>
-                <a:latin typeface="Noto Serif Ethiopic Condensed Bold"/>
-                <a:ea typeface="Noto Serif Ethiopic Condensed Bold"/>
-                <a:cs typeface="Noto Serif Ethiopic Condensed Bold"/>
-                <a:sym typeface="Noto Serif Ethiopic Condensed Bold"/>
-              </a:rPr>
-              <a:t>Team Composition</a:t>
-            </a:r>
-          </a:p>
-          <a:p>
-            <a:pPr algn="l" marL="712470" indent="-356235" lvl="1">
-              <a:lnSpc>
-                <a:spcPts val="4620"/>
-              </a:lnSpc>
-              <a:buFont typeface="Arial"/>
-              <a:buChar char="•"/>
-            </a:pPr>
-            <a:r>
-              <a:rPr lang="en-US" sz="3300">
-                <a:solidFill>
-                  <a:srgbClr val="000000"/>
-                </a:solidFill>
-                <a:latin typeface="Noto Serif Ethiopic Condensed"/>
-                <a:ea typeface="Noto Serif Ethiopic Condensed"/>
-                <a:cs typeface="Noto Serif Ethiopic Condensed"/>
-                <a:sym typeface="Noto Serif Ethiopic Condensed"/>
-              </a:rPr>
-              <a:t>AI/ML Developer: Builds and trains predictive credit models.</a:t>
-            </a:r>
-          </a:p>
-          <a:p>
-            <a:pPr algn="l" marL="712470" indent="-356235" lvl="1">
-              <a:lnSpc>
-                <a:spcPts val="4620"/>
-              </a:lnSpc>
-              <a:buFont typeface="Arial"/>
-              <a:buChar char="•"/>
-            </a:pPr>
-            <a:r>
-              <a:rPr lang="en-US" sz="3300">
-                <a:solidFill>
-                  <a:srgbClr val="000000"/>
-                </a:solidFill>
-                <a:latin typeface="Noto Serif Ethiopic Condensed"/>
-                <a:ea typeface="Noto Serif Ethiopic Condensed"/>
-                <a:cs typeface="Noto Serif Ethiopic Condensed"/>
-                <a:sym typeface="Noto Serif Ethiopic Condensed"/>
-              </a:rPr>
-              <a:t>Data Analyst: Handles alternate data preprocessing and integration.</a:t>
-            </a:r>
-          </a:p>
-          <a:p>
-            <a:pPr algn="l" marL="712470" indent="-356235" lvl="1">
-              <a:lnSpc>
-                <a:spcPts val="4620"/>
-              </a:lnSpc>
-              <a:buFont typeface="Arial"/>
-              <a:buChar char="•"/>
-            </a:pPr>
-            <a:r>
-              <a:rPr lang="en-US" sz="3300">
-                <a:solidFill>
-                  <a:srgbClr val="000000"/>
-                </a:solidFill>
-                <a:latin typeface="Noto Serif Ethiopic Condensed"/>
-                <a:ea typeface="Noto Serif Ethiopic Condensed"/>
-                <a:cs typeface="Noto Serif Ethiopic Condensed"/>
-                <a:sym typeface="Noto Serif Ethiopic Condensed"/>
-              </a:rPr>
-              <a:t>Agriculture Expert: Validates farm and environmental parameters.</a:t>
-            </a:r>
-          </a:p>
-          <a:p>
-            <a:pPr algn="l" marL="712470" indent="-356235" lvl="1">
-              <a:lnSpc>
-                <a:spcPts val="4620"/>
-              </a:lnSpc>
-              <a:buFont typeface="Arial"/>
-              <a:buChar char="•"/>
-            </a:pPr>
-            <a:r>
-              <a:rPr lang="en-US" sz="3300">
-                <a:solidFill>
-                  <a:srgbClr val="000000"/>
-                </a:solidFill>
-                <a:latin typeface="Noto Serif Ethiopic Condensed"/>
-                <a:ea typeface="Noto Serif Ethiopic Condensed"/>
-                <a:cs typeface="Noto Serif Ethiopic Condensed"/>
-                <a:sym typeface="Noto Serif Ethiopic Condensed"/>
-              </a:rPr>
-              <a:t>Frontend Developer: Builds user-friendly web dashboard.</a:t>
-            </a:r>
-          </a:p>
-          <a:p>
-            <a:pPr algn="l" marL="712470" indent="-356235" lvl="1">
-              <a:lnSpc>
-                <a:spcPts val="4620"/>
-              </a:lnSpc>
-              <a:buFont typeface="Arial"/>
-              <a:buChar char="•"/>
-            </a:pPr>
-            <a:r>
-              <a:rPr lang="en-US" sz="3300">
-                <a:solidFill>
-                  <a:srgbClr val="000000"/>
-                </a:solidFill>
-                <a:latin typeface="Noto Serif Ethiopic Condensed"/>
-                <a:ea typeface="Noto Serif Ethiopic Condensed"/>
-                <a:cs typeface="Noto Serif Ethiopic Condensed"/>
-                <a:sym typeface="Noto Serif Ethiopic Condensed"/>
-              </a:rPr>
-              <a:t>Cybersecurity Lead: Manages encryption and data privacy.</a:t>
-            </a:r>
-          </a:p>
-          <a:p>
-            <a:pPr algn="l">
-              <a:lnSpc>
-                <a:spcPts val="4620"/>
-              </a:lnSpc>
-              <a:spcBef>
-                <a:spcPct val="0"/>
-              </a:spcBef>
-            </a:pPr>
-            <a:r>
-              <a:rPr lang="en-US" b="true" sz="3300">
-                <a:solidFill>
-                  <a:srgbClr val="000000"/>
-                </a:solidFill>
-                <a:latin typeface="Noto Serif Ethiopic Condensed Bold"/>
-                <a:ea typeface="Noto Serif Ethiopic Condensed Bold"/>
-                <a:cs typeface="Noto Serif Ethiopic Condensed Bold"/>
-                <a:sym typeface="Noto Serif Ethiopic Condensed Bold"/>
-              </a:rPr>
-              <a:t>Potential Partnerships</a:t>
-            </a:r>
-          </a:p>
-          <a:p>
-            <a:pPr algn="l" marL="712470" indent="-356235" lvl="1">
-              <a:lnSpc>
-                <a:spcPts val="4620"/>
-              </a:lnSpc>
-              <a:buFont typeface="Arial"/>
-              <a:buChar char="•"/>
-            </a:pPr>
-            <a:r>
-              <a:rPr lang="en-US" sz="3300">
-                <a:solidFill>
-                  <a:srgbClr val="000000"/>
-                </a:solidFill>
-                <a:latin typeface="Noto Serif Ethiopic Condensed"/>
-                <a:ea typeface="Noto Serif Ethiopic Condensed"/>
-                <a:cs typeface="Noto Serif Ethiopic Condensed"/>
-                <a:sym typeface="Noto Serif Ethiopic Condensed"/>
-              </a:rPr>
-              <a:t>NABARD, SBI, and other rural banks.</a:t>
-            </a:r>
-          </a:p>
-          <a:p>
-            <a:pPr algn="l" marL="712470" indent="-356235" lvl="1">
-              <a:lnSpc>
-                <a:spcPts val="4620"/>
-              </a:lnSpc>
-              <a:buFont typeface="Arial"/>
-              <a:buChar char="•"/>
-            </a:pPr>
-            <a:r>
-              <a:rPr lang="en-US" sz="3300">
-                <a:solidFill>
-                  <a:srgbClr val="000000"/>
-                </a:solidFill>
-                <a:latin typeface="Noto Serif Ethiopic Condensed"/>
-                <a:ea typeface="Noto Serif Ethiopic Condensed"/>
-                <a:cs typeface="Noto Serif Ethiopic Condensed"/>
-                <a:sym typeface="Noto Serif Ethiopic Condensed"/>
-              </a:rPr>
-              <a:t>IMD (Indian Meteorological Department) for weather API data.</a:t>
-            </a:r>
-          </a:p>
-          <a:p>
-            <a:pPr algn="l" marL="712470" indent="-356235" lvl="1">
-              <a:lnSpc>
-                <a:spcPts val="4620"/>
-              </a:lnSpc>
-              <a:buFont typeface="Arial"/>
-              <a:buChar char="•"/>
-            </a:pPr>
-            <a:r>
-              <a:rPr lang="en-US" sz="3300">
-                <a:solidFill>
-                  <a:srgbClr val="000000"/>
-                </a:solidFill>
-                <a:latin typeface="Noto Serif Ethiopic Condensed"/>
-                <a:ea typeface="Noto Serif Ethiopic Condensed"/>
-                <a:cs typeface="Noto Serif Ethiopic Condensed"/>
-                <a:sym typeface="Noto Serif Ethiopic Condensed"/>
-              </a:rPr>
-              <a:t>Agri-tech startups for farm and yield data.</a:t>
-            </a:r>
-          </a:p>
-          <a:p>
-            <a:pPr algn="l" marL="712470" indent="-356235" lvl="1">
-              <a:lnSpc>
-                <a:spcPts val="4620"/>
-              </a:lnSpc>
-              <a:buFont typeface="Arial"/>
-              <a:buChar char="•"/>
-            </a:pPr>
-            <a:r>
-              <a:rPr lang="en-US" sz="3300">
-                <a:solidFill>
-                  <a:srgbClr val="000000"/>
-                </a:solidFill>
-                <a:latin typeface="Noto Serif Ethiopic Condensed"/>
-                <a:ea typeface="Noto Serif Ethiopic Condensed"/>
-                <a:cs typeface="Noto Serif Ethiopic Condensed"/>
-                <a:sym typeface="Noto Serif Ethiopic Condensed"/>
-              </a:rPr>
-              <a:t>Government schemes like PM-Kisan, PMFBY.</a:t>
-            </a:r>
-          </a:p>
-        </p:txBody>
-      </p:sp>
-      <p:sp>
-        <p:nvSpPr>
-          <p:cNvPr name="Freeform 4" id="4"/>
+          <p:cNvPr id="2" name="Freeform 2"/>
           <p:cNvSpPr/>
           <p:nvPr/>
         </p:nvSpPr>
         <p:spPr>
-          <a:xfrm flipH="false" flipV="false" rot="0">
+          <a:xfrm>
             <a:off x="1028700" y="501777"/>
             <a:ext cx="2528697" cy="191832"/>
           </a:xfrm>
@@ -4108,9 +3981,9 @@
             <a:gdLst/>
             <a:ahLst/>
             <a:cxnLst/>
-            <a:rect r="r" b="b" t="t" l="l"/>
+            <a:rect l="l" t="t" r="r" b="b"/>
             <a:pathLst>
-              <a:path h="191832" w="2528697">
+              <a:path w="2528697" h="191832">
                 <a:moveTo>
                   <a:pt x="0" y="0"/>
                 </a:moveTo>
@@ -4133,10 +4006,372 @@
           <a:blipFill>
             <a:blip r:embed="rId2"/>
             <a:stretch>
-              <a:fillRect l="0" t="0" r="0" b="0"/>
+              <a:fillRect/>
             </a:stretch>
           </a:blipFill>
         </p:spPr>
+        <p:txBody>
+          <a:bodyPr/>
+          <a:lstStyle/>
+          <a:p>
+            <a:endParaRPr lang="en-IN"/>
+          </a:p>
+        </p:txBody>
+      </p:sp>
+      <p:sp>
+        <p:nvSpPr>
+          <p:cNvPr id="3" name="Freeform 3"/>
+          <p:cNvSpPr/>
+          <p:nvPr/>
+        </p:nvSpPr>
+        <p:spPr>
+          <a:xfrm>
+            <a:off x="1581813" y="835388"/>
+            <a:ext cx="862014" cy="862014"/>
+          </a:xfrm>
+          <a:custGeom>
+            <a:avLst/>
+            <a:gdLst/>
+            <a:ahLst/>
+            <a:cxnLst/>
+            <a:rect l="l" t="t" r="r" b="b"/>
+            <a:pathLst>
+              <a:path w="862014" h="862014">
+                <a:moveTo>
+                  <a:pt x="0" y="0"/>
+                </a:moveTo>
+                <a:lnTo>
+                  <a:pt x="862014" y="0"/>
+                </a:lnTo>
+                <a:lnTo>
+                  <a:pt x="862014" y="862014"/>
+                </a:lnTo>
+                <a:lnTo>
+                  <a:pt x="0" y="862014"/>
+                </a:lnTo>
+                <a:lnTo>
+                  <a:pt x="0" y="0"/>
+                </a:lnTo>
+                <a:close/>
+              </a:path>
+            </a:pathLst>
+          </a:custGeom>
+          <a:blipFill>
+            <a:blip r:embed="rId3"/>
+            <a:stretch>
+              <a:fillRect/>
+            </a:stretch>
+          </a:blipFill>
+        </p:spPr>
+        <p:txBody>
+          <a:bodyPr/>
+          <a:lstStyle/>
+          <a:p>
+            <a:endParaRPr lang="en-IN"/>
+          </a:p>
+        </p:txBody>
+      </p:sp>
+      <p:sp>
+        <p:nvSpPr>
+          <p:cNvPr id="4" name="Freeform 4"/>
+          <p:cNvSpPr/>
+          <p:nvPr/>
+        </p:nvSpPr>
+        <p:spPr>
+          <a:xfrm>
+            <a:off x="1581813" y="5015670"/>
+            <a:ext cx="1019453" cy="1019453"/>
+          </a:xfrm>
+          <a:custGeom>
+            <a:avLst/>
+            <a:gdLst/>
+            <a:ahLst/>
+            <a:cxnLst/>
+            <a:rect l="l" t="t" r="r" b="b"/>
+            <a:pathLst>
+              <a:path w="1019453" h="1019453">
+                <a:moveTo>
+                  <a:pt x="0" y="0"/>
+                </a:moveTo>
+                <a:lnTo>
+                  <a:pt x="1019454" y="0"/>
+                </a:lnTo>
+                <a:lnTo>
+                  <a:pt x="1019454" y="1019453"/>
+                </a:lnTo>
+                <a:lnTo>
+                  <a:pt x="0" y="1019453"/>
+                </a:lnTo>
+                <a:lnTo>
+                  <a:pt x="0" y="0"/>
+                </a:lnTo>
+                <a:close/>
+              </a:path>
+            </a:pathLst>
+          </a:custGeom>
+          <a:blipFill>
+            <a:blip r:embed="rId4"/>
+            <a:stretch>
+              <a:fillRect/>
+            </a:stretch>
+          </a:blipFill>
+        </p:spPr>
+        <p:txBody>
+          <a:bodyPr/>
+          <a:lstStyle/>
+          <a:p>
+            <a:endParaRPr lang="en-IN"/>
+          </a:p>
+        </p:txBody>
+      </p:sp>
+      <p:sp>
+        <p:nvSpPr>
+          <p:cNvPr id="5" name="TextBox 5"/>
+          <p:cNvSpPr txBox="1"/>
+          <p:nvPr/>
+        </p:nvSpPr>
+        <p:spPr>
+          <a:xfrm>
+            <a:off x="2814366" y="5143931"/>
+            <a:ext cx="12173317" cy="3469005"/>
+          </a:xfrm>
+          <a:prstGeom prst="rect">
+            <a:avLst/>
+          </a:prstGeom>
+        </p:spPr>
+        <p:txBody>
+          <a:bodyPr lIns="0" tIns="0" rIns="0" bIns="0" rtlCol="0" anchor="t">
+            <a:spAutoFit/>
+          </a:bodyPr>
+          <a:lstStyle/>
+          <a:p>
+            <a:pPr algn="l">
+              <a:lnSpc>
+                <a:spcPts val="4620"/>
+              </a:lnSpc>
+            </a:pPr>
+            <a:r>
+              <a:rPr lang="en-US" sz="3300" b="1">
+                <a:solidFill>
+                  <a:srgbClr val="000000"/>
+                </a:solidFill>
+                <a:latin typeface="Noto Serif Ethiopic Condensed Bold"/>
+                <a:ea typeface="Noto Serif Ethiopic Condensed Bold"/>
+                <a:cs typeface="Noto Serif Ethiopic Condensed Bold"/>
+                <a:sym typeface="Noto Serif Ethiopic Condensed Bold"/>
+              </a:rPr>
+              <a:t>Current Gap:</a:t>
+            </a:r>
+          </a:p>
+          <a:p>
+            <a:pPr marL="712470" lvl="1" indent="-356235" algn="l">
+              <a:lnSpc>
+                <a:spcPts val="4620"/>
+              </a:lnSpc>
+              <a:buFont typeface="Arial"/>
+              <a:buChar char="•"/>
+            </a:pPr>
+            <a:r>
+              <a:rPr lang="en-US" sz="3300">
+                <a:solidFill>
+                  <a:srgbClr val="000000"/>
+                </a:solidFill>
+                <a:latin typeface="Noto Serif Ethiopic Condensed"/>
+                <a:ea typeface="Noto Serif Ethiopic Condensed"/>
+                <a:cs typeface="Noto Serif Ethiopic Condensed"/>
+                <a:sym typeface="Noto Serif Ethiopic Condensed"/>
+              </a:rPr>
+              <a:t>Adaptive Persona &amp; Tone: Missing in current solutions.</a:t>
+            </a:r>
+          </a:p>
+          <a:p>
+            <a:pPr marL="712470" lvl="1" indent="-356235" algn="l">
+              <a:lnSpc>
+                <a:spcPts val="4620"/>
+              </a:lnSpc>
+              <a:buFont typeface="Arial"/>
+              <a:buChar char="•"/>
+            </a:pPr>
+            <a:r>
+              <a:rPr lang="en-US" sz="3300">
+                <a:solidFill>
+                  <a:srgbClr val="000000"/>
+                </a:solidFill>
+                <a:latin typeface="Noto Serif Ethiopic Condensed"/>
+                <a:ea typeface="Noto Serif Ethiopic Condensed"/>
+                <a:cs typeface="Noto Serif Ethiopic Condensed"/>
+                <a:sym typeface="Noto Serif Ethiopic Condensed"/>
+              </a:rPr>
+              <a:t>Regional Dialect/Idioms: Missing in current solutions</a:t>
+            </a:r>
+          </a:p>
+          <a:p>
+            <a:pPr marL="712470" lvl="1" indent="-356235" algn="l">
+              <a:lnSpc>
+                <a:spcPts val="4620"/>
+              </a:lnSpc>
+              <a:buFont typeface="Arial"/>
+              <a:buChar char="•"/>
+            </a:pPr>
+            <a:r>
+              <a:rPr lang="en-US" sz="3300">
+                <a:solidFill>
+                  <a:srgbClr val="000000"/>
+                </a:solidFill>
+                <a:latin typeface="Noto Serif Ethiopic Condensed"/>
+                <a:ea typeface="Noto Serif Ethiopic Condensed"/>
+                <a:cs typeface="Noto Serif Ethiopic Condensed"/>
+                <a:sym typeface="Noto Serif Ethiopic Condensed"/>
+              </a:rPr>
+              <a:t>Non-linear Fallback Routing: Missing (Standard AI just repeats "Try Again").</a:t>
+            </a:r>
+          </a:p>
+          <a:p>
+            <a:pPr algn="l">
+              <a:lnSpc>
+                <a:spcPts val="4620"/>
+              </a:lnSpc>
+            </a:pPr>
+            <a:endParaRPr lang="en-US" sz="3300">
+              <a:solidFill>
+                <a:srgbClr val="000000"/>
+              </a:solidFill>
+              <a:latin typeface="Noto Serif Ethiopic Condensed"/>
+              <a:ea typeface="Noto Serif Ethiopic Condensed"/>
+              <a:cs typeface="Noto Serif Ethiopic Condensed"/>
+              <a:sym typeface="Noto Serif Ethiopic Condensed"/>
+            </a:endParaRPr>
+          </a:p>
+        </p:txBody>
+      </p:sp>
+      <p:sp>
+        <p:nvSpPr>
+          <p:cNvPr id="6" name="TextBox 6"/>
+          <p:cNvSpPr txBox="1"/>
+          <p:nvPr/>
+        </p:nvSpPr>
+        <p:spPr>
+          <a:xfrm>
+            <a:off x="2543306" y="760603"/>
+            <a:ext cx="7056597" cy="795020"/>
+          </a:xfrm>
+          <a:prstGeom prst="rect">
+            <a:avLst/>
+          </a:prstGeom>
+        </p:spPr>
+        <p:txBody>
+          <a:bodyPr lIns="0" tIns="0" rIns="0" bIns="0" rtlCol="0" anchor="t">
+            <a:spAutoFit/>
+          </a:bodyPr>
+          <a:lstStyle/>
+          <a:p>
+            <a:pPr algn="ctr">
+              <a:lnSpc>
+                <a:spcPts val="6580"/>
+              </a:lnSpc>
+              <a:spcBef>
+                <a:spcPct val="0"/>
+              </a:spcBef>
+            </a:pPr>
+            <a:r>
+              <a:rPr lang="en-US" sz="4700">
+                <a:solidFill>
+                  <a:srgbClr val="000000"/>
+                </a:solidFill>
+                <a:latin typeface="Noto Serif Ethiopic Condensed"/>
+                <a:ea typeface="Noto Serif Ethiopic Condensed"/>
+                <a:cs typeface="Noto Serif Ethiopic Condensed"/>
+                <a:sym typeface="Noto Serif Ethiopic Condensed"/>
+              </a:rPr>
+              <a:t>Literature Survey &amp; The Gap</a:t>
+            </a:r>
+          </a:p>
+        </p:txBody>
+      </p:sp>
+      <p:sp>
+        <p:nvSpPr>
+          <p:cNvPr id="7" name="TextBox 7"/>
+          <p:cNvSpPr txBox="1"/>
+          <p:nvPr/>
+        </p:nvSpPr>
+        <p:spPr>
+          <a:xfrm>
+            <a:off x="2676181" y="1630727"/>
+            <a:ext cx="13995054" cy="2887980"/>
+          </a:xfrm>
+          <a:prstGeom prst="rect">
+            <a:avLst/>
+          </a:prstGeom>
+        </p:spPr>
+        <p:txBody>
+          <a:bodyPr lIns="0" tIns="0" rIns="0" bIns="0" rtlCol="0" anchor="t">
+            <a:spAutoFit/>
+          </a:bodyPr>
+          <a:lstStyle/>
+          <a:p>
+            <a:pPr marL="712470" lvl="1" indent="-356235" algn="l">
+              <a:lnSpc>
+                <a:spcPts val="4620"/>
+              </a:lnSpc>
+              <a:buFont typeface="Arial"/>
+              <a:buChar char="•"/>
+            </a:pPr>
+            <a:r>
+              <a:rPr lang="en-US" sz="3300">
+                <a:solidFill>
+                  <a:srgbClr val="000000"/>
+                </a:solidFill>
+                <a:latin typeface="Noto Serif Ethiopic Condensed"/>
+                <a:ea typeface="Noto Serif Ethiopic Condensed"/>
+                <a:cs typeface="Noto Serif Ethiopic Condensed"/>
+                <a:sym typeface="Noto Serif Ethiopic Condensed"/>
+              </a:rPr>
+              <a:t>Existing EdTech AI acts like a rigid encyclopedia. It hallucinates and lacks emotional intelligence.</a:t>
+            </a:r>
+          </a:p>
+          <a:p>
+            <a:pPr marL="712470" lvl="1" indent="-356235" algn="l">
+              <a:lnSpc>
+                <a:spcPts val="4620"/>
+              </a:lnSpc>
+              <a:buFont typeface="Arial"/>
+              <a:buChar char="•"/>
+            </a:pPr>
+            <a:r>
+              <a:rPr lang="en-US" sz="3300">
+                <a:solidFill>
+                  <a:srgbClr val="000000"/>
+                </a:solidFill>
+                <a:latin typeface="Noto Serif Ethiopic Condensed"/>
+                <a:ea typeface="Noto Serif Ethiopic Condensed"/>
+                <a:cs typeface="Noto Serif Ethiopic Condensed"/>
+                <a:sym typeface="Noto Serif Ethiopic Condensed"/>
+              </a:rPr>
+              <a:t>Great teachers use regional dialects, local culture, and students' personal interests to make learning more relatable and effective.</a:t>
+            </a:r>
+          </a:p>
+          <a:p>
+            <a:pPr marL="712470" lvl="1" indent="-356235" algn="l">
+              <a:lnSpc>
+                <a:spcPts val="4620"/>
+              </a:lnSpc>
+              <a:buFont typeface="Arial"/>
+              <a:buChar char="•"/>
+            </a:pPr>
+            <a:r>
+              <a:rPr lang="en-US" sz="3300">
+                <a:solidFill>
+                  <a:srgbClr val="000000"/>
+                </a:solidFill>
+                <a:latin typeface="Noto Serif Ethiopic Condensed"/>
+                <a:ea typeface="Noto Serif Ethiopic Condensed"/>
+                <a:cs typeface="Noto Serif Ethiopic Condensed"/>
+                <a:sym typeface="Noto Serif Ethiopic Condensed"/>
+              </a:rPr>
+              <a:t>Current AI fails to replicate this human connection.</a:t>
+            </a:r>
+          </a:p>
+        </p:txBody>
       </p:sp>
     </p:spTree>
   </p:cSld>
@@ -4146,14 +4381,15 @@
 </p:sld>
 </file>
 
-<file path=ppt/slides/slide12.xml><?xml version="1.0" encoding="utf-8"?>
-<p:sld xmlns:p="http://schemas.openxmlformats.org/presentationml/2006/main" xmlns:a="http://schemas.openxmlformats.org/drawingml/2006/main" xmlns:r="http://schemas.openxmlformats.org/officeDocument/2006/relationships" show="false">
+<file path=ppt/slides/slide4.xml><?xml version="1.0" encoding="utf-8"?>
+<p:sld xmlns:a="http://schemas.openxmlformats.org/drawingml/2006/main" xmlns:r="http://schemas.openxmlformats.org/officeDocument/2006/relationships" xmlns:p="http://schemas.openxmlformats.org/presentationml/2006/main">
   <p:cSld>
     <p:bg>
       <p:bgPr>
         <a:solidFill>
           <a:srgbClr val="EBF2FA"/>
         </a:solidFill>
+        <a:effectLst/>
       </p:bgPr>
     </p:bg>
     <p:spTree>
@@ -4172,172 +4408,12 @@
       </p:grpSpPr>
       <p:sp>
         <p:nvSpPr>
-          <p:cNvPr name="Freeform 2" id="2"/>
+          <p:cNvPr id="2" name="Freeform 2"/>
           <p:cNvSpPr/>
           <p:nvPr/>
         </p:nvSpPr>
         <p:spPr>
-          <a:xfrm flipH="false" flipV="false" rot="0">
-            <a:off x="717586" y="788170"/>
-            <a:ext cx="16852828" cy="8710659"/>
-          </a:xfrm>
-          <a:custGeom>
-            <a:avLst/>
-            <a:gdLst/>
-            <a:ahLst/>
-            <a:cxnLst/>
-            <a:rect r="r" b="b" t="t" l="l"/>
-            <a:pathLst>
-              <a:path h="8710659" w="16852828">
-                <a:moveTo>
-                  <a:pt x="0" y="0"/>
-                </a:moveTo>
-                <a:lnTo>
-                  <a:pt x="16852828" y="0"/>
-                </a:lnTo>
-                <a:lnTo>
-                  <a:pt x="16852828" y="8710660"/>
-                </a:lnTo>
-                <a:lnTo>
-                  <a:pt x="0" y="8710660"/>
-                </a:lnTo>
-                <a:lnTo>
-                  <a:pt x="0" y="0"/>
-                </a:lnTo>
-                <a:close/>
-              </a:path>
-            </a:pathLst>
-          </a:custGeom>
-          <a:blipFill>
-            <a:blip r:embed="rId2"/>
-            <a:stretch>
-              <a:fillRect l="0" t="0" r="0" b="-6791"/>
-            </a:stretch>
-          </a:blipFill>
-        </p:spPr>
-      </p:sp>
-    </p:spTree>
-  </p:cSld>
-  <p:clrMapOvr>
-    <a:masterClrMapping/>
-  </p:clrMapOvr>
-</p:sld>
-</file>
-
-<file path=ppt/slides/slide13.xml><?xml version="1.0" encoding="utf-8"?>
-<p:sld xmlns:p="http://schemas.openxmlformats.org/presentationml/2006/main" xmlns:a="http://schemas.openxmlformats.org/drawingml/2006/main" xmlns:r="http://schemas.openxmlformats.org/officeDocument/2006/relationships" show="false">
-  <p:cSld>
-    <p:bg>
-      <p:bgPr>
-        <a:solidFill>
-          <a:srgbClr val="EBF2FA"/>
-        </a:solidFill>
-      </p:bgPr>
-    </p:bg>
-    <p:spTree>
-      <p:nvGrpSpPr>
-        <p:cNvPr id="1" name=""/>
-        <p:cNvGrpSpPr/>
-        <p:nvPr/>
-      </p:nvGrpSpPr>
-      <p:grpSpPr>
-        <a:xfrm>
-          <a:off x="0" y="0"/>
-          <a:ext cx="0" cy="0"/>
-          <a:chOff x="0" y="0"/>
-          <a:chExt cx="0" cy="0"/>
-        </a:xfrm>
-      </p:grpSpPr>
-      <p:graphicFrame>
-        <p:nvGraphicFramePr>
-          <p:cNvPr name="Object 2" id="2"/>
-          <p:cNvGraphicFramePr/>
-          <p:nvPr/>
-        </p:nvGraphicFramePr>
-        <p:xfrm>
-          <a:off x="1028700" y="1893630"/>
-          <a:ext cx="5657850" cy="5029200"/>
-        </p:xfrm>
-        <a:graphic>
-          <a:graphicData uri="http://schemas.openxmlformats.org/presentationml/2006/ole">
-            <p:oleObj imgW="6781800" imgH="6159500" r:id="rId3" progId="Excel.Sheet.12" name="Worksheet">
-              <p:embed/>
-              <p:pic>
-                <p:nvPicPr>
-                  <p:cNvPr name="" id="0"/>
-                  <p:cNvPicPr/>
-                  <p:nvPr/>
-                </p:nvPicPr>
-                <p:blipFill>
-                  <a:blip r:embed="rId2"/>
-                  <a:stretch>
-                    <a:fillRect/>
-                  </a:stretch>
-                </p:blipFill>
-                <p:spPr>
-                  <a:xfrm>
-                    <a:off x="1270000" y="1270000"/>
-                    <a:ext cx="1270000" cy="1270000"/>
-                  </a:xfrm>
-                  <a:prstGeom prst="rect"/>
-                </p:spPr>
-              </p:pic>
-            </p:oleObj>
-          </a:graphicData>
-        </a:graphic>
-      </p:graphicFrame>
-      <p:sp>
-        <p:nvSpPr>
-          <p:cNvPr name="TextBox 3" id="3"/>
-          <p:cNvSpPr txBox="true"/>
-          <p:nvPr/>
-        </p:nvSpPr>
-        <p:spPr>
-          <a:xfrm rot="0">
-            <a:off x="2231779" y="853247"/>
-            <a:ext cx="2651235" cy="795021"/>
-          </a:xfrm>
-          <a:prstGeom prst="rect">
-            <a:avLst/>
-          </a:prstGeom>
-        </p:spPr>
-        <p:txBody>
-          <a:bodyPr anchor="t" rtlCol="false" tIns="0" lIns="0" bIns="0" rIns="0">
-            <a:spAutoFit/>
-          </a:bodyPr>
-          <a:lstStyle/>
-          <a:p>
-            <a:pPr algn="ctr">
-              <a:lnSpc>
-                <a:spcPts val="6579"/>
-              </a:lnSpc>
-              <a:spcBef>
-                <a:spcPct val="0"/>
-              </a:spcBef>
-            </a:pPr>
-            <a:r>
-              <a:rPr lang="en-US" sz="4699">
-                <a:solidFill>
-                  <a:srgbClr val="000000"/>
-                </a:solidFill>
-                <a:latin typeface="Noto Serif Ethiopic Condensed"/>
-                <a:ea typeface="Noto Serif Ethiopic Condensed"/>
-                <a:cs typeface="Noto Serif Ethiopic Condensed"/>
-                <a:sym typeface="Noto Serif Ethiopic Condensed"/>
-              </a:rPr>
-              <a:t>Budget</a:t>
-            </a:r>
-          </a:p>
-        </p:txBody>
-      </p:sp>
-      <p:sp>
-        <p:nvSpPr>
-          <p:cNvPr name="Freeform 4" id="4"/>
-          <p:cNvSpPr/>
-          <p:nvPr/>
-        </p:nvSpPr>
-        <p:spPr>
-          <a:xfrm flipH="false" flipV="false" rot="0">
+          <a:xfrm>
             <a:off x="1028700" y="501777"/>
             <a:ext cx="2528697" cy="191832"/>
           </a:xfrm>
@@ -4346,474 +4422,9 @@
             <a:gdLst/>
             <a:ahLst/>
             <a:cxnLst/>
-            <a:rect r="r" b="b" t="t" l="l"/>
+            <a:rect l="l" t="t" r="r" b="b"/>
             <a:pathLst>
-              <a:path h="191832" w="2528697">
-                <a:moveTo>
-                  <a:pt x="0" y="0"/>
-                </a:moveTo>
-                <a:lnTo>
-                  <a:pt x="2528697" y="0"/>
-                </a:lnTo>
-                <a:lnTo>
-                  <a:pt x="2528697" y="191832"/>
-                </a:lnTo>
-                <a:lnTo>
-                  <a:pt x="0" y="191832"/>
-                </a:lnTo>
-                <a:lnTo>
-                  <a:pt x="0" y="0"/>
-                </a:lnTo>
-                <a:close/>
-              </a:path>
-            </a:pathLst>
-          </a:custGeom>
-          <a:blipFill>
-            <a:blip r:embed="rId4"/>
-            <a:stretch>
-              <a:fillRect l="0" t="0" r="0" b="0"/>
-            </a:stretch>
-          </a:blipFill>
-        </p:spPr>
-      </p:sp>
-    </p:spTree>
-  </p:cSld>
-  <p:clrMapOvr>
-    <a:masterClrMapping/>
-  </p:clrMapOvr>
-</p:sld>
-</file>
-
-<file path=ppt/slides/slide14.xml><?xml version="1.0" encoding="utf-8"?>
-<p:sld xmlns:p="http://schemas.openxmlformats.org/presentationml/2006/main" xmlns:a="http://schemas.openxmlformats.org/drawingml/2006/main" xmlns:r="http://schemas.openxmlformats.org/officeDocument/2006/relationships" show="false">
-  <p:cSld>
-    <p:bg>
-      <p:bgPr>
-        <a:solidFill>
-          <a:srgbClr val="EBF2FA"/>
-        </a:solidFill>
-      </p:bgPr>
-    </p:bg>
-    <p:spTree>
-      <p:nvGrpSpPr>
-        <p:cNvPr id="1" name=""/>
-        <p:cNvGrpSpPr/>
-        <p:nvPr/>
-      </p:nvGrpSpPr>
-      <p:grpSpPr>
-        <a:xfrm>
-          <a:off x="0" y="0"/>
-          <a:ext cx="0" cy="0"/>
-          <a:chOff x="0" y="0"/>
-          <a:chExt cx="0" cy="0"/>
-        </a:xfrm>
-      </p:grpSpPr>
-      <p:sp>
-        <p:nvSpPr>
-          <p:cNvPr name="Freeform 2" id="2"/>
-          <p:cNvSpPr/>
-          <p:nvPr/>
-        </p:nvSpPr>
-        <p:spPr>
-          <a:xfrm flipH="false" flipV="false" rot="0">
-            <a:off x="1659813" y="-191833"/>
-            <a:ext cx="14968373" cy="10287000"/>
-          </a:xfrm>
-          <a:custGeom>
-            <a:avLst/>
-            <a:gdLst/>
-            <a:ahLst/>
-            <a:cxnLst/>
-            <a:rect r="r" b="b" t="t" l="l"/>
-            <a:pathLst>
-              <a:path h="10287000" w="14968373">
-                <a:moveTo>
-                  <a:pt x="0" y="0"/>
-                </a:moveTo>
-                <a:lnTo>
-                  <a:pt x="14968374" y="0"/>
-                </a:lnTo>
-                <a:lnTo>
-                  <a:pt x="14968374" y="10287000"/>
-                </a:lnTo>
-                <a:lnTo>
-                  <a:pt x="0" y="10287000"/>
-                </a:lnTo>
-                <a:lnTo>
-                  <a:pt x="0" y="0"/>
-                </a:lnTo>
-                <a:close/>
-              </a:path>
-            </a:pathLst>
-          </a:custGeom>
-          <a:blipFill>
-            <a:blip r:embed="rId2"/>
-            <a:stretch>
-              <a:fillRect l="0" t="0" r="0" b="-6135"/>
-            </a:stretch>
-          </a:blipFill>
-        </p:spPr>
-      </p:sp>
-    </p:spTree>
-  </p:cSld>
-  <p:clrMapOvr>
-    <a:masterClrMapping/>
-  </p:clrMapOvr>
-</p:sld>
-</file>
-
-<file path=ppt/slides/slide15.xml><?xml version="1.0" encoding="utf-8"?>
-<p:sld xmlns:p="http://schemas.openxmlformats.org/presentationml/2006/main" xmlns:a="http://schemas.openxmlformats.org/drawingml/2006/main" xmlns:r="http://schemas.openxmlformats.org/officeDocument/2006/relationships" show="false">
-  <p:cSld>
-    <p:bg>
-      <p:bgPr>
-        <a:solidFill>
-          <a:srgbClr val="EBF2FA"/>
-        </a:solidFill>
-      </p:bgPr>
-    </p:bg>
-    <p:spTree>
-      <p:nvGrpSpPr>
-        <p:cNvPr id="1" name=""/>
-        <p:cNvGrpSpPr/>
-        <p:nvPr/>
-      </p:nvGrpSpPr>
-      <p:grpSpPr>
-        <a:xfrm>
-          <a:off x="0" y="0"/>
-          <a:ext cx="0" cy="0"/>
-          <a:chOff x="0" y="0"/>
-          <a:chExt cx="0" cy="0"/>
-        </a:xfrm>
-      </p:grpSpPr>
-      <p:sp>
-        <p:nvSpPr>
-          <p:cNvPr name="TextBox 2" id="2"/>
-          <p:cNvSpPr txBox="true"/>
-          <p:nvPr/>
-        </p:nvSpPr>
-        <p:spPr>
-          <a:xfrm rot="0">
-            <a:off x="2293048" y="942975"/>
-            <a:ext cx="7513532" cy="795021"/>
-          </a:xfrm>
-          <a:prstGeom prst="rect">
-            <a:avLst/>
-          </a:prstGeom>
-        </p:spPr>
-        <p:txBody>
-          <a:bodyPr anchor="t" rtlCol="false" tIns="0" lIns="0" bIns="0" rIns="0">
-            <a:spAutoFit/>
-          </a:bodyPr>
-          <a:lstStyle/>
-          <a:p>
-            <a:pPr algn="ctr">
-              <a:lnSpc>
-                <a:spcPts val="6579"/>
-              </a:lnSpc>
-              <a:spcBef>
-                <a:spcPct val="0"/>
-              </a:spcBef>
-            </a:pPr>
-            <a:r>
-              <a:rPr lang="en-US" sz="4699">
-                <a:solidFill>
-                  <a:srgbClr val="000000"/>
-                </a:solidFill>
-                <a:latin typeface="Noto Serif Ethiopic Condensed"/>
-                <a:ea typeface="Noto Serif Ethiopic Condensed"/>
-                <a:cs typeface="Noto Serif Ethiopic Condensed"/>
-                <a:sym typeface="Noto Serif Ethiopic Condensed"/>
-              </a:rPr>
-              <a:t>Research and References</a:t>
-            </a:r>
-          </a:p>
-        </p:txBody>
-      </p:sp>
-      <p:sp>
-        <p:nvSpPr>
-          <p:cNvPr name="TextBox 3" id="3"/>
-          <p:cNvSpPr txBox="true"/>
-          <p:nvPr/>
-        </p:nvSpPr>
-        <p:spPr>
-          <a:xfrm rot="0">
-            <a:off x="2480138" y="2213610"/>
-            <a:ext cx="14652885" cy="5793105"/>
-          </a:xfrm>
-          <a:prstGeom prst="rect">
-            <a:avLst/>
-          </a:prstGeom>
-        </p:spPr>
-        <p:txBody>
-          <a:bodyPr anchor="t" rtlCol="false" tIns="0" lIns="0" bIns="0" rIns="0">
-            <a:spAutoFit/>
-          </a:bodyPr>
-          <a:lstStyle/>
-          <a:p>
-            <a:pPr algn="l" marL="712470" indent="-356235" lvl="1">
-              <a:lnSpc>
-                <a:spcPts val="4620"/>
-              </a:lnSpc>
-              <a:buAutoNum type="arabicPeriod" startAt="1"/>
-            </a:pPr>
-            <a:r>
-              <a:rPr lang="en-US" sz="3300" spc="138" u="sng">
-                <a:solidFill>
-                  <a:srgbClr val="0000FF"/>
-                </a:solidFill>
-                <a:latin typeface="Noto Serif Ethiopic Condensed"/>
-                <a:ea typeface="Noto Serif Ethiopic Condensed"/>
-                <a:cs typeface="Noto Serif Ethiopic Condensed"/>
-                <a:sym typeface="Noto Serif Ethiopic Condensed"/>
-                <a:hlinkClick r:id="rId2" tooltip="https://www.mdpi.com/2227-9091/9/11/192"/>
-              </a:rPr>
-              <a:t>“</a:t>
-            </a:r>
-            <a:r>
-              <a:rPr lang="en-US" sz="3300" spc="138" u="sng">
-                <a:solidFill>
-                  <a:srgbClr val="0000FF"/>
-                </a:solidFill>
-                <a:latin typeface="Noto Serif Ethiopic Condensed"/>
-                <a:ea typeface="Noto Serif Ethiopic Condensed"/>
-                <a:cs typeface="Noto Serif Ethiopic Condensed"/>
-                <a:sym typeface="Noto Serif Ethiopic Condensed"/>
-                <a:hlinkClick r:id="rId3" tooltip="https://www.mdpi.com/2227-9091/9/11/192"/>
-              </a:rPr>
-              <a:t>Machine Learning (ML) Techn</a:t>
-            </a:r>
-            <a:r>
-              <a:rPr lang="en-US" sz="3300" spc="138" u="sng">
-                <a:solidFill>
-                  <a:srgbClr val="0000FF"/>
-                </a:solidFill>
-                <a:latin typeface="Noto Serif Ethiopic Condensed"/>
-                <a:ea typeface="Noto Serif Ethiopic Condensed"/>
-                <a:cs typeface="Noto Serif Ethiopic Condensed"/>
-                <a:sym typeface="Noto Serif Ethiopic Condensed"/>
-                <a:hlinkClick r:id="rId4" tooltip="https://www.mdpi.com/2227-9091/9/11/192"/>
-              </a:rPr>
-              <a:t>ologies for Digital Credit Scoring in Rural Finance: A Literature Review” by Anil Kumar,Suneel Sharmaand and Mehregan Mahdavi</a:t>
-            </a:r>
-            <a:r>
-              <a:rPr lang="en-US" sz="3300" spc="138" u="sng">
-                <a:solidFill>
-                  <a:srgbClr val="0000FF"/>
-                </a:solidFill>
-                <a:latin typeface="Noto Serif Ethiopic Condensed"/>
-                <a:ea typeface="Noto Serif Ethiopic Condensed"/>
-                <a:cs typeface="Noto Serif Ethiopic Condensed"/>
-                <a:sym typeface="Noto Serif Ethiopic Condensed"/>
-                <a:hlinkClick r:id="rId5" tooltip="https://www.mdpi.com/2227-9091/9/11/192"/>
-              </a:rPr>
-              <a:t>(2021)</a:t>
-            </a:r>
-          </a:p>
-          <a:p>
-            <a:pPr algn="l" marL="712470" indent="-356235" lvl="1">
-              <a:lnSpc>
-                <a:spcPts val="4620"/>
-              </a:lnSpc>
-              <a:buAutoNum type="arabicPeriod" startAt="1"/>
-            </a:pPr>
-            <a:r>
-              <a:rPr lang="en-US" sz="3300" spc="138" u="sng">
-                <a:solidFill>
-                  <a:srgbClr val="0000FF"/>
-                </a:solidFill>
-                <a:latin typeface="Noto Serif Ethiopic Condensed"/>
-                <a:ea typeface="Noto Serif Ethiopic Condensed"/>
-                <a:cs typeface="Noto Serif Ethiopic Condensed"/>
-                <a:sym typeface="Noto Serif Ethiopic Condensed"/>
-                <a:hlinkClick r:id="rId6" tooltip="https://www.researchgate.net/publication/368338344_Credit_Scoring_Model_for_Farmers_using_Random_Forest"/>
-              </a:rPr>
-              <a:t>“Credit Scoring Model for Farmers using Random Forest” by Kharida Aulia Bahri,Yeni Herdiyeni,Suprehatin Suprehatin(2023).</a:t>
-            </a:r>
-          </a:p>
-          <a:p>
-            <a:pPr algn="l" marL="712470" indent="-356235" lvl="1">
-              <a:lnSpc>
-                <a:spcPts val="4620"/>
-              </a:lnSpc>
-              <a:buAutoNum type="arabicPeriod" startAt="1"/>
-            </a:pPr>
-            <a:r>
-              <a:rPr lang="en-US" sz="3300" spc="138" u="sng">
-                <a:solidFill>
-                  <a:srgbClr val="0000FF"/>
-                </a:solidFill>
-                <a:latin typeface="Noto Serif Ethiopic Condensed"/>
-                <a:ea typeface="Noto Serif Ethiopic Condensed"/>
-                <a:cs typeface="Noto Serif Ethiopic Condensed"/>
-                <a:sym typeface="Noto Serif Ethiopic Condensed"/>
-                <a:hlinkClick r:id="rId7" tooltip="https://digicraft.ai/2025/06/19/transforming-credit-access-built-an-ai-driven-lending-ecosystem/"/>
-              </a:rPr>
-              <a:t>“Transforming Credit Access: Built an AI-Driven Lending Ecosystem”(2025)</a:t>
-            </a:r>
-          </a:p>
-          <a:p>
-            <a:pPr algn="l" marL="712470" indent="-356235" lvl="1">
-              <a:lnSpc>
-                <a:spcPts val="4620"/>
-              </a:lnSpc>
-              <a:buAutoNum type="arabicPeriod" startAt="1"/>
-            </a:pPr>
-            <a:r>
-              <a:rPr lang="en-US" sz="3300" spc="138" u="sng">
-                <a:solidFill>
-                  <a:srgbClr val="0000FF"/>
-                </a:solidFill>
-                <a:latin typeface="Noto Serif Ethiopic Condensed"/>
-                <a:ea typeface="Noto Serif Ethiopic Condensed"/>
-                <a:cs typeface="Noto Serif Ethiopic Condensed"/>
-                <a:sym typeface="Noto Serif Ethiopic Condensed"/>
-                <a:hlinkClick r:id="rId8" tooltip="https://www.kaggle.com/datasets/anshumish/crop-yield-data-with-soil-and-weather-dataset"/>
-              </a:rPr>
-              <a:t>“Crop yield Data with Soil And Weather Dataset”</a:t>
-            </a:r>
-          </a:p>
-          <a:p>
-            <a:pPr algn="l" marL="712470" indent="-356235" lvl="1">
-              <a:lnSpc>
-                <a:spcPts val="4620"/>
-              </a:lnSpc>
-              <a:buAutoNum type="arabicPeriod" startAt="1"/>
-            </a:pPr>
-            <a:r>
-              <a:rPr lang="en-US" sz="3300" spc="138" u="sng">
-                <a:solidFill>
-                  <a:srgbClr val="0000FF"/>
-                </a:solidFill>
-                <a:latin typeface="Noto Serif Ethiopic Condensed"/>
-                <a:ea typeface="Noto Serif Ethiopic Condensed"/>
-                <a:cs typeface="Noto Serif Ethiopic Condensed"/>
-                <a:sym typeface="Noto Serif Ethiopic Condensed"/>
-                <a:hlinkClick r:id="rId9" tooltip="https://data.mendeley.com/datasets/nfj84km5fz/1"/>
-              </a:rPr>
-              <a:t>“Agriculture Data set in the Karnataka”</a:t>
-            </a:r>
-          </a:p>
-          <a:p>
-            <a:pPr algn="l" marL="712470" indent="-356235" lvl="1">
-              <a:lnSpc>
-                <a:spcPts val="4620"/>
-              </a:lnSpc>
-              <a:buAutoNum type="arabicPeriod" startAt="1"/>
-            </a:pPr>
-            <a:r>
-              <a:rPr lang="en-US" sz="3300" spc="138" u="sng">
-                <a:solidFill>
-                  <a:srgbClr val="0000FF"/>
-                </a:solidFill>
-                <a:latin typeface="Noto Serif Ethiopic Condensed"/>
-                <a:ea typeface="Noto Serif Ethiopic Condensed"/>
-                <a:cs typeface="Noto Serif Ethiopic Condensed"/>
-                <a:sym typeface="Noto Serif Ethiopic Condensed"/>
-                <a:hlinkClick r:id="rId10" tooltip="https://www.kaggle.com/datasets/umeradnaan/prediction-of-disaster-management-in-2024"/>
-              </a:rPr>
-              <a:t>“Forecasting Disaster Management in 2024”</a:t>
-            </a:r>
-          </a:p>
-        </p:txBody>
-      </p:sp>
-      <p:sp>
-        <p:nvSpPr>
-          <p:cNvPr name="Freeform 4" id="4"/>
-          <p:cNvSpPr/>
-          <p:nvPr/>
-        </p:nvSpPr>
-        <p:spPr>
-          <a:xfrm flipH="false" flipV="false" rot="0">
-            <a:off x="1028700" y="501777"/>
-            <a:ext cx="2528697" cy="191832"/>
-          </a:xfrm>
-          <a:custGeom>
-            <a:avLst/>
-            <a:gdLst/>
-            <a:ahLst/>
-            <a:cxnLst/>
-            <a:rect r="r" b="b" t="t" l="l"/>
-            <a:pathLst>
-              <a:path h="191832" w="2528697">
-                <a:moveTo>
-                  <a:pt x="0" y="0"/>
-                </a:moveTo>
-                <a:lnTo>
-                  <a:pt x="2528697" y="0"/>
-                </a:lnTo>
-                <a:lnTo>
-                  <a:pt x="2528697" y="191832"/>
-                </a:lnTo>
-                <a:lnTo>
-                  <a:pt x="0" y="191832"/>
-                </a:lnTo>
-                <a:lnTo>
-                  <a:pt x="0" y="0"/>
-                </a:lnTo>
-                <a:close/>
-              </a:path>
-            </a:pathLst>
-          </a:custGeom>
-          <a:blipFill>
-            <a:blip r:embed="rId11"/>
-            <a:stretch>
-              <a:fillRect l="0" t="0" r="0" b="0"/>
-            </a:stretch>
-          </a:blipFill>
-        </p:spPr>
-      </p:sp>
-    </p:spTree>
-  </p:cSld>
-  <p:clrMapOvr>
-    <a:masterClrMapping/>
-  </p:clrMapOvr>
-</p:sld>
-</file>
-
-<file path=ppt/slides/slide2.xml><?xml version="1.0" encoding="utf-8"?>
-<p:sld xmlns:p="http://schemas.openxmlformats.org/presentationml/2006/main" xmlns:a="http://schemas.openxmlformats.org/drawingml/2006/main" xmlns:r="http://schemas.openxmlformats.org/officeDocument/2006/relationships">
-  <p:cSld>
-    <p:bg>
-      <p:bgPr>
-        <a:solidFill>
-          <a:srgbClr val="EBF2FA"/>
-        </a:solidFill>
-      </p:bgPr>
-    </p:bg>
-    <p:spTree>
-      <p:nvGrpSpPr>
-        <p:cNvPr id="1" name=""/>
-        <p:cNvGrpSpPr/>
-        <p:nvPr/>
-      </p:nvGrpSpPr>
-      <p:grpSpPr>
-        <a:xfrm>
-          <a:off x="0" y="0"/>
-          <a:ext cx="0" cy="0"/>
-          <a:chOff x="0" y="0"/>
-          <a:chExt cx="0" cy="0"/>
-        </a:xfrm>
-      </p:grpSpPr>
-      <p:sp>
-        <p:nvSpPr>
-          <p:cNvPr name="Freeform 2" id="2"/>
-          <p:cNvSpPr/>
-          <p:nvPr/>
-        </p:nvSpPr>
-        <p:spPr>
-          <a:xfrm flipH="false" flipV="false" rot="0">
-            <a:off x="1028700" y="501777"/>
-            <a:ext cx="2528697" cy="191832"/>
-          </a:xfrm>
-          <a:custGeom>
-            <a:avLst/>
-            <a:gdLst/>
-            <a:ahLst/>
-            <a:cxnLst/>
-            <a:rect r="r" b="b" t="t" l="l"/>
-            <a:pathLst>
-              <a:path h="191832" w="2528697">
+              <a:path w="2528697" h="191832">
                 <a:moveTo>
                   <a:pt x="0" y="0"/>
                 </a:moveTo>
@@ -4836,1008 +4447,26 @@
           <a:blipFill>
             <a:blip r:embed="rId2"/>
             <a:stretch>
-              <a:fillRect l="0" t="0" r="0" b="0"/>
+              <a:fillRect/>
             </a:stretch>
           </a:blipFill>
         </p:spPr>
-      </p:sp>
-      <p:sp>
-        <p:nvSpPr>
-          <p:cNvPr name="Freeform 3" id="3"/>
-          <p:cNvSpPr/>
-          <p:nvPr/>
-        </p:nvSpPr>
-        <p:spPr>
-          <a:xfrm flipH="false" flipV="false" rot="0">
-            <a:off x="1791039" y="1269013"/>
-            <a:ext cx="984969" cy="984969"/>
-          </a:xfrm>
-          <a:custGeom>
-            <a:avLst/>
-            <a:gdLst/>
-            <a:ahLst/>
-            <a:cxnLst/>
-            <a:rect r="r" b="b" t="t" l="l"/>
-            <a:pathLst>
-              <a:path h="984969" w="984969">
-                <a:moveTo>
-                  <a:pt x="0" y="0"/>
-                </a:moveTo>
-                <a:lnTo>
-                  <a:pt x="984969" y="0"/>
-                </a:lnTo>
-                <a:lnTo>
-                  <a:pt x="984969" y="984969"/>
-                </a:lnTo>
-                <a:lnTo>
-                  <a:pt x="0" y="984969"/>
-                </a:lnTo>
-                <a:lnTo>
-                  <a:pt x="0" y="0"/>
-                </a:lnTo>
-                <a:close/>
-              </a:path>
-            </a:pathLst>
-          </a:custGeom>
-          <a:blipFill>
-            <a:blip r:embed="rId3"/>
-            <a:stretch>
-              <a:fillRect l="0" t="0" r="0" b="0"/>
-            </a:stretch>
-          </a:blipFill>
-        </p:spPr>
-      </p:sp>
-      <p:sp>
-        <p:nvSpPr>
-          <p:cNvPr name="Freeform 4" id="4"/>
-          <p:cNvSpPr/>
-          <p:nvPr/>
-        </p:nvSpPr>
-        <p:spPr>
-          <a:xfrm flipH="false" flipV="false" rot="0">
-            <a:off x="1872156" y="4476750"/>
-            <a:ext cx="841785" cy="841785"/>
-          </a:xfrm>
-          <a:custGeom>
-            <a:avLst/>
-            <a:gdLst/>
-            <a:ahLst/>
-            <a:cxnLst/>
-            <a:rect r="r" b="b" t="t" l="l"/>
-            <a:pathLst>
-              <a:path h="841785" w="841785">
-                <a:moveTo>
-                  <a:pt x="0" y="0"/>
-                </a:moveTo>
-                <a:lnTo>
-                  <a:pt x="841785" y="0"/>
-                </a:lnTo>
-                <a:lnTo>
-                  <a:pt x="841785" y="841785"/>
-                </a:lnTo>
-                <a:lnTo>
-                  <a:pt x="0" y="841785"/>
-                </a:lnTo>
-                <a:lnTo>
-                  <a:pt x="0" y="0"/>
-                </a:lnTo>
-                <a:close/>
-              </a:path>
-            </a:pathLst>
-          </a:custGeom>
-          <a:blipFill>
-            <a:blip r:embed="rId4"/>
-            <a:stretch>
-              <a:fillRect l="0" t="0" r="0" b="0"/>
-            </a:stretch>
-          </a:blipFill>
-        </p:spPr>
-      </p:sp>
-      <p:sp>
-        <p:nvSpPr>
-          <p:cNvPr name="Freeform 5" id="5"/>
-          <p:cNvSpPr/>
-          <p:nvPr/>
-        </p:nvSpPr>
-        <p:spPr>
-          <a:xfrm flipH="false" flipV="false" rot="0">
-            <a:off x="1842787" y="6798602"/>
-            <a:ext cx="900523" cy="900523"/>
-          </a:xfrm>
-          <a:custGeom>
-            <a:avLst/>
-            <a:gdLst/>
-            <a:ahLst/>
-            <a:cxnLst/>
-            <a:rect r="r" b="b" t="t" l="l"/>
-            <a:pathLst>
-              <a:path h="900523" w="900523">
-                <a:moveTo>
-                  <a:pt x="0" y="0"/>
-                </a:moveTo>
-                <a:lnTo>
-                  <a:pt x="900523" y="0"/>
-                </a:lnTo>
-                <a:lnTo>
-                  <a:pt x="900523" y="900523"/>
-                </a:lnTo>
-                <a:lnTo>
-                  <a:pt x="0" y="900523"/>
-                </a:lnTo>
-                <a:lnTo>
-                  <a:pt x="0" y="0"/>
-                </a:lnTo>
-                <a:close/>
-              </a:path>
-            </a:pathLst>
-          </a:custGeom>
-          <a:blipFill>
-            <a:blip r:embed="rId5"/>
-            <a:stretch>
-              <a:fillRect l="0" t="0" r="0" b="0"/>
-            </a:stretch>
-          </a:blipFill>
-        </p:spPr>
-      </p:sp>
-      <p:sp>
-        <p:nvSpPr>
-          <p:cNvPr name="TextBox 6" id="6"/>
-          <p:cNvSpPr txBox="true"/>
-          <p:nvPr/>
-        </p:nvSpPr>
-        <p:spPr>
-          <a:xfrm rot="0">
-            <a:off x="2958366" y="4646663"/>
-            <a:ext cx="12173317" cy="2306955"/>
-          </a:xfrm>
-          <a:prstGeom prst="rect">
-            <a:avLst/>
-          </a:prstGeom>
-        </p:spPr>
-        <p:txBody>
-          <a:bodyPr anchor="t" rtlCol="false" tIns="0" lIns="0" bIns="0" rIns="0">
-            <a:spAutoFit/>
-          </a:bodyPr>
-          <a:lstStyle/>
-          <a:p>
-            <a:pPr algn="l">
-              <a:lnSpc>
-                <a:spcPts val="4620"/>
-              </a:lnSpc>
-            </a:pPr>
-            <a:r>
-              <a:rPr lang="en-US" sz="3300" b="true">
-                <a:solidFill>
-                  <a:srgbClr val="000000"/>
-                </a:solidFill>
-                <a:latin typeface="Noto Serif Ethiopic Condensed Bold"/>
-                <a:ea typeface="Noto Serif Ethiopic Condensed Bold"/>
-                <a:cs typeface="Noto Serif Ethiopic Condensed Bold"/>
-                <a:sym typeface="Noto Serif Ethiopic Condensed Bold"/>
-              </a:rPr>
-              <a:t>Obj</a:t>
-            </a:r>
-            <a:r>
-              <a:rPr lang="en-US" b="true" sz="3300">
-                <a:solidFill>
-                  <a:srgbClr val="000000"/>
-                </a:solidFill>
-                <a:latin typeface="Noto Serif Ethiopic Condensed Bold"/>
-                <a:ea typeface="Noto Serif Ethiopic Condensed Bold"/>
-                <a:cs typeface="Noto Serif Ethiopic Condensed Bold"/>
-                <a:sym typeface="Noto Serif Ethiopic Condensed Bold"/>
-              </a:rPr>
-              <a:t>ective:</a:t>
-            </a:r>
-          </a:p>
-          <a:p>
-            <a:pPr algn="l" marL="712470" indent="-356235" lvl="1">
-              <a:lnSpc>
-                <a:spcPts val="4620"/>
-              </a:lnSpc>
-              <a:buFont typeface="Arial"/>
-              <a:buChar char="•"/>
-            </a:pPr>
-            <a:r>
-              <a:rPr lang="en-US" sz="3300">
-                <a:solidFill>
-                  <a:srgbClr val="000000"/>
-                </a:solidFill>
-                <a:latin typeface="Noto Serif Ethiopic Condensed"/>
-                <a:ea typeface="Noto Serif Ethiopic Condensed"/>
-                <a:cs typeface="Noto Serif Ethiopic Condensed"/>
-                <a:sym typeface="Noto Serif Ethiopic Condensed"/>
-              </a:rPr>
-              <a:t>Dem</a:t>
-            </a:r>
-            <a:r>
-              <a:rPr lang="en-US" sz="3300">
-                <a:solidFill>
-                  <a:srgbClr val="000000"/>
-                </a:solidFill>
-                <a:latin typeface="Noto Serif Ethiopic Condensed"/>
-                <a:ea typeface="Noto Serif Ethiopic Condensed"/>
-                <a:cs typeface="Noto Serif Ethiopic Condensed"/>
-                <a:sym typeface="Noto Serif Ethiopic Condensed"/>
-              </a:rPr>
-              <a:t>ocratize elite-level, personalized mentorship at consumer scale.</a:t>
-            </a:r>
-          </a:p>
-          <a:p>
-            <a:pPr algn="l">
-              <a:lnSpc>
-                <a:spcPts val="4620"/>
-              </a:lnSpc>
-            </a:pPr>
-          </a:p>
-        </p:txBody>
-      </p:sp>
-      <p:sp>
-        <p:nvSpPr>
-          <p:cNvPr name="TextBox 7" id="7"/>
-          <p:cNvSpPr txBox="true"/>
-          <p:nvPr/>
-        </p:nvSpPr>
-        <p:spPr>
-          <a:xfrm rot="0">
-            <a:off x="2923831" y="1263975"/>
-            <a:ext cx="9096375" cy="795020"/>
-          </a:xfrm>
-          <a:prstGeom prst="rect">
-            <a:avLst/>
-          </a:prstGeom>
-        </p:spPr>
-        <p:txBody>
-          <a:bodyPr anchor="t" rtlCol="false" tIns="0" lIns="0" bIns="0" rIns="0">
-            <a:spAutoFit/>
-          </a:bodyPr>
-          <a:lstStyle/>
-          <a:p>
-            <a:pPr algn="ctr">
-              <a:lnSpc>
-                <a:spcPts val="6580"/>
-              </a:lnSpc>
-              <a:spcBef>
-                <a:spcPct val="0"/>
-              </a:spcBef>
-            </a:pPr>
-            <a:r>
-              <a:rPr lang="en-US" sz="4700">
-                <a:solidFill>
-                  <a:srgbClr val="000000"/>
-                </a:solidFill>
-                <a:latin typeface="Noto Serif Ethiopic Condensed"/>
-                <a:ea typeface="Noto Serif Ethiopic Condensed"/>
-                <a:cs typeface="Noto Serif Ethiopic Condensed"/>
-                <a:sym typeface="Noto Serif Ethiopic Condensed"/>
-              </a:rPr>
-              <a:t>Problem Definition &amp; Its Significance</a:t>
-            </a:r>
-          </a:p>
-        </p:txBody>
-      </p:sp>
-      <p:sp>
-        <p:nvSpPr>
-          <p:cNvPr name="TextBox 8" id="8"/>
-          <p:cNvSpPr txBox="true"/>
-          <p:nvPr/>
-        </p:nvSpPr>
-        <p:spPr>
-          <a:xfrm rot="0">
-            <a:off x="2676181" y="2444482"/>
-            <a:ext cx="13396253" cy="1725930"/>
-          </a:xfrm>
-          <a:prstGeom prst="rect">
-            <a:avLst/>
-          </a:prstGeom>
-        </p:spPr>
-        <p:txBody>
-          <a:bodyPr anchor="t" rtlCol="false" tIns="0" lIns="0" bIns="0" rIns="0">
-            <a:spAutoFit/>
-          </a:bodyPr>
-          <a:lstStyle/>
-          <a:p>
-            <a:pPr algn="l" marL="712470" indent="-356235" lvl="1">
-              <a:lnSpc>
-                <a:spcPts val="4620"/>
-              </a:lnSpc>
-              <a:buFont typeface="Arial"/>
-              <a:buChar char="•"/>
-            </a:pPr>
-            <a:r>
-              <a:rPr lang="en-US" sz="3300">
-                <a:solidFill>
-                  <a:srgbClr val="000000"/>
-                </a:solidFill>
-                <a:latin typeface="Noto Serif Ethiopic Condensed"/>
-                <a:ea typeface="Noto Serif Ethiopic Condensed"/>
-                <a:cs typeface="Noto Serif Ethiopic Condensed"/>
-                <a:sym typeface="Noto Serif Ethiopic Condensed"/>
-              </a:rPr>
-              <a:t>Histo</a:t>
-            </a:r>
-            <a:r>
-              <a:rPr lang="en-US" sz="3300">
-                <a:solidFill>
-                  <a:srgbClr val="000000"/>
-                </a:solidFill>
-                <a:latin typeface="Noto Serif Ethiopic Condensed"/>
-                <a:ea typeface="Noto Serif Ethiopic Condensed"/>
-                <a:cs typeface="Noto Serif Ethiopic Condensed"/>
-                <a:sym typeface="Noto Serif Ethiopic Condensed"/>
-              </a:rPr>
-              <a:t>rically, high-quality, 1-on-1 tutoring is an exclusive privilege.</a:t>
-            </a:r>
-          </a:p>
-          <a:p>
-            <a:pPr algn="l" marL="712470" indent="-356235" lvl="1">
-              <a:lnSpc>
-                <a:spcPts val="4620"/>
-              </a:lnSpc>
-              <a:buFont typeface="Arial"/>
-              <a:buChar char="•"/>
-            </a:pPr>
-            <a:r>
-              <a:rPr lang="en-US" sz="3300">
-                <a:solidFill>
-                  <a:srgbClr val="000000"/>
-                </a:solidFill>
-                <a:latin typeface="Noto Serif Ethiopic Condensed"/>
-                <a:ea typeface="Noto Serif Ethiopic Condensed"/>
-                <a:cs typeface="Noto Serif Ethiopic Condensed"/>
-                <a:sym typeface="Noto Serif Ethiopic Condensed"/>
-              </a:rPr>
-              <a:t>Mass education systems face impossible student-to-teacher ratios.</a:t>
-            </a:r>
-          </a:p>
-          <a:p>
-            <a:pPr algn="l" marL="712470" indent="-356235" lvl="1">
-              <a:lnSpc>
-                <a:spcPts val="4620"/>
-              </a:lnSpc>
-              <a:buFont typeface="Arial"/>
-              <a:buChar char="•"/>
-            </a:pPr>
-            <a:r>
-              <a:rPr lang="en-US" sz="3300">
-                <a:solidFill>
-                  <a:srgbClr val="000000"/>
-                </a:solidFill>
-                <a:latin typeface="Noto Serif Ethiopic Condensed"/>
-                <a:ea typeface="Noto Serif Ethiopic Condensed"/>
-                <a:cs typeface="Noto Serif Ethiopic Condensed"/>
-                <a:sym typeface="Noto Serif Ethiopic Condensed"/>
-              </a:rPr>
-              <a:t>Result: Millions fall behind in foundational logic, literacy, and numeracy.</a:t>
-            </a:r>
-          </a:p>
-        </p:txBody>
-      </p:sp>
-      <p:sp>
-        <p:nvSpPr>
-          <p:cNvPr name="TextBox 9" id="9"/>
-          <p:cNvSpPr txBox="true"/>
-          <p:nvPr/>
-        </p:nvSpPr>
-        <p:spPr>
-          <a:xfrm rot="0">
-            <a:off x="2911735" y="6979920"/>
-            <a:ext cx="14706706" cy="2306955"/>
-          </a:xfrm>
-          <a:prstGeom prst="rect">
-            <a:avLst/>
-          </a:prstGeom>
-        </p:spPr>
-        <p:txBody>
-          <a:bodyPr anchor="t" rtlCol="false" tIns="0" lIns="0" bIns="0" rIns="0">
-            <a:spAutoFit/>
-          </a:bodyPr>
-          <a:lstStyle/>
-          <a:p>
-            <a:pPr algn="l">
-              <a:lnSpc>
-                <a:spcPts val="4619"/>
-              </a:lnSpc>
-            </a:pPr>
-            <a:r>
-              <a:rPr lang="en-US" sz="3299" b="true">
-                <a:solidFill>
-                  <a:srgbClr val="000000"/>
-                </a:solidFill>
-                <a:latin typeface="Noto Serif Ethiopic Condensed Bold"/>
-                <a:ea typeface="Noto Serif Ethiopic Condensed Bold"/>
-                <a:cs typeface="Noto Serif Ethiopic Condensed Bold"/>
-                <a:sym typeface="Noto Serif Ethiopic Condensed Bold"/>
-              </a:rPr>
-              <a:t>Approa</a:t>
-            </a:r>
-            <a:r>
-              <a:rPr lang="en-US" b="true" sz="3299">
-                <a:solidFill>
-                  <a:srgbClr val="000000"/>
-                </a:solidFill>
-                <a:latin typeface="Noto Serif Ethiopic Condensed Bold"/>
-                <a:ea typeface="Noto Serif Ethiopic Condensed Bold"/>
-                <a:cs typeface="Noto Serif Ethiopic Condensed Bold"/>
-                <a:sym typeface="Noto Serif Ethiopic Condensed Bold"/>
-              </a:rPr>
-              <a:t>ch:</a:t>
-            </a:r>
-          </a:p>
-          <a:p>
-            <a:pPr algn="l" marL="712470" indent="-356235" lvl="1">
-              <a:lnSpc>
-                <a:spcPts val="4619"/>
-              </a:lnSpc>
-              <a:buFont typeface="Arial"/>
-              <a:buChar char="•"/>
-            </a:pPr>
-            <a:r>
-              <a:rPr lang="en-US" sz="3299">
-                <a:solidFill>
-                  <a:srgbClr val="000000"/>
-                </a:solidFill>
-                <a:latin typeface="Noto Serif Ethiopic Condensed"/>
-                <a:ea typeface="Noto Serif Ethiopic Condensed"/>
-                <a:cs typeface="Noto Serif Ethiopic Condensed"/>
-                <a:sym typeface="Noto Serif Ethiopic Condensed"/>
-              </a:rPr>
-              <a:t>Build a multi-agent AI tut</a:t>
-            </a:r>
-            <a:r>
-              <a:rPr lang="en-US" sz="3299">
-                <a:solidFill>
-                  <a:srgbClr val="000000"/>
-                </a:solidFill>
-                <a:latin typeface="Noto Serif Ethiopic Condensed"/>
-                <a:ea typeface="Noto Serif Ethiopic Condensed"/>
-                <a:cs typeface="Noto Serif Ethiopic Condensed"/>
-                <a:sym typeface="Noto Serif Ethiopic Condensed"/>
-              </a:rPr>
-              <a:t>or that dynamically adapts its teaching metaphor, regional dialect, and difficulty based on the learner's age and passions.</a:t>
-            </a:r>
-          </a:p>
-          <a:p>
-            <a:pPr algn="l">
-              <a:lnSpc>
-                <a:spcPts val="4619"/>
-              </a:lnSpc>
-            </a:pPr>
-          </a:p>
-        </p:txBody>
-      </p:sp>
-    </p:spTree>
-  </p:cSld>
-  <p:clrMapOvr>
-    <a:masterClrMapping/>
-  </p:clrMapOvr>
-</p:sld>
-</file>
-
-<file path=ppt/slides/slide3.xml><?xml version="1.0" encoding="utf-8"?>
-<p:sld xmlns:p="http://schemas.openxmlformats.org/presentationml/2006/main" xmlns:a="http://schemas.openxmlformats.org/drawingml/2006/main" xmlns:r="http://schemas.openxmlformats.org/officeDocument/2006/relationships">
-  <p:cSld>
-    <p:bg>
-      <p:bgPr>
-        <a:solidFill>
-          <a:srgbClr val="EBF2FA"/>
-        </a:solidFill>
-      </p:bgPr>
-    </p:bg>
-    <p:spTree>
-      <p:nvGrpSpPr>
-        <p:cNvPr id="1" name=""/>
-        <p:cNvGrpSpPr/>
-        <p:nvPr/>
-      </p:nvGrpSpPr>
-      <p:grpSpPr>
-        <a:xfrm>
-          <a:off x="0" y="0"/>
-          <a:ext cx="0" cy="0"/>
-          <a:chOff x="0" y="0"/>
-          <a:chExt cx="0" cy="0"/>
-        </a:xfrm>
-      </p:grpSpPr>
-      <p:sp>
-        <p:nvSpPr>
-          <p:cNvPr name="Freeform 2" id="2"/>
-          <p:cNvSpPr/>
-          <p:nvPr/>
-        </p:nvSpPr>
-        <p:spPr>
-          <a:xfrm flipH="false" flipV="false" rot="0">
-            <a:off x="1028700" y="501777"/>
-            <a:ext cx="2528697" cy="191832"/>
-          </a:xfrm>
-          <a:custGeom>
-            <a:avLst/>
-            <a:gdLst/>
-            <a:ahLst/>
-            <a:cxnLst/>
-            <a:rect r="r" b="b" t="t" l="l"/>
-            <a:pathLst>
-              <a:path h="191832" w="2528697">
-                <a:moveTo>
-                  <a:pt x="0" y="0"/>
-                </a:moveTo>
-                <a:lnTo>
-                  <a:pt x="2528697" y="0"/>
-                </a:lnTo>
-                <a:lnTo>
-                  <a:pt x="2528697" y="191832"/>
-                </a:lnTo>
-                <a:lnTo>
-                  <a:pt x="0" y="191832"/>
-                </a:lnTo>
-                <a:lnTo>
-                  <a:pt x="0" y="0"/>
-                </a:lnTo>
-                <a:close/>
-              </a:path>
-            </a:pathLst>
-          </a:custGeom>
-          <a:blipFill>
-            <a:blip r:embed="rId2"/>
-            <a:stretch>
-              <a:fillRect l="0" t="0" r="0" b="0"/>
-            </a:stretch>
-          </a:blipFill>
-        </p:spPr>
-      </p:sp>
-      <p:sp>
-        <p:nvSpPr>
-          <p:cNvPr name="Freeform 3" id="3"/>
-          <p:cNvSpPr/>
-          <p:nvPr/>
-        </p:nvSpPr>
-        <p:spPr>
-          <a:xfrm flipH="false" flipV="false" rot="0">
-            <a:off x="1581813" y="835388"/>
-            <a:ext cx="862014" cy="862014"/>
-          </a:xfrm>
-          <a:custGeom>
-            <a:avLst/>
-            <a:gdLst/>
-            <a:ahLst/>
-            <a:cxnLst/>
-            <a:rect r="r" b="b" t="t" l="l"/>
-            <a:pathLst>
-              <a:path h="862014" w="862014">
-                <a:moveTo>
-                  <a:pt x="0" y="0"/>
-                </a:moveTo>
-                <a:lnTo>
-                  <a:pt x="862014" y="0"/>
-                </a:lnTo>
-                <a:lnTo>
-                  <a:pt x="862014" y="862014"/>
-                </a:lnTo>
-                <a:lnTo>
-                  <a:pt x="0" y="862014"/>
-                </a:lnTo>
-                <a:lnTo>
-                  <a:pt x="0" y="0"/>
-                </a:lnTo>
-                <a:close/>
-              </a:path>
-            </a:pathLst>
-          </a:custGeom>
-          <a:blipFill>
-            <a:blip r:embed="rId3"/>
-            <a:stretch>
-              <a:fillRect l="0" t="0" r="0" b="0"/>
-            </a:stretch>
-          </a:blipFill>
-        </p:spPr>
-      </p:sp>
-      <p:sp>
-        <p:nvSpPr>
-          <p:cNvPr name="Freeform 4" id="4"/>
-          <p:cNvSpPr/>
-          <p:nvPr/>
-        </p:nvSpPr>
-        <p:spPr>
-          <a:xfrm flipH="false" flipV="false" rot="0">
-            <a:off x="1581813" y="5015670"/>
-            <a:ext cx="1019453" cy="1019453"/>
-          </a:xfrm>
-          <a:custGeom>
-            <a:avLst/>
-            <a:gdLst/>
-            <a:ahLst/>
-            <a:cxnLst/>
-            <a:rect r="r" b="b" t="t" l="l"/>
-            <a:pathLst>
-              <a:path h="1019453" w="1019453">
-                <a:moveTo>
-                  <a:pt x="0" y="0"/>
-                </a:moveTo>
-                <a:lnTo>
-                  <a:pt x="1019454" y="0"/>
-                </a:lnTo>
-                <a:lnTo>
-                  <a:pt x="1019454" y="1019453"/>
-                </a:lnTo>
-                <a:lnTo>
-                  <a:pt x="0" y="1019453"/>
-                </a:lnTo>
-                <a:lnTo>
-                  <a:pt x="0" y="0"/>
-                </a:lnTo>
-                <a:close/>
-              </a:path>
-            </a:pathLst>
-          </a:custGeom>
-          <a:blipFill>
-            <a:blip r:embed="rId4"/>
-            <a:stretch>
-              <a:fillRect l="0" t="0" r="0" b="0"/>
-            </a:stretch>
-          </a:blipFill>
-        </p:spPr>
-      </p:sp>
-      <p:sp>
-        <p:nvSpPr>
-          <p:cNvPr name="TextBox 5" id="5"/>
-          <p:cNvSpPr txBox="true"/>
-          <p:nvPr/>
-        </p:nvSpPr>
-        <p:spPr>
-          <a:xfrm rot="0">
-            <a:off x="2814366" y="5143931"/>
-            <a:ext cx="12173317" cy="3469005"/>
-          </a:xfrm>
-          <a:prstGeom prst="rect">
-            <a:avLst/>
-          </a:prstGeom>
-        </p:spPr>
-        <p:txBody>
-          <a:bodyPr anchor="t" rtlCol="false" tIns="0" lIns="0" bIns="0" rIns="0">
-            <a:spAutoFit/>
-          </a:bodyPr>
-          <a:lstStyle/>
-          <a:p>
-            <a:pPr algn="l">
-              <a:lnSpc>
-                <a:spcPts val="4620"/>
-              </a:lnSpc>
-            </a:pPr>
-            <a:r>
-              <a:rPr lang="en-US" sz="3300" b="true">
-                <a:solidFill>
-                  <a:srgbClr val="000000"/>
-                </a:solidFill>
-                <a:latin typeface="Noto Serif Ethiopic Condensed Bold"/>
-                <a:ea typeface="Noto Serif Ethiopic Condensed Bold"/>
-                <a:cs typeface="Noto Serif Ethiopic Condensed Bold"/>
-                <a:sym typeface="Noto Serif Ethiopic Condensed Bold"/>
-              </a:rPr>
-              <a:t>Current Gap</a:t>
-            </a:r>
-            <a:r>
-              <a:rPr lang="en-US" b="true" sz="3300">
-                <a:solidFill>
-                  <a:srgbClr val="000000"/>
-                </a:solidFill>
-                <a:latin typeface="Noto Serif Ethiopic Condensed Bold"/>
-                <a:ea typeface="Noto Serif Ethiopic Condensed Bold"/>
-                <a:cs typeface="Noto Serif Ethiopic Condensed Bold"/>
-                <a:sym typeface="Noto Serif Ethiopic Condensed Bold"/>
-              </a:rPr>
-              <a:t>:</a:t>
-            </a:r>
-          </a:p>
-          <a:p>
-            <a:pPr algn="l" marL="712470" indent="-356235" lvl="1">
-              <a:lnSpc>
-                <a:spcPts val="4620"/>
-              </a:lnSpc>
-              <a:buFont typeface="Arial"/>
-              <a:buChar char="•"/>
-            </a:pPr>
-            <a:r>
-              <a:rPr lang="en-US" sz="3300">
-                <a:solidFill>
-                  <a:srgbClr val="000000"/>
-                </a:solidFill>
-                <a:latin typeface="Noto Serif Ethiopic Condensed"/>
-                <a:ea typeface="Noto Serif Ethiopic Condensed"/>
-                <a:cs typeface="Noto Serif Ethiopic Condensed"/>
-                <a:sym typeface="Noto Serif Ethiopic Condensed"/>
-              </a:rPr>
-              <a:t>Ad</a:t>
-            </a:r>
-            <a:r>
-              <a:rPr lang="en-US" sz="3300">
-                <a:solidFill>
-                  <a:srgbClr val="000000"/>
-                </a:solidFill>
-                <a:latin typeface="Noto Serif Ethiopic Condensed"/>
-                <a:ea typeface="Noto Serif Ethiopic Condensed"/>
-                <a:cs typeface="Noto Serif Ethiopic Condensed"/>
-                <a:sym typeface="Noto Serif Ethiopic Condensed"/>
-              </a:rPr>
-              <a:t>aptive Persona &amp; Tone: Missing in current solutions.</a:t>
-            </a:r>
-          </a:p>
-          <a:p>
-            <a:pPr algn="l" marL="712470" indent="-356235" lvl="1">
-              <a:lnSpc>
-                <a:spcPts val="4620"/>
-              </a:lnSpc>
-              <a:buFont typeface="Arial"/>
-              <a:buChar char="•"/>
-            </a:pPr>
-            <a:r>
-              <a:rPr lang="en-US" sz="3300">
-                <a:solidFill>
-                  <a:srgbClr val="000000"/>
-                </a:solidFill>
-                <a:latin typeface="Noto Serif Ethiopic Condensed"/>
-                <a:ea typeface="Noto Serif Ethiopic Condensed"/>
-                <a:cs typeface="Noto Serif Ethiopic Condensed"/>
-                <a:sym typeface="Noto Serif Ethiopic Condensed"/>
-              </a:rPr>
-              <a:t>Regional Dialect/Idioms: Missing in current solutions</a:t>
-            </a:r>
-          </a:p>
-          <a:p>
-            <a:pPr algn="l" marL="712470" indent="-356235" lvl="1">
-              <a:lnSpc>
-                <a:spcPts val="4620"/>
-              </a:lnSpc>
-              <a:buFont typeface="Arial"/>
-              <a:buChar char="•"/>
-            </a:pPr>
-            <a:r>
-              <a:rPr lang="en-US" sz="3300">
-                <a:solidFill>
-                  <a:srgbClr val="000000"/>
-                </a:solidFill>
-                <a:latin typeface="Noto Serif Ethiopic Condensed"/>
-                <a:ea typeface="Noto Serif Ethiopic Condensed"/>
-                <a:cs typeface="Noto Serif Ethiopic Condensed"/>
-                <a:sym typeface="Noto Serif Ethiopic Condensed"/>
-              </a:rPr>
-              <a:t>Non-linear Fallback Routing: Missing (Standard AI just repeats "Try Again").</a:t>
-            </a:r>
-          </a:p>
-          <a:p>
-            <a:pPr algn="l">
-              <a:lnSpc>
-                <a:spcPts val="4620"/>
-              </a:lnSpc>
-            </a:pPr>
-          </a:p>
-        </p:txBody>
-      </p:sp>
-      <p:sp>
-        <p:nvSpPr>
-          <p:cNvPr name="TextBox 6" id="6"/>
-          <p:cNvSpPr txBox="true"/>
-          <p:nvPr/>
-        </p:nvSpPr>
-        <p:spPr>
-          <a:xfrm rot="0">
-            <a:off x="2543306" y="760603"/>
-            <a:ext cx="7056597" cy="795020"/>
-          </a:xfrm>
-          <a:prstGeom prst="rect">
-            <a:avLst/>
-          </a:prstGeom>
-        </p:spPr>
-        <p:txBody>
-          <a:bodyPr anchor="t" rtlCol="false" tIns="0" lIns="0" bIns="0" rIns="0">
-            <a:spAutoFit/>
-          </a:bodyPr>
-          <a:lstStyle/>
-          <a:p>
-            <a:pPr algn="ctr">
-              <a:lnSpc>
-                <a:spcPts val="6580"/>
-              </a:lnSpc>
-              <a:spcBef>
-                <a:spcPct val="0"/>
-              </a:spcBef>
-            </a:pPr>
-            <a:r>
-              <a:rPr lang="en-US" sz="4700">
-                <a:solidFill>
-                  <a:srgbClr val="000000"/>
-                </a:solidFill>
-                <a:latin typeface="Noto Serif Ethiopic Condensed"/>
-                <a:ea typeface="Noto Serif Ethiopic Condensed"/>
-                <a:cs typeface="Noto Serif Ethiopic Condensed"/>
-                <a:sym typeface="Noto Serif Ethiopic Condensed"/>
-              </a:rPr>
-              <a:t>Literature Survey &amp; The Gap</a:t>
-            </a:r>
-          </a:p>
-        </p:txBody>
-      </p:sp>
-      <p:sp>
-        <p:nvSpPr>
-          <p:cNvPr name="TextBox 7" id="7"/>
-          <p:cNvSpPr txBox="true"/>
-          <p:nvPr/>
-        </p:nvSpPr>
-        <p:spPr>
-          <a:xfrm rot="0">
-            <a:off x="2676181" y="1630727"/>
-            <a:ext cx="13995054" cy="2887980"/>
-          </a:xfrm>
-          <a:prstGeom prst="rect">
-            <a:avLst/>
-          </a:prstGeom>
-        </p:spPr>
-        <p:txBody>
-          <a:bodyPr anchor="t" rtlCol="false" tIns="0" lIns="0" bIns="0" rIns="0">
-            <a:spAutoFit/>
-          </a:bodyPr>
-          <a:lstStyle/>
-          <a:p>
-            <a:pPr algn="l" marL="712470" indent="-356235" lvl="1">
-              <a:lnSpc>
-                <a:spcPts val="4620"/>
-              </a:lnSpc>
-              <a:buFont typeface="Arial"/>
-              <a:buChar char="•"/>
-            </a:pPr>
-            <a:r>
-              <a:rPr lang="en-US" sz="3300">
-                <a:solidFill>
-                  <a:srgbClr val="000000"/>
-                </a:solidFill>
-                <a:latin typeface="Noto Serif Ethiopic Condensed"/>
-                <a:ea typeface="Noto Serif Ethiopic Condensed"/>
-                <a:cs typeface="Noto Serif Ethiopic Condensed"/>
-                <a:sym typeface="Noto Serif Ethiopic Condensed"/>
-              </a:rPr>
-              <a:t>Exist</a:t>
-            </a:r>
-            <a:r>
-              <a:rPr lang="en-US" sz="3300">
-                <a:solidFill>
-                  <a:srgbClr val="000000"/>
-                </a:solidFill>
-                <a:latin typeface="Noto Serif Ethiopic Condensed"/>
-                <a:ea typeface="Noto Serif Ethiopic Condensed"/>
-                <a:cs typeface="Noto Serif Ethiopic Condensed"/>
-                <a:sym typeface="Noto Serif Ethiopic Condensed"/>
-              </a:rPr>
-              <a:t>ing EdTech AI acts like a rigid encyclopedia. It hallucinates and lacks emotional intelligence.</a:t>
-            </a:r>
-          </a:p>
-          <a:p>
-            <a:pPr algn="l" marL="712470" indent="-356235" lvl="1">
-              <a:lnSpc>
-                <a:spcPts val="4620"/>
-              </a:lnSpc>
-              <a:buFont typeface="Arial"/>
-              <a:buChar char="•"/>
-            </a:pPr>
-            <a:r>
-              <a:rPr lang="en-US" sz="3300">
-                <a:solidFill>
-                  <a:srgbClr val="000000"/>
-                </a:solidFill>
-                <a:latin typeface="Noto Serif Ethiopic Condensed"/>
-                <a:ea typeface="Noto Serif Ethiopic Condensed"/>
-                <a:cs typeface="Noto Serif Ethiopic Condensed"/>
-                <a:sym typeface="Noto Serif Ethiopic Condensed"/>
-              </a:rPr>
-              <a:t>Great teachers use regional dialects, local culture, and students' personal interests to make learning more relatable and effective.</a:t>
-            </a:r>
-          </a:p>
-          <a:p>
-            <a:pPr algn="l" marL="712470" indent="-356235" lvl="1">
-              <a:lnSpc>
-                <a:spcPts val="4620"/>
-              </a:lnSpc>
-              <a:buFont typeface="Arial"/>
-              <a:buChar char="•"/>
-            </a:pPr>
-            <a:r>
-              <a:rPr lang="en-US" sz="3300">
-                <a:solidFill>
-                  <a:srgbClr val="000000"/>
-                </a:solidFill>
-                <a:latin typeface="Noto Serif Ethiopic Condensed"/>
-                <a:ea typeface="Noto Serif Ethiopic Condensed"/>
-                <a:cs typeface="Noto Serif Ethiopic Condensed"/>
-                <a:sym typeface="Noto Serif Ethiopic Condensed"/>
-              </a:rPr>
-              <a:t>Current AI fails to replicate this human connection.</a:t>
-            </a:r>
-          </a:p>
-        </p:txBody>
-      </p:sp>
-    </p:spTree>
-  </p:cSld>
-  <p:clrMapOvr>
-    <a:masterClrMapping/>
-  </p:clrMapOvr>
-</p:sld>
-</file>
-
-<file path=ppt/slides/slide4.xml><?xml version="1.0" encoding="utf-8"?>
-<p:sld xmlns:p="http://schemas.openxmlformats.org/presentationml/2006/main" xmlns:a="http://schemas.openxmlformats.org/drawingml/2006/main" xmlns:r="http://schemas.openxmlformats.org/officeDocument/2006/relationships">
-  <p:cSld>
-    <p:bg>
-      <p:bgPr>
-        <a:solidFill>
-          <a:srgbClr val="EBF2FA"/>
-        </a:solidFill>
-      </p:bgPr>
-    </p:bg>
-    <p:spTree>
-      <p:nvGrpSpPr>
-        <p:cNvPr id="1" name=""/>
-        <p:cNvGrpSpPr/>
-        <p:nvPr/>
-      </p:nvGrpSpPr>
-      <p:grpSpPr>
-        <a:xfrm>
-          <a:off x="0" y="0"/>
-          <a:ext cx="0" cy="0"/>
-          <a:chOff x="0" y="0"/>
-          <a:chExt cx="0" cy="0"/>
-        </a:xfrm>
-      </p:grpSpPr>
-      <p:sp>
-        <p:nvSpPr>
-          <p:cNvPr name="Freeform 2" id="2"/>
-          <p:cNvSpPr/>
-          <p:nvPr/>
-        </p:nvSpPr>
-        <p:spPr>
-          <a:xfrm flipH="false" flipV="false" rot="0">
-            <a:off x="1028700" y="501777"/>
-            <a:ext cx="2528697" cy="191832"/>
-          </a:xfrm>
-          <a:custGeom>
-            <a:avLst/>
-            <a:gdLst/>
-            <a:ahLst/>
-            <a:cxnLst/>
-            <a:rect r="r" b="b" t="t" l="l"/>
-            <a:pathLst>
-              <a:path h="191832" w="2528697">
-                <a:moveTo>
-                  <a:pt x="0" y="0"/>
-                </a:moveTo>
-                <a:lnTo>
-                  <a:pt x="2528697" y="0"/>
-                </a:lnTo>
-                <a:lnTo>
-                  <a:pt x="2528697" y="191832"/>
-                </a:lnTo>
-                <a:lnTo>
-                  <a:pt x="0" y="191832"/>
-                </a:lnTo>
-                <a:lnTo>
-                  <a:pt x="0" y="0"/>
-                </a:lnTo>
-                <a:close/>
-              </a:path>
-            </a:pathLst>
-          </a:custGeom>
-          <a:blipFill>
-            <a:blip r:embed="rId2"/>
-            <a:stretch>
-              <a:fillRect l="0" t="0" r="0" b="0"/>
-            </a:stretch>
-          </a:blipFill>
-        </p:spPr>
+        <p:txBody>
+          <a:bodyPr/>
+          <a:lstStyle/>
+          <a:p>
+            <a:endParaRPr lang="en-IN"/>
+          </a:p>
+        </p:txBody>
       </p:sp>
       <p:grpSp>
         <p:nvGrpSpPr>
-          <p:cNvPr name="Group 3" id="3"/>
+          <p:cNvPr id="3" name="Group 3"/>
           <p:cNvGrpSpPr/>
           <p:nvPr/>
         </p:nvGrpSpPr>
         <p:grpSpPr>
-          <a:xfrm rot="0">
+          <a:xfrm>
             <a:off x="561775" y="2810898"/>
             <a:ext cx="3105243" cy="2319625"/>
             <a:chOff x="0" y="0"/>
@@ -5846,12 +4475,12 @@
         </p:grpSpPr>
         <p:sp>
           <p:nvSpPr>
-            <p:cNvPr name="Freeform 4" id="4"/>
+            <p:cNvPr id="4" name="Freeform 4"/>
             <p:cNvSpPr/>
             <p:nvPr/>
           </p:nvSpPr>
           <p:spPr>
-            <a:xfrm flipH="false" flipV="false" rot="0">
+            <a:xfrm>
               <a:off x="0" y="0"/>
               <a:ext cx="1088081" cy="812800"/>
             </a:xfrm>
@@ -5860,9 +4489,9 @@
               <a:gdLst/>
               <a:ahLst/>
               <a:cxnLst/>
-              <a:rect r="r" b="b" t="t" l="l"/>
+              <a:rect l="l" t="t" r="r" b="b"/>
               <a:pathLst>
-                <a:path h="812800" w="1088081">
+                <a:path w="1088081" h="812800">
                   <a:moveTo>
                     <a:pt x="544041" y="0"/>
                   </a:moveTo>
@@ -5894,11 +4523,18 @@
               <a:srgbClr val="D5FDDB"/>
             </a:solidFill>
           </p:spPr>
+          <p:txBody>
+            <a:bodyPr/>
+            <a:lstStyle/>
+            <a:p>
+              <a:endParaRPr lang="en-IN"/>
+            </a:p>
+          </p:txBody>
         </p:sp>
         <p:sp>
           <p:nvSpPr>
-            <p:cNvPr name="TextBox 5" id="5"/>
-            <p:cNvSpPr txBox="true"/>
+            <p:cNvPr id="5" name="TextBox 5"/>
+            <p:cNvSpPr txBox="1"/>
             <p:nvPr/>
           </p:nvSpPr>
           <p:spPr>
@@ -5911,7 +4547,7 @@
             </a:prstGeom>
           </p:spPr>
           <p:txBody>
-            <a:bodyPr anchor="ctr" rtlCol="false" tIns="50800" lIns="50800" bIns="50800" rIns="50800"/>
+            <a:bodyPr lIns="50800" tIns="50800" rIns="50800" bIns="50800" rtlCol="0" anchor="ctr"/>
             <a:lstStyle/>
             <a:p>
               <a:pPr algn="ctr">
@@ -5940,12 +4576,12 @@
       </p:grpSp>
       <p:grpSp>
         <p:nvGrpSpPr>
-          <p:cNvPr name="Group 6" id="6"/>
+          <p:cNvPr id="6" name="Group 6"/>
           <p:cNvGrpSpPr/>
           <p:nvPr/>
         </p:nvGrpSpPr>
         <p:grpSpPr>
-          <a:xfrm rot="0">
+          <a:xfrm>
             <a:off x="4797697" y="2810898"/>
             <a:ext cx="2581821" cy="2332667"/>
             <a:chOff x="0" y="0"/>
@@ -5954,12 +4590,12 @@
         </p:grpSpPr>
         <p:sp>
           <p:nvSpPr>
-            <p:cNvPr name="Freeform 7" id="7"/>
+            <p:cNvPr id="7" name="Freeform 7"/>
             <p:cNvSpPr/>
             <p:nvPr/>
           </p:nvSpPr>
           <p:spPr>
-            <a:xfrm flipH="false" flipV="false" rot="0">
+            <a:xfrm>
               <a:off x="0" y="0"/>
               <a:ext cx="685698" cy="619526"/>
             </a:xfrm>
@@ -5968,9 +4604,9 @@
               <a:gdLst/>
               <a:ahLst/>
               <a:cxnLst/>
-              <a:rect r="r" b="b" t="t" l="l"/>
+              <a:rect l="l" t="t" r="r" b="b"/>
               <a:pathLst>
-                <a:path h="619526" w="685698">
+                <a:path w="685698" h="619526">
                   <a:moveTo>
                     <a:pt x="152930" y="0"/>
                   </a:moveTo>
@@ -6014,11 +4650,18 @@
               <a:srgbClr val="FFF5C2"/>
             </a:solidFill>
           </p:spPr>
+          <p:txBody>
+            <a:bodyPr/>
+            <a:lstStyle/>
+            <a:p>
+              <a:endParaRPr lang="en-IN"/>
+            </a:p>
+          </p:txBody>
         </p:sp>
         <p:sp>
           <p:nvSpPr>
-            <p:cNvPr name="TextBox 8" id="8"/>
-            <p:cNvSpPr txBox="true"/>
+            <p:cNvPr id="8" name="TextBox 8"/>
+            <p:cNvSpPr txBox="1"/>
             <p:nvPr/>
           </p:nvSpPr>
           <p:spPr>
@@ -6031,7 +4674,7 @@
             </a:prstGeom>
           </p:spPr>
           <p:txBody>
-            <a:bodyPr anchor="ctr" rtlCol="false" tIns="50800" lIns="50800" bIns="50800" rIns="50800"/>
+            <a:bodyPr lIns="50800" tIns="50800" rIns="50800" bIns="50800" rtlCol="0" anchor="ctr"/>
             <a:lstStyle/>
             <a:p>
               <a:pPr algn="ctr">
@@ -6057,12 +4700,12 @@
       </p:grpSp>
       <p:grpSp>
         <p:nvGrpSpPr>
-          <p:cNvPr name="Group 9" id="9"/>
+          <p:cNvPr id="9" name="Group 9"/>
           <p:cNvGrpSpPr/>
           <p:nvPr/>
         </p:nvGrpSpPr>
         <p:grpSpPr>
-          <a:xfrm rot="0">
+          <a:xfrm>
             <a:off x="4797697" y="6158453"/>
             <a:ext cx="2581821" cy="2497870"/>
             <a:chOff x="0" y="0"/>
@@ -6071,12 +4714,12 @@
         </p:grpSpPr>
         <p:sp>
           <p:nvSpPr>
-            <p:cNvPr name="Freeform 10" id="10"/>
+            <p:cNvPr id="10" name="Freeform 10"/>
             <p:cNvSpPr/>
             <p:nvPr/>
           </p:nvSpPr>
           <p:spPr>
-            <a:xfrm flipH="false" flipV="false" rot="0">
+            <a:xfrm>
               <a:off x="0" y="0"/>
               <a:ext cx="685698" cy="663401"/>
             </a:xfrm>
@@ -6085,9 +4728,9 @@
               <a:gdLst/>
               <a:ahLst/>
               <a:cxnLst/>
-              <a:rect r="r" b="b" t="t" l="l"/>
+              <a:rect l="l" t="t" r="r" b="b"/>
               <a:pathLst>
-                <a:path h="663401" w="685698">
+                <a:path w="685698" h="663401">
                   <a:moveTo>
                     <a:pt x="152930" y="0"/>
                   </a:moveTo>
@@ -6131,11 +4774,18 @@
               <a:srgbClr val="D7D9FF"/>
             </a:solidFill>
           </p:spPr>
+          <p:txBody>
+            <a:bodyPr/>
+            <a:lstStyle/>
+            <a:p>
+              <a:endParaRPr lang="en-IN"/>
+            </a:p>
+          </p:txBody>
         </p:sp>
         <p:sp>
           <p:nvSpPr>
-            <p:cNvPr name="TextBox 11" id="11"/>
-            <p:cNvSpPr txBox="true"/>
+            <p:cNvPr id="11" name="TextBox 11"/>
+            <p:cNvSpPr txBox="1"/>
             <p:nvPr/>
           </p:nvSpPr>
           <p:spPr>
@@ -6148,7 +4798,7 @@
             </a:prstGeom>
           </p:spPr>
           <p:txBody>
-            <a:bodyPr anchor="ctr" rtlCol="false" tIns="50800" lIns="50800" bIns="50800" rIns="50800"/>
+            <a:bodyPr lIns="50800" tIns="50800" rIns="50800" bIns="50800" rtlCol="0" anchor="ctr"/>
             <a:lstStyle/>
             <a:p>
               <a:pPr algn="ctr">
@@ -6174,12 +4824,12 @@
       </p:grpSp>
       <p:grpSp>
         <p:nvGrpSpPr>
-          <p:cNvPr name="Group 12" id="12"/>
+          <p:cNvPr id="12" name="Group 12"/>
           <p:cNvGrpSpPr/>
           <p:nvPr/>
         </p:nvGrpSpPr>
         <p:grpSpPr>
-          <a:xfrm rot="0">
+          <a:xfrm>
             <a:off x="8701841" y="2447036"/>
             <a:ext cx="3060392" cy="3060392"/>
             <a:chOff x="0" y="0"/>
@@ -6188,12 +4838,12 @@
         </p:grpSpPr>
         <p:sp>
           <p:nvSpPr>
-            <p:cNvPr name="Freeform 13" id="13"/>
+            <p:cNvPr id="13" name="Freeform 13"/>
             <p:cNvSpPr/>
             <p:nvPr/>
           </p:nvSpPr>
           <p:spPr>
-            <a:xfrm flipH="false" flipV="false" rot="0">
+            <a:xfrm>
               <a:off x="0" y="0"/>
               <a:ext cx="812800" cy="812800"/>
             </a:xfrm>
@@ -6202,9 +4852,9 @@
               <a:gdLst/>
               <a:ahLst/>
               <a:cxnLst/>
-              <a:rect r="r" b="b" t="t" l="l"/>
+              <a:rect l="l" t="t" r="r" b="b"/>
               <a:pathLst>
-                <a:path h="812800" w="812800">
+                <a:path w="812800" h="812800">
                   <a:moveTo>
                     <a:pt x="129015" y="0"/>
                   </a:moveTo>
@@ -6253,11 +4903,18 @@
               <a:round/>
             </a:ln>
           </p:spPr>
+          <p:txBody>
+            <a:bodyPr/>
+            <a:lstStyle/>
+            <a:p>
+              <a:endParaRPr lang="en-IN"/>
+            </a:p>
+          </p:txBody>
         </p:sp>
         <p:sp>
           <p:nvSpPr>
-            <p:cNvPr name="TextBox 14" id="14"/>
-            <p:cNvSpPr txBox="true"/>
+            <p:cNvPr id="14" name="TextBox 14"/>
+            <p:cNvSpPr txBox="1"/>
             <p:nvPr/>
           </p:nvSpPr>
           <p:spPr>
@@ -6270,7 +4927,7 @@
             </a:prstGeom>
           </p:spPr>
           <p:txBody>
-            <a:bodyPr anchor="ctr" rtlCol="false" tIns="50800" lIns="50800" bIns="50800" rIns="50800"/>
+            <a:bodyPr lIns="50800" tIns="50800" rIns="50800" bIns="50800" rtlCol="0" anchor="ctr"/>
             <a:lstStyle/>
             <a:p>
               <a:pPr algn="ctr">
@@ -6292,11 +4949,11 @@
               </a:r>
             </a:p>
             <a:p>
-              <a:pPr algn="l" marL="410209" indent="-205105" lvl="1">
+              <a:pPr marL="410209" lvl="1" indent="-205105" algn="l">
                 <a:lnSpc>
                   <a:spcPts val="2659"/>
                 </a:lnSpc>
-                <a:buAutoNum type="arabicPeriod" startAt="1"/>
+                <a:buAutoNum type="arabicPeriod"/>
               </a:pPr>
               <a:r>
                 <a:rPr lang="en-US" sz="1899">
@@ -6312,11 +4969,11 @@
               </a:r>
             </a:p>
             <a:p>
-              <a:pPr algn="l" marL="410209" indent="-205105" lvl="1">
+              <a:pPr marL="410209" lvl="1" indent="-205105" algn="l">
                 <a:lnSpc>
                   <a:spcPts val="2659"/>
                 </a:lnSpc>
-                <a:buAutoNum type="arabicPeriod" startAt="1"/>
+                <a:buAutoNum type="arabicPeriod"/>
               </a:pPr>
               <a:r>
                 <a:rPr lang="en-US" sz="1899">
@@ -6336,12 +4993,12 @@
       </p:grpSp>
       <p:grpSp>
         <p:nvGrpSpPr>
-          <p:cNvPr name="Group 15" id="15"/>
+          <p:cNvPr id="15" name="Group 15"/>
           <p:cNvGrpSpPr/>
           <p:nvPr/>
         </p:nvGrpSpPr>
         <p:grpSpPr>
-          <a:xfrm rot="0">
+          <a:xfrm>
             <a:off x="12889886" y="2447036"/>
             <a:ext cx="3060392" cy="3060392"/>
             <a:chOff x="0" y="0"/>
@@ -6350,12 +5007,12 @@
         </p:grpSpPr>
         <p:sp>
           <p:nvSpPr>
-            <p:cNvPr name="Freeform 16" id="16"/>
+            <p:cNvPr id="16" name="Freeform 16"/>
             <p:cNvSpPr/>
             <p:nvPr/>
           </p:nvSpPr>
           <p:spPr>
-            <a:xfrm flipH="false" flipV="false" rot="0">
+            <a:xfrm>
               <a:off x="0" y="0"/>
               <a:ext cx="812800" cy="812800"/>
             </a:xfrm>
@@ -6364,9 +5021,9 @@
               <a:gdLst/>
               <a:ahLst/>
               <a:cxnLst/>
-              <a:rect r="r" b="b" t="t" l="l"/>
+              <a:rect l="l" t="t" r="r" b="b"/>
               <a:pathLst>
-                <a:path h="812800" w="812800">
+                <a:path w="812800" h="812800">
                   <a:moveTo>
                     <a:pt x="406400" y="0"/>
                   </a:moveTo>
@@ -6390,11 +5047,18 @@
               <a:srgbClr val="D5FDDB"/>
             </a:solidFill>
           </p:spPr>
+          <p:txBody>
+            <a:bodyPr/>
+            <a:lstStyle/>
+            <a:p>
+              <a:endParaRPr lang="en-IN"/>
+            </a:p>
+          </p:txBody>
         </p:sp>
         <p:sp>
           <p:nvSpPr>
-            <p:cNvPr name="TextBox 17" id="17"/>
-            <p:cNvSpPr txBox="true"/>
+            <p:cNvPr id="17" name="TextBox 17"/>
+            <p:cNvSpPr txBox="1"/>
             <p:nvPr/>
           </p:nvSpPr>
           <p:spPr>
@@ -6407,7 +5071,7 @@
             </a:prstGeom>
           </p:spPr>
           <p:txBody>
-            <a:bodyPr anchor="ctr" rtlCol="false" tIns="50800" lIns="50800" bIns="50800" rIns="50800"/>
+            <a:bodyPr lIns="50800" tIns="50800" rIns="50800" bIns="50800" rtlCol="0" anchor="ctr"/>
             <a:lstStyle/>
             <a:p>
               <a:pPr algn="ctr">
@@ -6433,12 +5097,12 @@
       </p:grpSp>
       <p:grpSp>
         <p:nvGrpSpPr>
-          <p:cNvPr name="Group 18" id="18"/>
+          <p:cNvPr id="18" name="Group 18"/>
           <p:cNvGrpSpPr/>
           <p:nvPr/>
         </p:nvGrpSpPr>
         <p:grpSpPr>
-          <a:xfrm rot="0">
+          <a:xfrm>
             <a:off x="9296549" y="431069"/>
             <a:ext cx="1870976" cy="1386037"/>
             <a:chOff x="0" y="0"/>
@@ -6447,12 +5111,12 @@
         </p:grpSpPr>
         <p:sp>
           <p:nvSpPr>
-            <p:cNvPr name="Freeform 19" id="19"/>
+            <p:cNvPr id="19" name="Freeform 19"/>
             <p:cNvSpPr/>
             <p:nvPr/>
           </p:nvSpPr>
           <p:spPr>
-            <a:xfrm flipH="false" flipV="false" rot="0">
+            <a:xfrm>
               <a:off x="0" y="0"/>
               <a:ext cx="496907" cy="368113"/>
             </a:xfrm>
@@ -6461,9 +5125,9 @@
               <a:gdLst/>
               <a:ahLst/>
               <a:cxnLst/>
-              <a:rect r="r" b="b" t="t" l="l"/>
+              <a:rect l="l" t="t" r="r" b="b"/>
               <a:pathLst>
-                <a:path h="368113" w="496907">
+                <a:path w="496907" h="368113">
                   <a:moveTo>
                     <a:pt x="184057" y="0"/>
                   </a:moveTo>
@@ -6512,11 +5176,18 @@
               <a:srgbClr val="BFE4FF"/>
             </a:solidFill>
           </p:spPr>
+          <p:txBody>
+            <a:bodyPr/>
+            <a:lstStyle/>
+            <a:p>
+              <a:endParaRPr lang="en-IN"/>
+            </a:p>
+          </p:txBody>
         </p:sp>
         <p:sp>
           <p:nvSpPr>
-            <p:cNvPr name="TextBox 20" id="20"/>
-            <p:cNvSpPr txBox="true"/>
+            <p:cNvPr id="20" name="TextBox 20"/>
+            <p:cNvSpPr txBox="1"/>
             <p:nvPr/>
           </p:nvSpPr>
           <p:spPr>
@@ -6529,7 +5200,7 @@
             </a:prstGeom>
           </p:spPr>
           <p:txBody>
-            <a:bodyPr anchor="ctr" rtlCol="false" tIns="50800" lIns="50800" bIns="50800" rIns="50800"/>
+            <a:bodyPr lIns="50800" tIns="50800" rIns="50800" bIns="50800" rtlCol="0" anchor="ctr"/>
             <a:lstStyle/>
             <a:p>
               <a:pPr algn="ctr">
@@ -6555,12 +5226,12 @@
       </p:grpSp>
       <p:grpSp>
         <p:nvGrpSpPr>
-          <p:cNvPr name="Group 21" id="21"/>
+          <p:cNvPr id="21" name="Group 21"/>
           <p:cNvGrpSpPr/>
           <p:nvPr/>
         </p:nvGrpSpPr>
         <p:grpSpPr>
-          <a:xfrm rot="0">
+          <a:xfrm>
             <a:off x="15341314" y="918924"/>
             <a:ext cx="3032948" cy="2037975"/>
             <a:chOff x="0" y="0"/>
@@ -6569,12 +5240,12 @@
         </p:grpSpPr>
         <p:sp>
           <p:nvSpPr>
-            <p:cNvPr name="Freeform 22" id="22"/>
+            <p:cNvPr id="22" name="Freeform 22"/>
             <p:cNvSpPr/>
             <p:nvPr/>
           </p:nvSpPr>
           <p:spPr>
-            <a:xfrm flipH="false" flipV="false" rot="0">
+            <a:xfrm>
               <a:off x="0" y="0"/>
               <a:ext cx="1209622" cy="812800"/>
             </a:xfrm>
@@ -6583,9 +5254,9 @@
               <a:gdLst/>
               <a:ahLst/>
               <a:cxnLst/>
-              <a:rect r="r" b="b" t="t" l="l"/>
+              <a:rect l="l" t="t" r="r" b="b"/>
               <a:pathLst>
-                <a:path h="812800" w="1209622">
+                <a:path w="1209622" h="812800">
                   <a:moveTo>
                     <a:pt x="604811" y="0"/>
                   </a:moveTo>
@@ -6617,11 +5288,18 @@
               <a:srgbClr val="FFF5C2"/>
             </a:solidFill>
           </p:spPr>
+          <p:txBody>
+            <a:bodyPr/>
+            <a:lstStyle/>
+            <a:p>
+              <a:endParaRPr lang="en-IN"/>
+            </a:p>
+          </p:txBody>
         </p:sp>
         <p:sp>
           <p:nvSpPr>
-            <p:cNvPr name="TextBox 23" id="23"/>
-            <p:cNvSpPr txBox="true"/>
+            <p:cNvPr id="23" name="TextBox 23"/>
+            <p:cNvSpPr txBox="1"/>
             <p:nvPr/>
           </p:nvSpPr>
           <p:spPr>
@@ -6634,7 +5312,7 @@
             </a:prstGeom>
           </p:spPr>
           <p:txBody>
-            <a:bodyPr anchor="ctr" rtlCol="false" tIns="50800" lIns="50800" bIns="50800" rIns="50800"/>
+            <a:bodyPr lIns="50800" tIns="50800" rIns="50800" bIns="50800" rtlCol="0" anchor="ctr"/>
             <a:lstStyle/>
             <a:p>
               <a:pPr algn="ctr">
@@ -6679,12 +5357,12 @@
       </p:grpSp>
       <p:grpSp>
         <p:nvGrpSpPr>
-          <p:cNvPr name="Group 24" id="24"/>
+          <p:cNvPr id="24" name="Group 24"/>
           <p:cNvGrpSpPr/>
           <p:nvPr/>
         </p:nvGrpSpPr>
         <p:grpSpPr>
-          <a:xfrm rot="0">
+          <a:xfrm>
             <a:off x="8564309" y="6315579"/>
             <a:ext cx="3335456" cy="3750863"/>
             <a:chOff x="0" y="0"/>
@@ -6693,12 +5371,12 @@
         </p:grpSpPr>
         <p:sp>
           <p:nvSpPr>
-            <p:cNvPr name="Freeform 25" id="25"/>
+            <p:cNvPr id="25" name="Freeform 25"/>
             <p:cNvSpPr/>
             <p:nvPr/>
           </p:nvSpPr>
           <p:spPr>
-            <a:xfrm flipH="false" flipV="false" rot="0">
+            <a:xfrm>
               <a:off x="0" y="0"/>
               <a:ext cx="885853" cy="996180"/>
             </a:xfrm>
@@ -6707,9 +5385,9 @@
               <a:gdLst/>
               <a:ahLst/>
               <a:cxnLst/>
-              <a:rect r="r" b="b" t="t" l="l"/>
+              <a:rect l="l" t="t" r="r" b="b"/>
               <a:pathLst>
-                <a:path h="996180" w="885853">
+                <a:path w="885853" h="996180">
                   <a:moveTo>
                     <a:pt x="118376" y="0"/>
                   </a:moveTo>
@@ -6758,11 +5436,18 @@
               <a:srgbClr val="BFE4FF"/>
             </a:solidFill>
           </p:spPr>
+          <p:txBody>
+            <a:bodyPr/>
+            <a:lstStyle/>
+            <a:p>
+              <a:endParaRPr lang="en-IN"/>
+            </a:p>
+          </p:txBody>
         </p:sp>
         <p:sp>
           <p:nvSpPr>
-            <p:cNvPr name="TextBox 26" id="26"/>
-            <p:cNvSpPr txBox="true"/>
+            <p:cNvPr id="26" name="TextBox 26"/>
+            <p:cNvSpPr txBox="1"/>
             <p:nvPr/>
           </p:nvSpPr>
           <p:spPr>
@@ -6775,7 +5460,7 @@
             </a:prstGeom>
           </p:spPr>
           <p:txBody>
-            <a:bodyPr anchor="ctr" rtlCol="false" tIns="50800" lIns="50800" bIns="50800" rIns="50800"/>
+            <a:bodyPr lIns="50800" tIns="50800" rIns="50800" bIns="50800" rtlCol="0" anchor="ctr"/>
             <a:lstStyle/>
             <a:p>
               <a:pPr algn="ctr">
@@ -6812,19 +5497,7 @@
                   <a:cs typeface="Canva Sans"/>
                   <a:sym typeface="Canva Sans"/>
                 </a:rPr>
-                <a:t>   </a:t>
-              </a:r>
-              <a:r>
-                <a:rPr lang="en-US" sz="1899">
-                  <a:solidFill>
-                    <a:srgbClr val="000000"/>
-                  </a:solidFill>
-                  <a:latin typeface="Canva Sans"/>
-                  <a:ea typeface="Canva Sans"/>
-                  <a:cs typeface="Canva Sans"/>
-                  <a:sym typeface="Canva Sans"/>
-                </a:rPr>
-                <a:t>GET /api/onboard</a:t>
+                <a:t>   GET /api/onboard</a:t>
               </a:r>
             </a:p>
             <a:p>
@@ -6852,6 +5525,15 @@
                   <a:spcPts val="2659"/>
                 </a:lnSpc>
               </a:pPr>
+              <a:endParaRPr lang="en-US" sz="1899">
+                <a:solidFill>
+                  <a:srgbClr val="000000"/>
+                </a:solidFill>
+                <a:latin typeface="Canva Sans"/>
+                <a:ea typeface="Canva Sans"/>
+                <a:cs typeface="Canva Sans"/>
+                <a:sym typeface="Canva Sans"/>
+              </a:endParaRPr>
             </a:p>
             <a:p>
               <a:pPr algn="ctr">
@@ -6888,19 +5570,7 @@
                   <a:cs typeface="Canva Sans"/>
                   <a:sym typeface="Canva Sans"/>
                 </a:rPr>
-                <a:t>    </a:t>
-              </a:r>
-              <a:r>
-                <a:rPr lang="en-US" sz="1899">
-                  <a:solidFill>
-                    <a:srgbClr val="000000"/>
-                  </a:solidFill>
-                  <a:latin typeface="Canva Sans"/>
-                  <a:ea typeface="Canva Sans"/>
-                  <a:cs typeface="Canva Sans"/>
-                  <a:sym typeface="Canva Sans"/>
-                </a:rPr>
-                <a:t>POST /api/learn/start</a:t>
+                <a:t>    POST /api/learn/start</a:t>
               </a:r>
             </a:p>
             <a:p>
@@ -6965,7 +5635,7 @@
       </p:grpSp>
       <p:sp>
         <p:nvSpPr>
-          <p:cNvPr name="AutoShape 27" id="27"/>
+          <p:cNvPr id="27" name="AutoShape 27"/>
           <p:cNvSpPr/>
           <p:nvPr/>
         </p:nvSpPr>
@@ -6977,19 +5647,26 @@
           <a:prstGeom prst="line">
             <a:avLst/>
           </a:prstGeom>
-          <a:ln cap="flat" w="38100">
+          <a:ln w="38100" cap="flat">
             <a:solidFill>
               <a:srgbClr val="000000"/>
             </a:solidFill>
             <a:prstDash val="solid"/>
-            <a:headEnd type="none" len="sm" w="sm"/>
-            <a:tailEnd type="triangle" len="med" w="lg"/>
+            <a:headEnd type="none" w="sm" len="sm"/>
+            <a:tailEnd type="triangle" w="lg" len="med"/>
           </a:ln>
         </p:spPr>
-      </p:sp>
-      <p:sp>
-        <p:nvSpPr>
-          <p:cNvPr name="AutoShape 28" id="28"/>
+        <p:txBody>
+          <a:bodyPr/>
+          <a:lstStyle/>
+          <a:p>
+            <a:endParaRPr lang="en-IN"/>
+          </a:p>
+        </p:txBody>
+      </p:sp>
+      <p:sp>
+        <p:nvSpPr>
+          <p:cNvPr id="28" name="AutoShape 28"/>
           <p:cNvSpPr/>
           <p:nvPr/>
         </p:nvSpPr>
@@ -7001,192 +5678,248 @@
           <a:prstGeom prst="line">
             <a:avLst/>
           </a:prstGeom>
-          <a:ln cap="flat" w="38100">
+          <a:ln w="38100" cap="flat">
             <a:solidFill>
               <a:srgbClr val="000000"/>
             </a:solidFill>
             <a:prstDash val="solid"/>
-            <a:headEnd type="none" len="sm" w="sm"/>
-            <a:tailEnd type="triangle" len="med" w="lg"/>
+            <a:headEnd type="none" w="sm" len="sm"/>
+            <a:tailEnd type="triangle" w="lg" len="med"/>
           </a:ln>
         </p:spPr>
-      </p:sp>
-      <p:sp>
-        <p:nvSpPr>
-          <p:cNvPr name="AutoShape 29" id="29"/>
+        <p:txBody>
+          <a:bodyPr/>
+          <a:lstStyle/>
+          <a:p>
+            <a:endParaRPr lang="en-IN"/>
+          </a:p>
+        </p:txBody>
+      </p:sp>
+      <p:sp>
+        <p:nvSpPr>
+          <p:cNvPr id="29" name="AutoShape 29"/>
           <p:cNvSpPr/>
           <p:nvPr/>
         </p:nvSpPr>
         <p:spPr>
-          <a:xfrm flipH="true">
+          <a:xfrm flipH="1">
             <a:off x="6568742" y="5143565"/>
             <a:ext cx="0" cy="1014888"/>
           </a:xfrm>
           <a:prstGeom prst="line">
             <a:avLst/>
           </a:prstGeom>
-          <a:ln cap="flat" w="38100">
+          <a:ln w="38100" cap="flat">
             <a:solidFill>
               <a:srgbClr val="000000"/>
             </a:solidFill>
             <a:prstDash val="solid"/>
-            <a:headEnd type="none" len="sm" w="sm"/>
-            <a:tailEnd type="triangle" len="med" w="lg"/>
+            <a:headEnd type="none" w="sm" len="sm"/>
+            <a:tailEnd type="triangle" w="lg" len="med"/>
           </a:ln>
         </p:spPr>
-      </p:sp>
-      <p:sp>
-        <p:nvSpPr>
-          <p:cNvPr name="AutoShape 30" id="30"/>
+        <p:txBody>
+          <a:bodyPr/>
+          <a:lstStyle/>
+          <a:p>
+            <a:endParaRPr lang="en-IN"/>
+          </a:p>
+        </p:txBody>
+      </p:sp>
+      <p:sp>
+        <p:nvSpPr>
+          <p:cNvPr id="30" name="AutoShape 30"/>
           <p:cNvSpPr/>
           <p:nvPr/>
         </p:nvSpPr>
         <p:spPr>
-          <a:xfrm flipH="true" flipV="true">
+          <a:xfrm flipH="1" flipV="1">
             <a:off x="5633688" y="5143565"/>
             <a:ext cx="0" cy="1014888"/>
           </a:xfrm>
           <a:prstGeom prst="line">
             <a:avLst/>
           </a:prstGeom>
-          <a:ln cap="flat" w="38100">
+          <a:ln w="38100" cap="flat">
             <a:solidFill>
               <a:srgbClr val="000000"/>
             </a:solidFill>
             <a:prstDash val="solid"/>
-            <a:headEnd type="none" len="sm" w="sm"/>
-            <a:tailEnd type="triangle" len="med" w="lg"/>
+            <a:headEnd type="none" w="sm" len="sm"/>
+            <a:tailEnd type="triangle" w="lg" len="med"/>
           </a:ln>
         </p:spPr>
-      </p:sp>
-      <p:sp>
-        <p:nvSpPr>
-          <p:cNvPr name="AutoShape 31" id="31"/>
+        <p:txBody>
+          <a:bodyPr/>
+          <a:lstStyle/>
+          <a:p>
+            <a:endParaRPr lang="en-IN"/>
+          </a:p>
+        </p:txBody>
+      </p:sp>
+      <p:sp>
+        <p:nvSpPr>
+          <p:cNvPr id="31" name="AutoShape 31"/>
           <p:cNvSpPr/>
           <p:nvPr/>
         </p:nvSpPr>
         <p:spPr>
-          <a:xfrm flipH="true">
+          <a:xfrm flipH="1">
             <a:off x="7379518" y="4436128"/>
             <a:ext cx="1322322" cy="0"/>
           </a:xfrm>
           <a:prstGeom prst="line">
             <a:avLst/>
           </a:prstGeom>
-          <a:ln cap="flat" w="38100">
+          <a:ln w="38100" cap="flat">
             <a:solidFill>
               <a:srgbClr val="000000"/>
             </a:solidFill>
             <a:prstDash val="solid"/>
-            <a:headEnd type="none" len="sm" w="sm"/>
-            <a:tailEnd type="triangle" len="med" w="lg"/>
+            <a:headEnd type="none" w="sm" len="sm"/>
+            <a:tailEnd type="triangle" w="lg" len="med"/>
           </a:ln>
         </p:spPr>
-      </p:sp>
-      <p:sp>
-        <p:nvSpPr>
-          <p:cNvPr name="AutoShape 32" id="32"/>
+        <p:txBody>
+          <a:bodyPr/>
+          <a:lstStyle/>
+          <a:p>
+            <a:endParaRPr lang="en-IN"/>
+          </a:p>
+        </p:txBody>
+      </p:sp>
+      <p:sp>
+        <p:nvSpPr>
+          <p:cNvPr id="32" name="AutoShape 32"/>
           <p:cNvSpPr/>
           <p:nvPr/>
         </p:nvSpPr>
         <p:spPr>
-          <a:xfrm flipH="true">
+          <a:xfrm flipH="1">
             <a:off x="10672138" y="5507428"/>
             <a:ext cx="0" cy="808151"/>
           </a:xfrm>
           <a:prstGeom prst="line">
             <a:avLst/>
           </a:prstGeom>
-          <a:ln cap="flat" w="38100">
+          <a:ln w="38100" cap="flat">
             <a:solidFill>
               <a:srgbClr val="000000"/>
             </a:solidFill>
             <a:prstDash val="solid"/>
-            <a:headEnd type="none" len="sm" w="sm"/>
-            <a:tailEnd type="triangle" len="med" w="lg"/>
+            <a:headEnd type="none" w="sm" len="sm"/>
+            <a:tailEnd type="triangle" w="lg" len="med"/>
           </a:ln>
         </p:spPr>
-      </p:sp>
-      <p:sp>
-        <p:nvSpPr>
-          <p:cNvPr name="AutoShape 33" id="33"/>
+        <p:txBody>
+          <a:bodyPr/>
+          <a:lstStyle/>
+          <a:p>
+            <a:endParaRPr lang="en-IN"/>
+          </a:p>
+        </p:txBody>
+      </p:sp>
+      <p:sp>
+        <p:nvSpPr>
+          <p:cNvPr id="33" name="AutoShape 33"/>
           <p:cNvSpPr/>
           <p:nvPr/>
         </p:nvSpPr>
         <p:spPr>
-          <a:xfrm flipH="true" flipV="true">
+          <a:xfrm flipH="1" flipV="1">
             <a:off x="9848035" y="5507428"/>
             <a:ext cx="0" cy="805572"/>
           </a:xfrm>
           <a:prstGeom prst="line">
             <a:avLst/>
           </a:prstGeom>
-          <a:ln cap="flat" w="38100">
+          <a:ln w="38100" cap="flat">
             <a:solidFill>
               <a:srgbClr val="000000"/>
             </a:solidFill>
             <a:prstDash val="solid"/>
-            <a:headEnd type="none" len="sm" w="sm"/>
-            <a:tailEnd type="triangle" len="med" w="lg"/>
+            <a:headEnd type="none" w="sm" len="sm"/>
+            <a:tailEnd type="triangle" w="lg" len="med"/>
           </a:ln>
         </p:spPr>
-      </p:sp>
-      <p:sp>
-        <p:nvSpPr>
-          <p:cNvPr name="AutoShape 34" id="34"/>
+        <p:txBody>
+          <a:bodyPr/>
+          <a:lstStyle/>
+          <a:p>
+            <a:endParaRPr lang="en-IN"/>
+          </a:p>
+        </p:txBody>
+      </p:sp>
+      <p:sp>
+        <p:nvSpPr>
+          <p:cNvPr id="34" name="AutoShape 34"/>
           <p:cNvSpPr/>
           <p:nvPr/>
         </p:nvSpPr>
         <p:spPr>
-          <a:xfrm flipV="true">
+          <a:xfrm flipV="1">
             <a:off x="11762233" y="3543898"/>
             <a:ext cx="1560987" cy="0"/>
           </a:xfrm>
           <a:prstGeom prst="line">
             <a:avLst/>
           </a:prstGeom>
-          <a:ln cap="flat" w="38100">
+          <a:ln w="38100" cap="flat">
             <a:solidFill>
               <a:srgbClr val="000000"/>
             </a:solidFill>
             <a:prstDash val="solid"/>
-            <a:headEnd type="none" len="sm" w="sm"/>
-            <a:tailEnd type="triangle" len="med" w="lg"/>
+            <a:headEnd type="none" w="sm" len="sm"/>
+            <a:tailEnd type="triangle" w="lg" len="med"/>
           </a:ln>
         </p:spPr>
-      </p:sp>
-      <p:sp>
-        <p:nvSpPr>
-          <p:cNvPr name="AutoShape 35" id="35"/>
+        <p:txBody>
+          <a:bodyPr/>
+          <a:lstStyle/>
+          <a:p>
+            <a:endParaRPr lang="en-IN"/>
+          </a:p>
+        </p:txBody>
+      </p:sp>
+      <p:sp>
+        <p:nvSpPr>
+          <p:cNvPr id="35" name="AutoShape 35"/>
           <p:cNvSpPr/>
           <p:nvPr/>
         </p:nvSpPr>
         <p:spPr>
-          <a:xfrm flipH="true">
+          <a:xfrm flipH="1">
             <a:off x="15950278" y="2956900"/>
             <a:ext cx="907510" cy="1020332"/>
           </a:xfrm>
           <a:prstGeom prst="line">
             <a:avLst/>
           </a:prstGeom>
-          <a:ln cap="flat" w="38100">
+          <a:ln w="38100" cap="flat">
             <a:solidFill>
               <a:srgbClr val="000000"/>
             </a:solidFill>
             <a:prstDash val="solid"/>
-            <a:headEnd type="none" len="sm" w="sm"/>
-            <a:tailEnd type="triangle" len="med" w="lg"/>
+            <a:headEnd type="none" w="sm" len="sm"/>
+            <a:tailEnd type="triangle" w="lg" len="med"/>
           </a:ln>
         </p:spPr>
+        <p:txBody>
+          <a:bodyPr/>
+          <a:lstStyle/>
+          <a:p>
+            <a:endParaRPr lang="en-IN"/>
+          </a:p>
+        </p:txBody>
       </p:sp>
       <p:grpSp>
         <p:nvGrpSpPr>
-          <p:cNvPr name="Group 36" id="36"/>
+          <p:cNvPr id="36" name="Group 36"/>
           <p:cNvGrpSpPr/>
           <p:nvPr/>
         </p:nvGrpSpPr>
         <p:grpSpPr>
-          <a:xfrm rot="0">
+          <a:xfrm>
             <a:off x="13129171" y="6691464"/>
             <a:ext cx="2581821" cy="2332667"/>
             <a:chOff x="0" y="0"/>
@@ -7195,12 +5928,12 @@
         </p:grpSpPr>
         <p:sp>
           <p:nvSpPr>
-            <p:cNvPr name="Freeform 37" id="37"/>
+            <p:cNvPr id="37" name="Freeform 37"/>
             <p:cNvSpPr/>
             <p:nvPr/>
           </p:nvSpPr>
           <p:spPr>
-            <a:xfrm flipH="false" flipV="false" rot="0">
+            <a:xfrm>
               <a:off x="0" y="0"/>
               <a:ext cx="685698" cy="619526"/>
             </a:xfrm>
@@ -7209,9 +5942,9 @@
               <a:gdLst/>
               <a:ahLst/>
               <a:cxnLst/>
-              <a:rect r="r" b="b" t="t" l="l"/>
+              <a:rect l="l" t="t" r="r" b="b"/>
               <a:pathLst>
-                <a:path h="619526" w="685698">
+                <a:path w="685698" h="619526">
                   <a:moveTo>
                     <a:pt x="152930" y="0"/>
                   </a:moveTo>
@@ -7255,11 +5988,18 @@
               <a:srgbClr val="FFF5C2"/>
             </a:solidFill>
           </p:spPr>
+          <p:txBody>
+            <a:bodyPr/>
+            <a:lstStyle/>
+            <a:p>
+              <a:endParaRPr lang="en-IN"/>
+            </a:p>
+          </p:txBody>
         </p:sp>
         <p:sp>
           <p:nvSpPr>
-            <p:cNvPr name="TextBox 38" id="38"/>
-            <p:cNvSpPr txBox="true"/>
+            <p:cNvPr id="38" name="TextBox 38"/>
+            <p:cNvSpPr txBox="1"/>
             <p:nvPr/>
           </p:nvSpPr>
           <p:spPr>
@@ -7272,7 +6012,7 @@
             </a:prstGeom>
           </p:spPr>
           <p:txBody>
-            <a:bodyPr anchor="ctr" rtlCol="false" tIns="50800" lIns="50800" bIns="50800" rIns="50800"/>
+            <a:bodyPr lIns="50800" tIns="50800" rIns="50800" bIns="50800" rtlCol="0" anchor="ctr"/>
             <a:lstStyle/>
             <a:p>
               <a:pPr algn="ctr">
@@ -7317,108 +6057,136 @@
       </p:grpSp>
       <p:sp>
         <p:nvSpPr>
-          <p:cNvPr name="AutoShape 39" id="39"/>
+          <p:cNvPr id="39" name="AutoShape 39"/>
           <p:cNvSpPr/>
           <p:nvPr/>
         </p:nvSpPr>
         <p:spPr>
-          <a:xfrm flipH="true" flipV="true">
+          <a:xfrm flipH="1" flipV="1">
             <a:off x="11762233" y="4409417"/>
             <a:ext cx="1560413" cy="575"/>
           </a:xfrm>
           <a:prstGeom prst="line">
             <a:avLst/>
           </a:prstGeom>
-          <a:ln cap="flat" w="38100">
+          <a:ln w="38100" cap="flat">
             <a:solidFill>
               <a:srgbClr val="000000"/>
             </a:solidFill>
             <a:prstDash val="solid"/>
-            <a:headEnd type="none" len="sm" w="sm"/>
-            <a:tailEnd type="triangle" len="med" w="lg"/>
+            <a:headEnd type="none" w="sm" len="sm"/>
+            <a:tailEnd type="triangle" w="lg" len="med"/>
           </a:ln>
         </p:spPr>
-      </p:sp>
-      <p:sp>
-        <p:nvSpPr>
-          <p:cNvPr name="AutoShape 40" id="40"/>
+        <p:txBody>
+          <a:bodyPr/>
+          <a:lstStyle/>
+          <a:p>
+            <a:endParaRPr lang="en-IN"/>
+          </a:p>
+        </p:txBody>
+      </p:sp>
+      <p:sp>
+        <p:nvSpPr>
+          <p:cNvPr id="40" name="AutoShape 40"/>
           <p:cNvSpPr/>
           <p:nvPr/>
         </p:nvSpPr>
         <p:spPr>
-          <a:xfrm flipH="true">
+          <a:xfrm flipH="1">
             <a:off x="10672138" y="1821182"/>
             <a:ext cx="27255" cy="625854"/>
           </a:xfrm>
           <a:prstGeom prst="line">
             <a:avLst/>
           </a:prstGeom>
-          <a:ln cap="flat" w="38100">
+          <a:ln w="38100" cap="flat">
             <a:solidFill>
               <a:srgbClr val="000000"/>
             </a:solidFill>
             <a:prstDash val="solid"/>
-            <a:headEnd type="none" len="sm" w="sm"/>
-            <a:tailEnd type="triangle" len="med" w="lg"/>
+            <a:headEnd type="none" w="sm" len="sm"/>
+            <a:tailEnd type="triangle" w="lg" len="med"/>
           </a:ln>
         </p:spPr>
-      </p:sp>
-      <p:sp>
-        <p:nvSpPr>
-          <p:cNvPr name="AutoShape 41" id="41"/>
+        <p:txBody>
+          <a:bodyPr/>
+          <a:lstStyle/>
+          <a:p>
+            <a:endParaRPr lang="en-IN"/>
+          </a:p>
+        </p:txBody>
+      </p:sp>
+      <p:sp>
+        <p:nvSpPr>
+          <p:cNvPr id="41" name="AutoShape 41"/>
           <p:cNvSpPr/>
           <p:nvPr/>
         </p:nvSpPr>
         <p:spPr>
-          <a:xfrm flipH="true" flipV="true">
+          <a:xfrm flipH="1" flipV="1">
             <a:off x="9848035" y="1817105"/>
             <a:ext cx="0" cy="629930"/>
           </a:xfrm>
           <a:prstGeom prst="line">
             <a:avLst/>
           </a:prstGeom>
-          <a:ln cap="flat" w="38100">
+          <a:ln w="38100" cap="flat">
             <a:solidFill>
               <a:srgbClr val="000000"/>
             </a:solidFill>
             <a:prstDash val="solid"/>
-            <a:headEnd type="none" len="sm" w="sm"/>
-            <a:tailEnd type="triangle" len="med" w="lg"/>
+            <a:headEnd type="none" w="sm" len="sm"/>
+            <a:tailEnd type="triangle" w="lg" len="med"/>
           </a:ln>
         </p:spPr>
-      </p:sp>
-      <p:sp>
-        <p:nvSpPr>
-          <p:cNvPr name="AutoShape 42" id="42"/>
+        <p:txBody>
+          <a:bodyPr/>
+          <a:lstStyle/>
+          <a:p>
+            <a:endParaRPr lang="en-IN"/>
+          </a:p>
+        </p:txBody>
+      </p:sp>
+      <p:sp>
+        <p:nvSpPr>
+          <p:cNvPr id="42" name="AutoShape 42"/>
           <p:cNvSpPr/>
           <p:nvPr/>
         </p:nvSpPr>
         <p:spPr>
-          <a:xfrm flipH="true" flipV="true">
+          <a:xfrm flipH="1" flipV="1">
             <a:off x="14420082" y="5507428"/>
             <a:ext cx="0" cy="1184036"/>
           </a:xfrm>
           <a:prstGeom prst="line">
             <a:avLst/>
           </a:prstGeom>
-          <a:ln cap="flat" w="38100">
+          <a:ln w="38100" cap="flat">
             <a:solidFill>
               <a:srgbClr val="000000"/>
             </a:solidFill>
             <a:prstDash val="solid"/>
-            <a:headEnd type="none" len="sm" w="sm"/>
-            <a:tailEnd type="triangle" len="med" w="lg"/>
+            <a:headEnd type="none" w="sm" len="sm"/>
+            <a:tailEnd type="triangle" w="lg" len="med"/>
           </a:ln>
         </p:spPr>
+        <p:txBody>
+          <a:bodyPr/>
+          <a:lstStyle/>
+          <a:p>
+            <a:endParaRPr lang="en-IN"/>
+          </a:p>
+        </p:txBody>
       </p:sp>
       <p:grpSp>
         <p:nvGrpSpPr>
-          <p:cNvPr name="Group 43" id="43"/>
+          <p:cNvPr id="43" name="Group 43"/>
           <p:cNvGrpSpPr/>
           <p:nvPr/>
         </p:nvGrpSpPr>
         <p:grpSpPr>
-          <a:xfrm rot="0">
+          <a:xfrm>
             <a:off x="15710992" y="5305427"/>
             <a:ext cx="2113437" cy="1386037"/>
             <a:chOff x="0" y="0"/>
@@ -7427,12 +6195,12 @@
         </p:grpSpPr>
         <p:sp>
           <p:nvSpPr>
-            <p:cNvPr name="Freeform 44" id="44"/>
+            <p:cNvPr id="44" name="Freeform 44"/>
             <p:cNvSpPr/>
             <p:nvPr/>
           </p:nvSpPr>
           <p:spPr>
-            <a:xfrm flipH="false" flipV="false" rot="0">
+            <a:xfrm>
               <a:off x="0" y="0"/>
               <a:ext cx="561301" cy="368113"/>
             </a:xfrm>
@@ -7441,9 +6209,9 @@
               <a:gdLst/>
               <a:ahLst/>
               <a:cxnLst/>
-              <a:rect r="r" b="b" t="t" l="l"/>
+              <a:rect l="l" t="t" r="r" b="b"/>
               <a:pathLst>
-                <a:path h="368113" w="561301">
+                <a:path w="561301" h="368113">
                   <a:moveTo>
                     <a:pt x="184057" y="0"/>
                   </a:moveTo>
@@ -7492,11 +6260,18 @@
               <a:srgbClr val="BFE4FF"/>
             </a:solidFill>
           </p:spPr>
+          <p:txBody>
+            <a:bodyPr/>
+            <a:lstStyle/>
+            <a:p>
+              <a:endParaRPr lang="en-IN"/>
+            </a:p>
+          </p:txBody>
         </p:sp>
         <p:sp>
           <p:nvSpPr>
-            <p:cNvPr name="TextBox 45" id="45"/>
-            <p:cNvSpPr txBox="true"/>
+            <p:cNvPr id="45" name="TextBox 45"/>
+            <p:cNvSpPr txBox="1"/>
             <p:nvPr/>
           </p:nvSpPr>
           <p:spPr>
@@ -7509,7 +6284,7 @@
             </a:prstGeom>
           </p:spPr>
           <p:txBody>
-            <a:bodyPr anchor="ctr" rtlCol="false" tIns="50800" lIns="50800" bIns="50800" rIns="50800"/>
+            <a:bodyPr lIns="50800" tIns="50800" rIns="50800" bIns="50800" rtlCol="0" anchor="ctr"/>
             <a:lstStyle/>
             <a:p>
               <a:pPr algn="ctr">
@@ -7554,36 +6329,43 @@
       </p:grpSp>
       <p:sp>
         <p:nvSpPr>
-          <p:cNvPr name="AutoShape 46" id="46"/>
+          <p:cNvPr id="46" name="AutoShape 46"/>
           <p:cNvSpPr/>
           <p:nvPr/>
         </p:nvSpPr>
         <p:spPr>
-          <a:xfrm flipH="true" flipV="true">
+          <a:xfrm flipH="1" flipV="1">
             <a:off x="15262619" y="4664891"/>
             <a:ext cx="584039" cy="789560"/>
           </a:xfrm>
           <a:prstGeom prst="line">
             <a:avLst/>
           </a:prstGeom>
-          <a:ln cap="flat" w="38100">
+          <a:ln w="38100" cap="flat">
             <a:solidFill>
               <a:srgbClr val="000000"/>
             </a:solidFill>
             <a:prstDash val="solid"/>
-            <a:headEnd type="none" len="sm" w="sm"/>
-            <a:tailEnd type="triangle" len="med" w="lg"/>
+            <a:headEnd type="none" w="sm" len="sm"/>
+            <a:tailEnd type="triangle" w="lg" len="med"/>
           </a:ln>
         </p:spPr>
-      </p:sp>
-      <p:sp>
-        <p:nvSpPr>
-          <p:cNvPr name="Freeform 47" id="47"/>
+        <p:txBody>
+          <a:bodyPr/>
+          <a:lstStyle/>
+          <a:p>
+            <a:endParaRPr lang="en-IN"/>
+          </a:p>
+        </p:txBody>
+      </p:sp>
+      <p:sp>
+        <p:nvSpPr>
+          <p:cNvPr id="47" name="Freeform 47"/>
           <p:cNvSpPr/>
           <p:nvPr/>
         </p:nvSpPr>
         <p:spPr>
-          <a:xfrm flipH="false" flipV="false" rot="0">
+          <a:xfrm>
             <a:off x="715046" y="806797"/>
             <a:ext cx="1058465" cy="1058465"/>
           </a:xfrm>
@@ -7592,9 +6374,9 @@
             <a:gdLst/>
             <a:ahLst/>
             <a:cxnLst/>
-            <a:rect r="r" b="b" t="t" l="l"/>
+            <a:rect l="l" t="t" r="r" b="b"/>
             <a:pathLst>
-              <a:path h="1058465" w="1058465">
+              <a:path w="1058465" h="1058465">
                 <a:moveTo>
                   <a:pt x="0" y="0"/>
                 </a:moveTo>
@@ -7617,19 +6399,26 @@
           <a:blipFill>
             <a:blip r:embed="rId3"/>
             <a:stretch>
-              <a:fillRect l="0" t="0" r="0" b="0"/>
+              <a:fillRect/>
             </a:stretch>
           </a:blipFill>
         </p:spPr>
-      </p:sp>
-      <p:sp>
-        <p:nvSpPr>
-          <p:cNvPr name="TextBox 48" id="48"/>
-          <p:cNvSpPr txBox="true"/>
+        <p:txBody>
+          <a:bodyPr/>
+          <a:lstStyle/>
+          <a:p>
+            <a:endParaRPr lang="en-IN"/>
+          </a:p>
+        </p:txBody>
+      </p:sp>
+      <p:sp>
+        <p:nvSpPr>
+          <p:cNvPr id="48" name="TextBox 48"/>
+          <p:cNvSpPr txBox="1"/>
           <p:nvPr/>
         </p:nvSpPr>
         <p:spPr>
-          <a:xfrm rot="0">
+          <a:xfrm>
             <a:off x="1339528" y="952500"/>
             <a:ext cx="6306019" cy="795020"/>
           </a:xfrm>
@@ -7638,7 +6427,7 @@
           </a:prstGeom>
         </p:spPr>
         <p:txBody>
-          <a:bodyPr anchor="t" rtlCol="false" tIns="0" lIns="0" bIns="0" rIns="0">
+          <a:bodyPr lIns="0" tIns="0" rIns="0" bIns="0" rtlCol="0" anchor="t">
             <a:spAutoFit/>
           </a:bodyPr>
           <a:lstStyle/>
@@ -7675,13 +6464,14 @@
 </file>
 
 <file path=ppt/slides/slide5.xml><?xml version="1.0" encoding="utf-8"?>
-<p:sld xmlns:p="http://schemas.openxmlformats.org/presentationml/2006/main" xmlns:a="http://schemas.openxmlformats.org/drawingml/2006/main" xmlns:r="http://schemas.openxmlformats.org/officeDocument/2006/relationships">
+<p:sld xmlns:a="http://schemas.openxmlformats.org/drawingml/2006/main" xmlns:r="http://schemas.openxmlformats.org/officeDocument/2006/relationships" xmlns:p="http://schemas.openxmlformats.org/presentationml/2006/main">
   <p:cSld>
     <p:bg>
       <p:bgPr>
         <a:solidFill>
           <a:srgbClr val="EBF2FA"/>
         </a:solidFill>
+        <a:effectLst/>
       </p:bgPr>
     </p:bg>
     <p:spTree>
@@ -7700,12 +6490,12 @@
       </p:grpSpPr>
       <p:sp>
         <p:nvSpPr>
-          <p:cNvPr name="Freeform 2" id="2"/>
+          <p:cNvPr id="2" name="Freeform 2"/>
           <p:cNvSpPr/>
           <p:nvPr/>
         </p:nvSpPr>
         <p:spPr>
-          <a:xfrm flipH="false" flipV="false" rot="0">
+          <a:xfrm>
             <a:off x="1028700" y="501777"/>
             <a:ext cx="2528697" cy="191832"/>
           </a:xfrm>
@@ -7714,9 +6504,9 @@
             <a:gdLst/>
             <a:ahLst/>
             <a:cxnLst/>
-            <a:rect r="r" b="b" t="t" l="l"/>
+            <a:rect l="l" t="t" r="r" b="b"/>
             <a:pathLst>
-              <a:path h="191832" w="2528697">
+              <a:path w="2528697" h="191832">
                 <a:moveTo>
                   <a:pt x="0" y="0"/>
                 </a:moveTo>
@@ -7739,19 +6529,26 @@
           <a:blipFill>
             <a:blip r:embed="rId2"/>
             <a:stretch>
-              <a:fillRect l="0" t="0" r="0" b="0"/>
+              <a:fillRect/>
             </a:stretch>
           </a:blipFill>
         </p:spPr>
-      </p:sp>
-      <p:sp>
-        <p:nvSpPr>
-          <p:cNvPr name="TextBox 3" id="3"/>
-          <p:cNvSpPr txBox="true"/>
+        <p:txBody>
+          <a:bodyPr/>
+          <a:lstStyle/>
+          <a:p>
+            <a:endParaRPr lang="en-IN"/>
+          </a:p>
+        </p:txBody>
+      </p:sp>
+      <p:sp>
+        <p:nvSpPr>
+          <p:cNvPr id="3" name="TextBox 3"/>
+          <p:cNvSpPr txBox="1"/>
           <p:nvPr/>
         </p:nvSpPr>
         <p:spPr>
-          <a:xfrm rot="0">
+          <a:xfrm>
             <a:off x="3060510" y="2871415"/>
             <a:ext cx="12166981" cy="5793106"/>
           </a:xfrm>
@@ -7760,12 +6557,12 @@
           </a:prstGeom>
         </p:spPr>
         <p:txBody>
-          <a:bodyPr anchor="t" rtlCol="false" tIns="0" lIns="0" bIns="0" rIns="0">
+          <a:bodyPr lIns="0" tIns="0" rIns="0" bIns="0" rtlCol="0" anchor="t">
             <a:spAutoFit/>
           </a:bodyPr>
           <a:lstStyle/>
           <a:p>
-            <a:pPr algn="l" marL="712470" indent="-356235" lvl="1">
+            <a:pPr marL="712470" lvl="1" indent="-356235" algn="l">
               <a:lnSpc>
                 <a:spcPts val="4620"/>
               </a:lnSpc>
@@ -7773,7 +6570,7 @@
               <a:buChar char="•"/>
             </a:pPr>
             <a:r>
-              <a:rPr lang="en-US" b="true" sz="3300">
+              <a:rPr lang="en-US" sz="3300" b="1">
                 <a:solidFill>
                   <a:srgbClr val="000000"/>
                 </a:solidFill>
@@ -7798,7 +6595,7 @@
             </a:r>
           </a:p>
           <a:p>
-            <a:pPr algn="l" marL="712470" indent="-356235" lvl="1">
+            <a:pPr marL="712470" lvl="1" indent="-356235" algn="l">
               <a:lnSpc>
                 <a:spcPts val="4620"/>
               </a:lnSpc>
@@ -7806,7 +6603,7 @@
               <a:buChar char="•"/>
             </a:pPr>
             <a:r>
-              <a:rPr lang="en-US" b="true" sz="3300">
+              <a:rPr lang="en-US" sz="3300" b="1">
                 <a:solidFill>
                   <a:srgbClr val="000000"/>
                 </a:solidFill>
@@ -7831,7 +6628,7 @@
             </a:r>
           </a:p>
           <a:p>
-            <a:pPr algn="l" marL="712470" indent="-356235" lvl="1">
+            <a:pPr marL="712470" lvl="1" indent="-356235" algn="l">
               <a:lnSpc>
                 <a:spcPts val="4620"/>
               </a:lnSpc>
@@ -7839,7 +6636,7 @@
               <a:buChar char="•"/>
             </a:pPr>
             <a:r>
-              <a:rPr lang="en-US" b="true" sz="3300">
+              <a:rPr lang="en-US" sz="3300" b="1">
                 <a:solidFill>
                   <a:srgbClr val="000000"/>
                 </a:solidFill>
@@ -7864,7 +6661,7 @@
             </a:r>
           </a:p>
           <a:p>
-            <a:pPr algn="l" marL="712470" indent="-356235" lvl="1">
+            <a:pPr marL="712470" lvl="1" indent="-356235" algn="l">
               <a:lnSpc>
                 <a:spcPts val="4620"/>
               </a:lnSpc>
@@ -7872,7 +6669,7 @@
               <a:buChar char="•"/>
             </a:pPr>
             <a:r>
-              <a:rPr lang="en-US" b="true" sz="3300">
+              <a:rPr lang="en-US" sz="3300" b="1">
                 <a:solidFill>
                   <a:srgbClr val="000000"/>
                 </a:solidFill>
@@ -7902,6 +6699,15 @@
                 <a:spcPts val="4620"/>
               </a:lnSpc>
             </a:pPr>
+            <a:endParaRPr lang="en-US" sz="3300">
+              <a:solidFill>
+                <a:srgbClr val="000000"/>
+              </a:solidFill>
+              <a:latin typeface="Noto Serif Ethiopic Condensed"/>
+              <a:ea typeface="Noto Serif Ethiopic Condensed"/>
+              <a:cs typeface="Noto Serif Ethiopic Condensed"/>
+              <a:sym typeface="Noto Serif Ethiopic Condensed"/>
+            </a:endParaRPr>
           </a:p>
           <a:p>
             <a:pPr algn="l">
@@ -7910,7 +6716,7 @@
               </a:lnSpc>
             </a:pPr>
             <a:r>
-              <a:rPr lang="en-US" b="true" sz="3300">
+              <a:rPr lang="en-US" sz="3300" b="1">
                 <a:solidFill>
                   <a:srgbClr val="000000"/>
                 </a:solidFill>
@@ -7931,19 +6737,7 @@
                 <a:cs typeface="Noto Serif Ethiopic Condensed"/>
                 <a:sym typeface="Noto Serif Ethiopic Condensed"/>
               </a:rPr>
-              <a:t>: </a:t>
-            </a:r>
-            <a:r>
-              <a:rPr lang="en-US" sz="3300">
-                <a:solidFill>
-                  <a:srgbClr val="000000"/>
-                </a:solidFill>
-                <a:latin typeface="Noto Serif Ethiopic Condensed"/>
-                <a:ea typeface="Noto Serif Ethiopic Condensed"/>
-                <a:cs typeface="Noto Serif Ethiopic Condensed"/>
-                <a:sym typeface="Noto Serif Ethiopic Condensed"/>
-              </a:rPr>
-              <a:t>Core AI pipeline is fully functional; integrating with Django frontend.</a:t>
+              <a:t>: Core AI pipeline is fully functional; integrating with Django frontend.</a:t>
             </a:r>
           </a:p>
           <a:p>
@@ -7952,17 +6746,26 @@
                 <a:spcPts val="4620"/>
               </a:lnSpc>
             </a:pPr>
-          </a:p>
-        </p:txBody>
-      </p:sp>
-      <p:sp>
-        <p:nvSpPr>
-          <p:cNvPr name="Freeform 4" id="4"/>
+            <a:endParaRPr lang="en-US" sz="3300">
+              <a:solidFill>
+                <a:srgbClr val="000000"/>
+              </a:solidFill>
+              <a:latin typeface="Noto Serif Ethiopic Condensed"/>
+              <a:ea typeface="Noto Serif Ethiopic Condensed"/>
+              <a:cs typeface="Noto Serif Ethiopic Condensed"/>
+              <a:sym typeface="Noto Serif Ethiopic Condensed"/>
+            </a:endParaRPr>
+          </a:p>
+        </p:txBody>
+      </p:sp>
+      <p:sp>
+        <p:nvSpPr>
+          <p:cNvPr id="4" name="Freeform 4"/>
           <p:cNvSpPr/>
           <p:nvPr/>
         </p:nvSpPr>
         <p:spPr>
-          <a:xfrm flipH="false" flipV="false" rot="0">
+          <a:xfrm>
             <a:off x="1439033" y="846328"/>
             <a:ext cx="1038708" cy="1038708"/>
           </a:xfrm>
@@ -7971,9 +6774,9 @@
             <a:gdLst/>
             <a:ahLst/>
             <a:cxnLst/>
-            <a:rect r="r" b="b" t="t" l="l"/>
+            <a:rect l="l" t="t" r="r" b="b"/>
             <a:pathLst>
-              <a:path h="1038708" w="1038708">
+              <a:path w="1038708" h="1038708">
                 <a:moveTo>
                   <a:pt x="0" y="0"/>
                 </a:moveTo>
@@ -7996,19 +6799,26 @@
           <a:blipFill>
             <a:blip r:embed="rId3"/>
             <a:stretch>
-              <a:fillRect l="0" t="0" r="0" b="0"/>
+              <a:fillRect/>
             </a:stretch>
           </a:blipFill>
         </p:spPr>
-      </p:sp>
-      <p:sp>
-        <p:nvSpPr>
-          <p:cNvPr name="TextBox 5" id="5"/>
-          <p:cNvSpPr txBox="true"/>
+        <p:txBody>
+          <a:bodyPr/>
+          <a:lstStyle/>
+          <a:p>
+            <a:endParaRPr lang="en-IN"/>
+          </a:p>
+        </p:txBody>
+      </p:sp>
+      <p:sp>
+        <p:nvSpPr>
+          <p:cNvPr id="5" name="TextBox 5"/>
+          <p:cNvSpPr txBox="1"/>
           <p:nvPr/>
         </p:nvSpPr>
         <p:spPr>
-          <a:xfrm rot="0">
+          <a:xfrm>
             <a:off x="1439033" y="1022338"/>
             <a:ext cx="13782434" cy="795020"/>
           </a:xfrm>
@@ -8017,7 +6827,7 @@
           </a:prstGeom>
         </p:spPr>
         <p:txBody>
-          <a:bodyPr anchor="t" rtlCol="false" tIns="0" lIns="0" bIns="0" rIns="0">
+          <a:bodyPr lIns="0" tIns="0" rIns="0" bIns="0" rtlCol="0" anchor="t">
             <a:spAutoFit/>
           </a:bodyPr>
           <a:lstStyle/>
@@ -8054,13 +6864,14 @@
 </file>
 
 <file path=ppt/slides/slide6.xml><?xml version="1.0" encoding="utf-8"?>
-<p:sld xmlns:p="http://schemas.openxmlformats.org/presentationml/2006/main" xmlns:a="http://schemas.openxmlformats.org/drawingml/2006/main" xmlns:r="http://schemas.openxmlformats.org/officeDocument/2006/relationships">
+<p:sld xmlns:a="http://schemas.openxmlformats.org/drawingml/2006/main" xmlns:r="http://schemas.openxmlformats.org/officeDocument/2006/relationships" xmlns:p="http://schemas.openxmlformats.org/presentationml/2006/main">
   <p:cSld>
     <p:bg>
       <p:bgPr>
         <a:solidFill>
           <a:srgbClr val="EBF2FA"/>
         </a:solidFill>
+        <a:effectLst/>
       </p:bgPr>
     </p:bg>
     <p:spTree>
@@ -8079,12 +6890,12 @@
       </p:grpSpPr>
       <p:sp>
         <p:nvSpPr>
-          <p:cNvPr name="Freeform 2" id="2"/>
+          <p:cNvPr id="2" name="Freeform 2"/>
           <p:cNvSpPr/>
           <p:nvPr/>
         </p:nvSpPr>
         <p:spPr>
-          <a:xfrm flipH="false" flipV="false" rot="0">
+          <a:xfrm>
             <a:off x="7507652" y="3507152"/>
             <a:ext cx="3272697" cy="3272697"/>
           </a:xfrm>
@@ -8093,9 +6904,9 @@
             <a:gdLst/>
             <a:ahLst/>
             <a:cxnLst/>
-            <a:rect r="r" b="b" t="t" l="l"/>
+            <a:rect l="l" t="t" r="r" b="b"/>
             <a:pathLst>
-              <a:path h="3272697" w="3272697">
+              <a:path w="3272697" h="3272697">
                 <a:moveTo>
                   <a:pt x="0" y="0"/>
                 </a:moveTo>
@@ -8118,749 +6929,17 @@
           <a:blipFill>
             <a:blip r:embed="rId2"/>
             <a:stretch>
-              <a:fillRect l="0" t="0" r="0" b="0"/>
+              <a:fillRect/>
             </a:stretch>
           </a:blipFill>
         </p:spPr>
-      </p:sp>
-    </p:spTree>
-  </p:cSld>
-  <p:clrMapOvr>
-    <a:masterClrMapping/>
-  </p:clrMapOvr>
-</p:sld>
-</file>
-
-<file path=ppt/slides/slide7.xml><?xml version="1.0" encoding="utf-8"?>
-<p:sld xmlns:p="http://schemas.openxmlformats.org/presentationml/2006/main" xmlns:a="http://schemas.openxmlformats.org/drawingml/2006/main" xmlns:r="http://schemas.openxmlformats.org/officeDocument/2006/relationships">
-  <p:cSld>
-    <p:bg>
-      <p:bgPr>
-        <a:solidFill>
-          <a:srgbClr val="EBF2FA"/>
-        </a:solidFill>
-      </p:bgPr>
-    </p:bg>
-    <p:spTree>
-      <p:nvGrpSpPr>
-        <p:cNvPr id="1" name=""/>
-        <p:cNvGrpSpPr/>
-        <p:nvPr/>
-      </p:nvGrpSpPr>
-      <p:grpSpPr>
-        <a:xfrm>
-          <a:off x="0" y="0"/>
-          <a:ext cx="0" cy="0"/>
-          <a:chOff x="0" y="0"/>
-          <a:chExt cx="0" cy="0"/>
-        </a:xfrm>
-      </p:grpSpPr>
-      <p:sp>
-        <p:nvSpPr>
-          <p:cNvPr name="Freeform 2" id="2"/>
-          <p:cNvSpPr/>
-          <p:nvPr/>
-        </p:nvSpPr>
-        <p:spPr>
-          <a:xfrm flipH="false" flipV="false" rot="0">
-            <a:off x="2562166" y="87828"/>
-            <a:ext cx="13163669" cy="10111343"/>
-          </a:xfrm>
-          <a:custGeom>
-            <a:avLst/>
-            <a:gdLst/>
-            <a:ahLst/>
-            <a:cxnLst/>
-            <a:rect r="r" b="b" t="t" l="l"/>
-            <a:pathLst>
-              <a:path h="10111343" w="13163669">
-                <a:moveTo>
-                  <a:pt x="0" y="0"/>
-                </a:moveTo>
-                <a:lnTo>
-                  <a:pt x="13163668" y="0"/>
-                </a:lnTo>
-                <a:lnTo>
-                  <a:pt x="13163668" y="10111344"/>
-                </a:lnTo>
-                <a:lnTo>
-                  <a:pt x="0" y="10111344"/>
-                </a:lnTo>
-                <a:lnTo>
-                  <a:pt x="0" y="0"/>
-                </a:lnTo>
-                <a:close/>
-              </a:path>
-            </a:pathLst>
-          </a:custGeom>
-          <a:blipFill>
-            <a:blip r:embed="rId2"/>
-            <a:stretch>
-              <a:fillRect l="0" t="0" r="0" b="0"/>
-            </a:stretch>
-          </a:blipFill>
-        </p:spPr>
-      </p:sp>
-      <p:sp>
-        <p:nvSpPr>
-          <p:cNvPr name="TextBox 3" id="3"/>
-          <p:cNvSpPr txBox="true"/>
-          <p:nvPr/>
-        </p:nvSpPr>
-        <p:spPr>
-          <a:xfrm rot="0">
-            <a:off x="2562166" y="2103"/>
-            <a:ext cx="6126798" cy="795021"/>
-          </a:xfrm>
-          <a:prstGeom prst="rect">
-            <a:avLst/>
-          </a:prstGeom>
-        </p:spPr>
-        <p:txBody>
-          <a:bodyPr anchor="t" rtlCol="false" tIns="0" lIns="0" bIns="0" rIns="0">
-            <a:spAutoFit/>
-          </a:bodyPr>
-          <a:lstStyle/>
-          <a:p>
-            <a:pPr algn="ctr">
-              <a:lnSpc>
-                <a:spcPts val="6579"/>
-              </a:lnSpc>
-              <a:spcBef>
-                <a:spcPct val="0"/>
-              </a:spcBef>
-            </a:pPr>
-            <a:r>
-              <a:rPr lang="en-US" sz="4699">
-                <a:solidFill>
-                  <a:srgbClr val="000000"/>
-                </a:solidFill>
-                <a:latin typeface="Noto Serif Ethiopic Condensed"/>
-                <a:ea typeface="Noto Serif Ethiopic Condensed"/>
-                <a:cs typeface="Noto Serif Ethiopic Condensed"/>
-                <a:sym typeface="Noto Serif Ethiopic Condensed"/>
-              </a:rPr>
-              <a:t>Initial Wireframe Design</a:t>
-            </a:r>
-          </a:p>
-        </p:txBody>
-      </p:sp>
-    </p:spTree>
-  </p:cSld>
-  <p:clrMapOvr>
-    <a:masterClrMapping/>
-  </p:clrMapOvr>
-</p:sld>
-</file>
-
-<file path=ppt/slides/slide8.xml><?xml version="1.0" encoding="utf-8"?>
-<p:sld xmlns:p="http://schemas.openxmlformats.org/presentationml/2006/main" xmlns:a="http://schemas.openxmlformats.org/drawingml/2006/main" show="false">
-  <p:cSld>
-    <p:bg>
-      <p:bgPr>
-        <a:solidFill>
-          <a:srgbClr val="EBF2FA"/>
-        </a:solidFill>
-      </p:bgPr>
-    </p:bg>
-    <p:spTree>
-      <p:nvGrpSpPr>
-        <p:cNvPr id="1" name=""/>
-        <p:cNvGrpSpPr/>
-        <p:nvPr/>
-      </p:nvGrpSpPr>
-      <p:grpSpPr>
-        <a:xfrm>
-          <a:off x="0" y="0"/>
-          <a:ext cx="0" cy="0"/>
-          <a:chOff x="0" y="0"/>
-          <a:chExt cx="0" cy="0"/>
-        </a:xfrm>
-      </p:grpSpPr>
-      <p:sp>
-        <p:nvSpPr>
-          <p:cNvPr name="TextBox 2" id="2"/>
-          <p:cNvSpPr txBox="true"/>
-          <p:nvPr/>
-        </p:nvSpPr>
-        <p:spPr>
-          <a:xfrm rot="0">
-            <a:off x="3060510" y="1489566"/>
-            <a:ext cx="12166981" cy="6374131"/>
-          </a:xfrm>
-          <a:prstGeom prst="rect">
-            <a:avLst/>
-          </a:prstGeom>
-        </p:spPr>
-        <p:txBody>
-          <a:bodyPr anchor="t" rtlCol="false" tIns="0" lIns="0" bIns="0" rIns="0">
-            <a:spAutoFit/>
-          </a:bodyPr>
-          <a:lstStyle/>
-          <a:p>
-            <a:pPr algn="l">
-              <a:lnSpc>
-                <a:spcPts val="4620"/>
-              </a:lnSpc>
-            </a:pPr>
-            <a:r>
-              <a:rPr lang="en-US" b="true" sz="3300">
-                <a:solidFill>
-                  <a:srgbClr val="000000"/>
-                </a:solidFill>
-                <a:latin typeface="Noto Serif Ethiopic Condensed Bold"/>
-                <a:ea typeface="Noto Serif Ethiopic Condensed Bold"/>
-                <a:cs typeface="Noto Serif Ethiopic Condensed Bold"/>
-                <a:sym typeface="Noto Serif Ethiopic Condensed Bold"/>
-              </a:rPr>
-              <a:t>Target Beneficiaries</a:t>
-            </a:r>
-          </a:p>
-          <a:p>
-            <a:pPr algn="l" marL="712470" indent="-356235" lvl="1">
-              <a:lnSpc>
-                <a:spcPts val="4620"/>
-              </a:lnSpc>
-              <a:buFont typeface="Arial"/>
-              <a:buChar char="•"/>
-            </a:pPr>
-            <a:r>
-              <a:rPr lang="en-US" sz="3300">
-                <a:solidFill>
-                  <a:srgbClr val="000000"/>
-                </a:solidFill>
-                <a:latin typeface="Noto Serif Ethiopic Condensed"/>
-                <a:ea typeface="Noto Serif Ethiopic Condensed"/>
-                <a:cs typeface="Noto Serif Ethiopic Condensed"/>
-                <a:sym typeface="Noto Serif Ethiopic Condensed"/>
-              </a:rPr>
-              <a:t>Individual farmers</a:t>
-            </a:r>
-          </a:p>
-          <a:p>
-            <a:pPr algn="l" marL="712470" indent="-356235" lvl="1">
-              <a:lnSpc>
-                <a:spcPts val="4620"/>
-              </a:lnSpc>
-              <a:buFont typeface="Arial"/>
-              <a:buChar char="•"/>
-            </a:pPr>
-            <a:r>
-              <a:rPr lang="en-US" sz="3300">
-                <a:solidFill>
-                  <a:srgbClr val="000000"/>
-                </a:solidFill>
-                <a:latin typeface="Noto Serif Ethiopic Condensed"/>
-                <a:ea typeface="Noto Serif Ethiopic Condensed"/>
-                <a:cs typeface="Noto Serif Ethiopic Condensed"/>
-                <a:sym typeface="Noto Serif Ethiopic Condensed"/>
-              </a:rPr>
-              <a:t>Farmer Producer Organizations (FPOs)</a:t>
-            </a:r>
-          </a:p>
-          <a:p>
-            <a:pPr algn="l" marL="712470" indent="-356235" lvl="1">
-              <a:lnSpc>
-                <a:spcPts val="4620"/>
-              </a:lnSpc>
-              <a:buFont typeface="Arial"/>
-              <a:buChar char="•"/>
-            </a:pPr>
-            <a:r>
-              <a:rPr lang="en-US" sz="3300">
-                <a:solidFill>
-                  <a:srgbClr val="000000"/>
-                </a:solidFill>
-                <a:latin typeface="Noto Serif Ethiopic Condensed"/>
-                <a:ea typeface="Noto Serif Ethiopic Condensed"/>
-                <a:cs typeface="Noto Serif Ethiopic Condensed"/>
-                <a:sym typeface="Noto Serif Ethiopic Condensed"/>
-              </a:rPr>
-              <a:t>Rural microfinance institutions</a:t>
-            </a:r>
-          </a:p>
-          <a:p>
-            <a:pPr algn="l" marL="712470" indent="-356235" lvl="1">
-              <a:lnSpc>
-                <a:spcPts val="4620"/>
-              </a:lnSpc>
-              <a:buFont typeface="Arial"/>
-              <a:buChar char="•"/>
-            </a:pPr>
-            <a:r>
-              <a:rPr lang="en-US" sz="3300">
-                <a:solidFill>
-                  <a:srgbClr val="000000"/>
-                </a:solidFill>
-                <a:latin typeface="Noto Serif Ethiopic Condensed"/>
-                <a:ea typeface="Noto Serif Ethiopic Condensed"/>
-                <a:cs typeface="Noto Serif Ethiopic Condensed"/>
-                <a:sym typeface="Noto Serif Ethiopic Condensed"/>
-              </a:rPr>
-              <a:t>Agricultural cooperatives and banks</a:t>
-            </a:r>
-          </a:p>
-          <a:p>
-            <a:pPr algn="l">
-              <a:lnSpc>
-                <a:spcPts val="4620"/>
-              </a:lnSpc>
-              <a:spcBef>
-                <a:spcPct val="0"/>
-              </a:spcBef>
-            </a:pPr>
-            <a:r>
-              <a:rPr lang="en-US" b="true" sz="3300">
-                <a:solidFill>
-                  <a:srgbClr val="000000"/>
-                </a:solidFill>
-                <a:latin typeface="Noto Serif Ethiopic Condensed Bold"/>
-                <a:ea typeface="Noto Serif Ethiopic Condensed Bold"/>
-                <a:cs typeface="Noto Serif Ethiopic Condensed Bold"/>
-                <a:sym typeface="Noto Serif Ethiopic Condensed Bold"/>
-              </a:rPr>
-              <a:t>Significance</a:t>
-            </a:r>
-          </a:p>
-          <a:p>
-            <a:pPr algn="l" marL="712470" indent="-356235" lvl="1">
-              <a:lnSpc>
-                <a:spcPts val="4620"/>
-              </a:lnSpc>
-              <a:buFont typeface="Arial"/>
-              <a:buChar char="•"/>
-            </a:pPr>
-            <a:r>
-              <a:rPr lang="en-US" sz="3300">
-                <a:solidFill>
-                  <a:srgbClr val="000000"/>
-                </a:solidFill>
-                <a:latin typeface="Noto Serif Ethiopic Condensed"/>
-                <a:ea typeface="Noto Serif Ethiopic Condensed"/>
-                <a:cs typeface="Noto Serif Ethiopic Condensed"/>
-                <a:sym typeface="Noto Serif Ethiopic Condensed"/>
-              </a:rPr>
-              <a:t>Over 65% of Indian farmers lack access to formal credit.</a:t>
-            </a:r>
-          </a:p>
-          <a:p>
-            <a:pPr algn="l" marL="712470" indent="-356235" lvl="1">
-              <a:lnSpc>
-                <a:spcPts val="4620"/>
-              </a:lnSpc>
-              <a:buFont typeface="Arial"/>
-              <a:buChar char="•"/>
-            </a:pPr>
-            <a:r>
-              <a:rPr lang="en-US" sz="3300">
-                <a:solidFill>
-                  <a:srgbClr val="000000"/>
-                </a:solidFill>
-                <a:latin typeface="Noto Serif Ethiopic Condensed"/>
-                <a:ea typeface="Noto Serif Ethiopic Condensed"/>
-                <a:cs typeface="Noto Serif Ethiopic Condensed"/>
-                <a:sym typeface="Noto Serif Ethiopic Condensed"/>
-              </a:rPr>
-              <a:t>Unpredictable weather and lack of risk evaluation tools worsen financial instability.</a:t>
-            </a:r>
-          </a:p>
-          <a:p>
-            <a:pPr algn="l" marL="712470" indent="-356235" lvl="1">
-              <a:lnSpc>
-                <a:spcPts val="4620"/>
-              </a:lnSpc>
-              <a:buFont typeface="Arial"/>
-              <a:buChar char="•"/>
-            </a:pPr>
-            <a:r>
-              <a:rPr lang="en-US" sz="3300">
-                <a:solidFill>
-                  <a:srgbClr val="000000"/>
-                </a:solidFill>
-                <a:latin typeface="Noto Serif Ethiopic Condensed"/>
-                <a:ea typeface="Noto Serif Ethiopic Condensed"/>
-                <a:cs typeface="Noto Serif Ethiopic Condensed"/>
-                <a:sym typeface="Noto Serif Ethiopic Condensed"/>
-              </a:rPr>
-              <a:t>Empowering farmers with fair credit scores ensures financial inclusion and climate resilience.</a:t>
-            </a:r>
-          </a:p>
-        </p:txBody>
-      </p:sp>
-    </p:spTree>
-  </p:cSld>
-  <p:clrMapOvr>
-    <a:masterClrMapping/>
-  </p:clrMapOvr>
-</p:sld>
-</file>
-
-<file path=ppt/slides/slide9.xml><?xml version="1.0" encoding="utf-8"?>
-<p:sld xmlns:p="http://schemas.openxmlformats.org/presentationml/2006/main" xmlns:a="http://schemas.openxmlformats.org/drawingml/2006/main" xmlns:r="http://schemas.openxmlformats.org/officeDocument/2006/relationships" show="false">
-  <p:cSld>
-    <p:bg>
-      <p:bgPr>
-        <a:solidFill>
-          <a:srgbClr val="EBF2FA"/>
-        </a:solidFill>
-      </p:bgPr>
-    </p:bg>
-    <p:spTree>
-      <p:nvGrpSpPr>
-        <p:cNvPr id="1" name=""/>
-        <p:cNvGrpSpPr/>
-        <p:nvPr/>
-      </p:nvGrpSpPr>
-      <p:grpSpPr>
-        <a:xfrm>
-          <a:off x="0" y="0"/>
-          <a:ext cx="0" cy="0"/>
-          <a:chOff x="0" y="0"/>
-          <a:chExt cx="0" cy="0"/>
-        </a:xfrm>
-      </p:grpSpPr>
-      <p:sp>
-        <p:nvSpPr>
-          <p:cNvPr name="TextBox 2" id="2"/>
-          <p:cNvSpPr txBox="true"/>
-          <p:nvPr/>
-        </p:nvSpPr>
-        <p:spPr>
-          <a:xfrm rot="0">
-            <a:off x="2095772" y="908735"/>
-            <a:ext cx="7505700" cy="795021"/>
-          </a:xfrm>
-          <a:prstGeom prst="rect">
-            <a:avLst/>
-          </a:prstGeom>
-        </p:spPr>
-        <p:txBody>
-          <a:bodyPr anchor="t" rtlCol="false" tIns="0" lIns="0" bIns="0" rIns="0">
-            <a:spAutoFit/>
-          </a:bodyPr>
-          <a:lstStyle/>
-          <a:p>
-            <a:pPr algn="ctr">
-              <a:lnSpc>
-                <a:spcPts val="6579"/>
-              </a:lnSpc>
-              <a:spcBef>
-                <a:spcPct val="0"/>
-              </a:spcBef>
-            </a:pPr>
-            <a:r>
-              <a:rPr lang="en-US" sz="4699">
-                <a:solidFill>
-                  <a:srgbClr val="000000"/>
-                </a:solidFill>
-                <a:latin typeface="Noto Serif Ethiopic Condensed"/>
-                <a:ea typeface="Noto Serif Ethiopic Condensed"/>
-                <a:cs typeface="Noto Serif Ethiopic Condensed"/>
-                <a:sym typeface="Noto Serif Ethiopic Condensed"/>
-              </a:rPr>
-              <a:t>Value Proposition &amp; Its Impact</a:t>
-            </a:r>
-          </a:p>
-        </p:txBody>
-      </p:sp>
-      <p:sp>
-        <p:nvSpPr>
-          <p:cNvPr name="TextBox 3" id="3"/>
-          <p:cNvSpPr txBox="true"/>
-          <p:nvPr/>
-        </p:nvSpPr>
-        <p:spPr>
-          <a:xfrm rot="0">
-            <a:off x="1879960" y="1941881"/>
-            <a:ext cx="14528080" cy="7536180"/>
-          </a:xfrm>
-          <a:prstGeom prst="rect">
-            <a:avLst/>
-          </a:prstGeom>
-        </p:spPr>
-        <p:txBody>
-          <a:bodyPr anchor="t" rtlCol="false" tIns="0" lIns="0" bIns="0" rIns="0">
-            <a:spAutoFit/>
-          </a:bodyPr>
-          <a:lstStyle/>
-          <a:p>
-            <a:pPr algn="l">
-              <a:lnSpc>
-                <a:spcPts val="4620"/>
-              </a:lnSpc>
-            </a:pPr>
-            <a:r>
-              <a:rPr lang="en-US" sz="3300" b="true">
-                <a:solidFill>
-                  <a:srgbClr val="000000"/>
-                </a:solidFill>
-                <a:latin typeface="Noto Serif Ethiopic Condensed Bold"/>
-                <a:ea typeface="Noto Serif Ethiopic Condensed Bold"/>
-                <a:cs typeface="Noto Serif Ethiopic Condensed Bold"/>
-                <a:sym typeface="Noto Serif Ethiopic Condensed Bold"/>
-              </a:rPr>
-              <a:t>Impact</a:t>
-            </a:r>
-          </a:p>
-          <a:p>
-            <a:pPr algn="l" marL="712470" indent="-356235" lvl="1">
-              <a:lnSpc>
-                <a:spcPts val="4620"/>
-              </a:lnSpc>
-              <a:buFont typeface="Arial"/>
-              <a:buChar char="•"/>
-            </a:pPr>
-            <a:r>
-              <a:rPr lang="en-US" sz="3300">
-                <a:solidFill>
-                  <a:srgbClr val="000000"/>
-                </a:solidFill>
-                <a:latin typeface="Noto Serif Ethiopic Condensed"/>
-                <a:ea typeface="Noto Serif Ethiopic Condensed"/>
-                <a:cs typeface="Noto Serif Ethiopic Condensed"/>
-                <a:sym typeface="Noto Serif Ethiopic Condensed"/>
-              </a:rPr>
-              <a:t>Gives banks data-driven confidence to lend to rural farmers.</a:t>
-            </a:r>
-          </a:p>
-          <a:p>
-            <a:pPr algn="l" marL="712470" indent="-356235" lvl="1">
-              <a:lnSpc>
-                <a:spcPts val="4620"/>
-              </a:lnSpc>
-              <a:buFont typeface="Arial"/>
-              <a:buChar char="•"/>
-            </a:pPr>
-            <a:r>
-              <a:rPr lang="en-US" sz="3300">
-                <a:solidFill>
-                  <a:srgbClr val="000000"/>
-                </a:solidFill>
-                <a:latin typeface="Noto Serif Ethiopic Condensed"/>
-                <a:ea typeface="Noto Serif Ethiopic Condensed"/>
-                <a:cs typeface="Noto Serif Ethiopic Condensed"/>
-                <a:sym typeface="Noto Serif Ethiopic Condensed"/>
-              </a:rPr>
-              <a:t>Provides farmers with transparent and fair access to credit.</a:t>
-            </a:r>
-          </a:p>
-          <a:p>
-            <a:pPr algn="l">
-              <a:lnSpc>
-                <a:spcPts val="4620"/>
-              </a:lnSpc>
-              <a:spcBef>
-                <a:spcPct val="0"/>
-              </a:spcBef>
-            </a:pPr>
-            <a:r>
-              <a:rPr lang="en-US" b="true" sz="3300">
-                <a:solidFill>
-                  <a:srgbClr val="000000"/>
-                </a:solidFill>
-                <a:latin typeface="Noto Serif Ethiopic Condensed Bold"/>
-                <a:ea typeface="Noto Serif Ethiopic Condensed Bold"/>
-                <a:cs typeface="Noto Serif Ethiopic Condensed Bold"/>
-                <a:sym typeface="Noto Serif Ethiopic Condensed Bold"/>
-              </a:rPr>
-              <a:t>Key Benefits</a:t>
-            </a:r>
-          </a:p>
-          <a:p>
-            <a:pPr algn="l" marL="712470" indent="-356235" lvl="1">
-              <a:lnSpc>
-                <a:spcPts val="4620"/>
-              </a:lnSpc>
-              <a:buFont typeface="Arial"/>
-              <a:buChar char="•"/>
-            </a:pPr>
-            <a:r>
-              <a:rPr lang="en-US" sz="3300">
-                <a:solidFill>
-                  <a:srgbClr val="000000"/>
-                </a:solidFill>
-                <a:latin typeface="Noto Serif Ethiopic Condensed"/>
-                <a:ea typeface="Noto Serif Ethiopic Condensed"/>
-                <a:cs typeface="Noto Serif Ethiopic Condensed"/>
-                <a:sym typeface="Noto Serif Ethiopic Condensed"/>
-              </a:rPr>
-              <a:t> Improved credit access for unbanked farmers.</a:t>
-            </a:r>
-          </a:p>
-          <a:p>
-            <a:pPr algn="l" marL="712470" indent="-356235" lvl="1">
-              <a:lnSpc>
-                <a:spcPts val="4620"/>
-              </a:lnSpc>
-              <a:buFont typeface="Arial"/>
-              <a:buChar char="•"/>
-            </a:pPr>
-            <a:r>
-              <a:rPr lang="en-US" sz="3300">
-                <a:solidFill>
-                  <a:srgbClr val="000000"/>
-                </a:solidFill>
-                <a:latin typeface="Noto Serif Ethiopic Condensed"/>
-                <a:ea typeface="Noto Serif Ethiopic Condensed"/>
-                <a:cs typeface="Noto Serif Ethiopic Condensed"/>
-                <a:sym typeface="Noto Serif Ethiopic Condensed"/>
-              </a:rPr>
-              <a:t> Disaster-aware scoring minimizes financial losses for both banks and farmers.</a:t>
-            </a:r>
-          </a:p>
-          <a:p>
-            <a:pPr algn="l" marL="712470" indent="-356235" lvl="1">
-              <a:lnSpc>
-                <a:spcPts val="4620"/>
-              </a:lnSpc>
-              <a:buFont typeface="Arial"/>
-              <a:buChar char="•"/>
-            </a:pPr>
-            <a:r>
-              <a:rPr lang="en-US" sz="3300">
-                <a:solidFill>
-                  <a:srgbClr val="000000"/>
-                </a:solidFill>
-                <a:latin typeface="Noto Serif Ethiopic Condensed"/>
-                <a:ea typeface="Noto Serif Ethiopic Condensed"/>
-                <a:cs typeface="Noto Serif Ethiopic Condensed"/>
-                <a:sym typeface="Noto Serif Ethiopic Condensed"/>
-              </a:rPr>
-              <a:t> Secure and scalable system using AI and encryption.</a:t>
-            </a:r>
-          </a:p>
-          <a:p>
-            <a:pPr algn="l" marL="712470" indent="-356235" lvl="1">
-              <a:lnSpc>
-                <a:spcPts val="4620"/>
-              </a:lnSpc>
-              <a:buFont typeface="Arial"/>
-              <a:buChar char="•"/>
-            </a:pPr>
-            <a:r>
-              <a:rPr lang="en-US" sz="3300">
-                <a:solidFill>
-                  <a:srgbClr val="000000"/>
-                </a:solidFill>
-                <a:latin typeface="Noto Serif Ethiopic Condensed"/>
-                <a:ea typeface="Noto Serif Ethiopic Condensed"/>
-                <a:cs typeface="Noto Serif Ethiopic Condensed"/>
-                <a:sym typeface="Noto Serif Ethiopic Condensed"/>
-              </a:rPr>
-              <a:t>Climate resilience through early disaster prediction.</a:t>
-            </a:r>
-          </a:p>
-          <a:p>
-            <a:pPr algn="l">
-              <a:lnSpc>
-                <a:spcPts val="4620"/>
-              </a:lnSpc>
-              <a:spcBef>
-                <a:spcPct val="0"/>
-              </a:spcBef>
-            </a:pPr>
-            <a:r>
-              <a:rPr lang="en-US" b="true" sz="3300">
-                <a:solidFill>
-                  <a:srgbClr val="000000"/>
-                </a:solidFill>
-                <a:latin typeface="Noto Serif Ethiopic Condensed Bold"/>
-                <a:ea typeface="Noto Serif Ethiopic Condensed Bold"/>
-                <a:cs typeface="Noto Serif Ethiopic Condensed Bold"/>
-                <a:sym typeface="Noto Serif Ethiopic Condensed Bold"/>
-              </a:rPr>
-              <a:t>Uniqueness</a:t>
-            </a:r>
-          </a:p>
-          <a:p>
-            <a:pPr algn="l" marL="712470" indent="-356235" lvl="1">
-              <a:lnSpc>
-                <a:spcPts val="4620"/>
-              </a:lnSpc>
-              <a:buFont typeface="Arial"/>
-              <a:buChar char="•"/>
-            </a:pPr>
-            <a:r>
-              <a:rPr lang="en-US" sz="3300">
-                <a:solidFill>
-                  <a:srgbClr val="000000"/>
-                </a:solidFill>
-                <a:latin typeface="Noto Serif Ethiopic Condensed"/>
-                <a:ea typeface="Noto Serif Ethiopic Condensed"/>
-                <a:cs typeface="Noto Serif Ethiopic Condensed"/>
-                <a:sym typeface="Noto Serif Ethiopic Condensed"/>
-              </a:rPr>
-              <a:t>Introduces a “Disaster Prediction Parameter”, not found in existing credit scoring models.</a:t>
-            </a:r>
-          </a:p>
-          <a:p>
-            <a:pPr algn="l" marL="712470" indent="-356235" lvl="1">
-              <a:lnSpc>
-                <a:spcPts val="4620"/>
-              </a:lnSpc>
-              <a:buFont typeface="Arial"/>
-              <a:buChar char="•"/>
-            </a:pPr>
-            <a:r>
-              <a:rPr lang="en-US" sz="3300">
-                <a:solidFill>
-                  <a:srgbClr val="000000"/>
-                </a:solidFill>
-                <a:latin typeface="Noto Serif Ethiopic Condensed"/>
-                <a:ea typeface="Noto Serif Ethiopic Condensed"/>
-                <a:cs typeface="Noto Serif Ethiopic Condensed"/>
-                <a:sym typeface="Noto Serif Ethiopic Condensed"/>
-              </a:rPr>
-              <a:t>Uses alternate, non-traditional data — such as weather, tech usage, and crop patterns — to ensure fairness.</a:t>
-            </a:r>
-          </a:p>
-        </p:txBody>
-      </p:sp>
-      <p:sp>
-        <p:nvSpPr>
-          <p:cNvPr name="Freeform 4" id="4"/>
-          <p:cNvSpPr/>
-          <p:nvPr/>
-        </p:nvSpPr>
-        <p:spPr>
-          <a:xfrm flipH="false" flipV="false" rot="0">
-            <a:off x="1028700" y="501777"/>
-            <a:ext cx="2528697" cy="191832"/>
-          </a:xfrm>
-          <a:custGeom>
-            <a:avLst/>
-            <a:gdLst/>
-            <a:ahLst/>
-            <a:cxnLst/>
-            <a:rect r="r" b="b" t="t" l="l"/>
-            <a:pathLst>
-              <a:path h="191832" w="2528697">
-                <a:moveTo>
-                  <a:pt x="0" y="0"/>
-                </a:moveTo>
-                <a:lnTo>
-                  <a:pt x="2528697" y="0"/>
-                </a:lnTo>
-                <a:lnTo>
-                  <a:pt x="2528697" y="191832"/>
-                </a:lnTo>
-                <a:lnTo>
-                  <a:pt x="0" y="191832"/>
-                </a:lnTo>
-                <a:lnTo>
-                  <a:pt x="0" y="0"/>
-                </a:lnTo>
-                <a:close/>
-              </a:path>
-            </a:pathLst>
-          </a:custGeom>
-          <a:blipFill>
-            <a:blip r:embed="rId2"/>
-            <a:stretch>
-              <a:fillRect l="0" t="0" r="0" b="0"/>
-            </a:stretch>
-          </a:blipFill>
-        </p:spPr>
+        <p:txBody>
+          <a:bodyPr/>
+          <a:lstStyle/>
+          <a:p>
+            <a:endParaRPr lang="en-IN"/>
+          </a:p>
+        </p:txBody>
       </p:sp>
     </p:spTree>
   </p:cSld>
